--- a/sa_visualization/Executive Design Company Profile by Slidesgo.pptx
+++ b/sa_visualization/Executive Design Company Profile by Slidesgo.pptx
@@ -5,33 +5,41 @@
     <p:sldMasterId id="2147483675" r:id="rId1"/>
   </p:sldMasterIdLst>
   <p:notesMasterIdLst>
-    <p:notesMasterId r:id="rId6"/>
+    <p:notesMasterId r:id="rId14"/>
   </p:notesMasterIdLst>
   <p:sldIdLst>
-    <p:sldId id="256" r:id="rId2"/>
-    <p:sldId id="258" r:id="rId3"/>
-    <p:sldId id="259" r:id="rId4"/>
-    <p:sldId id="275" r:id="rId5"/>
+    <p:sldId id="277" r:id="rId2"/>
+    <p:sldId id="280" r:id="rId3"/>
+    <p:sldId id="281" r:id="rId4"/>
+    <p:sldId id="282" r:id="rId5"/>
+    <p:sldId id="283" r:id="rId6"/>
+    <p:sldId id="284" r:id="rId7"/>
+    <p:sldId id="285" r:id="rId8"/>
+    <p:sldId id="286" r:id="rId9"/>
+    <p:sldId id="287" r:id="rId10"/>
+    <p:sldId id="288" r:id="rId11"/>
+    <p:sldId id="289" r:id="rId12"/>
+    <p:sldId id="279" r:id="rId13"/>
   </p:sldIdLst>
   <p:sldSz cx="9144000" cy="5143500" type="screen16x9"/>
   <p:notesSz cx="6858000" cy="9144000"/>
   <p:embeddedFontLst>
     <p:embeddedFont>
       <p:font typeface="Akatab" panose="020B0604020202020204" charset="0"/>
-      <p:regular r:id="rId7"/>
-      <p:bold r:id="rId8"/>
+      <p:regular r:id="rId15"/>
+      <p:bold r:id="rId16"/>
     </p:embeddedFont>
     <p:embeddedFont>
       <p:font typeface="Castoro" panose="020B0604020202020204" charset="0"/>
-      <p:regular r:id="rId9"/>
-      <p:italic r:id="rId10"/>
+      <p:regular r:id="rId17"/>
+      <p:italic r:id="rId18"/>
     </p:embeddedFont>
     <p:embeddedFont>
-      <p:font typeface="Raleway" pitchFamily="2" charset="0"/>
-      <p:regular r:id="rId11"/>
-      <p:bold r:id="rId12"/>
-      <p:italic r:id="rId13"/>
-      <p:boldItalic r:id="rId14"/>
+      <p:font typeface="Consolas" panose="020B0609020204030204" pitchFamily="49" charset="0"/>
+      <p:regular r:id="rId19"/>
+      <p:bold r:id="rId20"/>
+      <p:italic r:id="rId21"/>
+      <p:boldItalic r:id="rId22"/>
     </p:embeddedFont>
   </p:embeddedFontLst>
   <p:defaultTextStyle>
@@ -816,214 +824,6 @@
   <p:cSld>
     <p:spTree>
       <p:nvGrpSpPr>
-        <p:cNvPr id="1" name="Shape 259"/>
-        <p:cNvGrpSpPr/>
-        <p:nvPr/>
-      </p:nvGrpSpPr>
-      <p:grpSpPr>
-        <a:xfrm>
-          <a:off x="0" y="0"/>
-          <a:ext cx="0" cy="0"/>
-          <a:chOff x="0" y="0"/>
-          <a:chExt cx="0" cy="0"/>
-        </a:xfrm>
-      </p:grpSpPr>
-      <p:sp>
-        <p:nvSpPr>
-          <p:cNvPr id="260" name="Google Shape;260;g54dda1946d_6_308:notes"/>
-          <p:cNvSpPr>
-            <a:spLocks noGrp="1" noRot="1" noChangeAspect="1"/>
-          </p:cNvSpPr>
-          <p:nvPr>
-            <p:ph type="sldImg" idx="2"/>
-          </p:nvPr>
-        </p:nvSpPr>
-        <p:spPr>
-          <a:xfrm>
-            <a:off x="381000" y="685800"/>
-            <a:ext cx="6096000" cy="3429000"/>
-          </a:xfrm>
-          <a:custGeom>
-            <a:avLst/>
-            <a:gdLst/>
-            <a:ahLst/>
-            <a:cxnLst/>
-            <a:rect l="l" t="t" r="r" b="b"/>
-            <a:pathLst>
-              <a:path w="120000" h="120000" extrusionOk="0">
-                <a:moveTo>
-                  <a:pt x="0" y="0"/>
-                </a:moveTo>
-                <a:lnTo>
-                  <a:pt x="120000" y="0"/>
-                </a:lnTo>
-                <a:lnTo>
-                  <a:pt x="120000" y="120000"/>
-                </a:lnTo>
-                <a:lnTo>
-                  <a:pt x="0" y="120000"/>
-                </a:lnTo>
-                <a:close/>
-              </a:path>
-            </a:pathLst>
-          </a:custGeom>
-        </p:spPr>
-      </p:sp>
-      <p:sp>
-        <p:nvSpPr>
-          <p:cNvPr id="261" name="Google Shape;261;g54dda1946d_6_308:notes"/>
-          <p:cNvSpPr txBox="1">
-            <a:spLocks noGrp="1"/>
-          </p:cNvSpPr>
-          <p:nvPr>
-            <p:ph type="body" idx="1"/>
-          </p:nvPr>
-        </p:nvSpPr>
-        <p:spPr>
-          <a:xfrm>
-            <a:off x="685800" y="4343400"/>
-            <a:ext cx="5486400" cy="4114800"/>
-          </a:xfrm>
-          <a:prstGeom prst="rect">
-            <a:avLst/>
-          </a:prstGeom>
-        </p:spPr>
-        <p:txBody>
-          <a:bodyPr spcFirstLastPara="1" wrap="square" lIns="91425" tIns="91425" rIns="91425" bIns="91425" anchor="t" anchorCtr="0">
-            <a:noAutofit/>
-          </a:bodyPr>
-          <a:lstStyle/>
-          <a:p>
-            <a:pPr marL="0" lvl="0" indent="0" algn="l" rtl="0">
-              <a:spcBef>
-                <a:spcPts val="0"/>
-              </a:spcBef>
-              <a:spcAft>
-                <a:spcPts val="0"/>
-              </a:spcAft>
-              <a:buNone/>
-            </a:pPr>
-            <a:endParaRPr/>
-          </a:p>
-        </p:txBody>
-      </p:sp>
-    </p:spTree>
-  </p:cSld>
-  <p:clrMapOvr>
-    <a:masterClrMapping/>
-  </p:clrMapOvr>
-</p:notes>
-</file>
-
-<file path=ppt/notesSlides/notesSlide3.xml><?xml version="1.0" encoding="utf-8"?>
-<p:notes xmlns:a="http://schemas.openxmlformats.org/drawingml/2006/main" xmlns:r="http://schemas.openxmlformats.org/officeDocument/2006/relationships" xmlns:p="http://schemas.openxmlformats.org/presentationml/2006/main" showMasterSp="0" showMasterPhAnim="0">
-  <p:cSld>
-    <p:spTree>
-      <p:nvGrpSpPr>
-        <p:cNvPr id="1" name="Shape 272"/>
-        <p:cNvGrpSpPr/>
-        <p:nvPr/>
-      </p:nvGrpSpPr>
-      <p:grpSpPr>
-        <a:xfrm>
-          <a:off x="0" y="0"/>
-          <a:ext cx="0" cy="0"/>
-          <a:chOff x="0" y="0"/>
-          <a:chExt cx="0" cy="0"/>
-        </a:xfrm>
-      </p:grpSpPr>
-      <p:sp>
-        <p:nvSpPr>
-          <p:cNvPr id="273" name="Google Shape;273;gd431007ba2_0_215:notes"/>
-          <p:cNvSpPr>
-            <a:spLocks noGrp="1" noRot="1" noChangeAspect="1"/>
-          </p:cNvSpPr>
-          <p:nvPr>
-            <p:ph type="sldImg" idx="2"/>
-          </p:nvPr>
-        </p:nvSpPr>
-        <p:spPr>
-          <a:xfrm>
-            <a:off x="381000" y="685800"/>
-            <a:ext cx="6096000" cy="3429000"/>
-          </a:xfrm>
-          <a:custGeom>
-            <a:avLst/>
-            <a:gdLst/>
-            <a:ahLst/>
-            <a:cxnLst/>
-            <a:rect l="l" t="t" r="r" b="b"/>
-            <a:pathLst>
-              <a:path w="120000" h="120000" extrusionOk="0">
-                <a:moveTo>
-                  <a:pt x="0" y="0"/>
-                </a:moveTo>
-                <a:lnTo>
-                  <a:pt x="120000" y="0"/>
-                </a:lnTo>
-                <a:lnTo>
-                  <a:pt x="120000" y="120000"/>
-                </a:lnTo>
-                <a:lnTo>
-                  <a:pt x="0" y="120000"/>
-                </a:lnTo>
-                <a:close/>
-              </a:path>
-            </a:pathLst>
-          </a:custGeom>
-        </p:spPr>
-      </p:sp>
-      <p:sp>
-        <p:nvSpPr>
-          <p:cNvPr id="274" name="Google Shape;274;gd431007ba2_0_215:notes"/>
-          <p:cNvSpPr txBox="1">
-            <a:spLocks noGrp="1"/>
-          </p:cNvSpPr>
-          <p:nvPr>
-            <p:ph type="body" idx="1"/>
-          </p:nvPr>
-        </p:nvSpPr>
-        <p:spPr>
-          <a:xfrm>
-            <a:off x="685800" y="4343400"/>
-            <a:ext cx="5486400" cy="4114800"/>
-          </a:xfrm>
-          <a:prstGeom prst="rect">
-            <a:avLst/>
-          </a:prstGeom>
-        </p:spPr>
-        <p:txBody>
-          <a:bodyPr spcFirstLastPara="1" wrap="square" lIns="91425" tIns="91425" rIns="91425" bIns="91425" anchor="t" anchorCtr="0">
-            <a:noAutofit/>
-          </a:bodyPr>
-          <a:lstStyle/>
-          <a:p>
-            <a:pPr marL="0" lvl="0" indent="0" algn="l" rtl="0">
-              <a:spcBef>
-                <a:spcPts val="0"/>
-              </a:spcBef>
-              <a:spcAft>
-                <a:spcPts val="0"/>
-              </a:spcAft>
-              <a:buNone/>
-            </a:pPr>
-            <a:endParaRPr/>
-          </a:p>
-        </p:txBody>
-      </p:sp>
-    </p:spTree>
-  </p:cSld>
-  <p:clrMapOvr>
-    <a:masterClrMapping/>
-  </p:clrMapOvr>
-</p:notes>
-</file>
-
-<file path=ppt/notesSlides/notesSlide4.xml><?xml version="1.0" encoding="utf-8"?>
-<p:notes xmlns:a="http://schemas.openxmlformats.org/drawingml/2006/main" xmlns:r="http://schemas.openxmlformats.org/officeDocument/2006/relationships" xmlns:p="http://schemas.openxmlformats.org/presentationml/2006/main" showMasterSp="0" showMasterPhAnim="0">
-  <p:cSld>
-    <p:spTree>
-      <p:nvGrpSpPr>
         <p:cNvPr id="1" name="Shape 557"/>
         <p:cNvGrpSpPr/>
         <p:nvPr/>
@@ -1749,500 +1549,6 @@
 </file>
 
 <file path=ppt/slideLayouts/slideLayout2.xml><?xml version="1.0" encoding="utf-8"?>
-<p:sldLayout xmlns:a="http://schemas.openxmlformats.org/drawingml/2006/main" xmlns:r="http://schemas.openxmlformats.org/officeDocument/2006/relationships" xmlns:p="http://schemas.openxmlformats.org/presentationml/2006/main" matchingName="Section header" type="secHead">
-  <p:cSld name="SECTION_HEADER">
-    <p:spTree>
-      <p:nvGrpSpPr>
-        <p:cNvPr id="1" name="Shape 19"/>
-        <p:cNvGrpSpPr/>
-        <p:nvPr/>
-      </p:nvGrpSpPr>
-      <p:grpSpPr>
-        <a:xfrm>
-          <a:off x="0" y="0"/>
-          <a:ext cx="0" cy="0"/>
-          <a:chOff x="0" y="0"/>
-          <a:chExt cx="0" cy="0"/>
-        </a:xfrm>
-      </p:grpSpPr>
-      <p:sp>
-        <p:nvSpPr>
-          <p:cNvPr id="20" name="Google Shape;20;p3"/>
-          <p:cNvSpPr/>
-          <p:nvPr/>
-        </p:nvSpPr>
-        <p:spPr>
-          <a:xfrm>
-            <a:off x="188100" y="188100"/>
-            <a:ext cx="8767800" cy="4767300"/>
-          </a:xfrm>
-          <a:prstGeom prst="rect">
-            <a:avLst/>
-          </a:prstGeom>
-          <a:solidFill>
-            <a:schemeClr val="dk1"/>
-          </a:solidFill>
-          <a:ln>
-            <a:noFill/>
-          </a:ln>
-          <a:effectLst>
-            <a:outerShdw blurRad="42863" dist="9525" algn="bl" rotWithShape="0">
-              <a:schemeClr val="dk1">
-                <a:alpha val="50000"/>
-              </a:schemeClr>
-            </a:outerShdw>
-          </a:effectLst>
-        </p:spPr>
-        <p:txBody>
-          <a:bodyPr spcFirstLastPara="1" wrap="square" lIns="91425" tIns="91425" rIns="91425" bIns="91425" anchor="ctr" anchorCtr="0">
-            <a:noAutofit/>
-          </a:bodyPr>
-          <a:lstStyle/>
-          <a:p>
-            <a:pPr marL="0" lvl="0" indent="0" algn="ctr" rtl="0">
-              <a:spcBef>
-                <a:spcPts val="0"/>
-              </a:spcBef>
-              <a:spcAft>
-                <a:spcPts val="0"/>
-              </a:spcAft>
-              <a:buNone/>
-            </a:pPr>
-            <a:endParaRPr>
-              <a:latin typeface="Akatab"/>
-              <a:ea typeface="Akatab"/>
-              <a:cs typeface="Akatab"/>
-              <a:sym typeface="Akatab"/>
-            </a:endParaRPr>
-          </a:p>
-        </p:txBody>
-      </p:sp>
-      <p:sp>
-        <p:nvSpPr>
-          <p:cNvPr id="21" name="Google Shape;21;p3"/>
-          <p:cNvSpPr txBox="1">
-            <a:spLocks noGrp="1"/>
-          </p:cNvSpPr>
-          <p:nvPr>
-            <p:ph type="title"/>
-          </p:nvPr>
-        </p:nvSpPr>
-        <p:spPr>
-          <a:xfrm>
-            <a:off x="961425" y="2680575"/>
-            <a:ext cx="4383600" cy="1723800"/>
-          </a:xfrm>
-          <a:prstGeom prst="rect">
-            <a:avLst/>
-          </a:prstGeom>
-        </p:spPr>
-        <p:txBody>
-          <a:bodyPr spcFirstLastPara="1" wrap="square" lIns="91425" tIns="91425" rIns="91425" bIns="91425" anchor="t" anchorCtr="0">
-            <a:noAutofit/>
-          </a:bodyPr>
-          <a:lstStyle>
-            <a:lvl1pPr lvl="0" algn="l">
-              <a:spcBef>
-                <a:spcPts val="0"/>
-              </a:spcBef>
-              <a:spcAft>
-                <a:spcPts val="0"/>
-              </a:spcAft>
-              <a:buClr>
-                <a:schemeClr val="lt1"/>
-              </a:buClr>
-              <a:buSzPts val="3600"/>
-              <a:buNone/>
-              <a:defRPr sz="5000">
-                <a:solidFill>
-                  <a:schemeClr val="lt1"/>
-                </a:solidFill>
-              </a:defRPr>
-            </a:lvl1pPr>
-            <a:lvl2pPr lvl="1" algn="ctr">
-              <a:spcBef>
-                <a:spcPts val="0"/>
-              </a:spcBef>
-              <a:spcAft>
-                <a:spcPts val="0"/>
-              </a:spcAft>
-              <a:buClr>
-                <a:schemeClr val="lt1"/>
-              </a:buClr>
-              <a:buSzPts val="3600"/>
-              <a:buNone/>
-              <a:defRPr sz="3600">
-                <a:solidFill>
-                  <a:schemeClr val="lt1"/>
-                </a:solidFill>
-              </a:defRPr>
-            </a:lvl2pPr>
-            <a:lvl3pPr lvl="2" algn="ctr">
-              <a:spcBef>
-                <a:spcPts val="0"/>
-              </a:spcBef>
-              <a:spcAft>
-                <a:spcPts val="0"/>
-              </a:spcAft>
-              <a:buClr>
-                <a:schemeClr val="lt1"/>
-              </a:buClr>
-              <a:buSzPts val="3600"/>
-              <a:buNone/>
-              <a:defRPr sz="3600">
-                <a:solidFill>
-                  <a:schemeClr val="lt1"/>
-                </a:solidFill>
-              </a:defRPr>
-            </a:lvl3pPr>
-            <a:lvl4pPr lvl="3" algn="ctr">
-              <a:spcBef>
-                <a:spcPts val="0"/>
-              </a:spcBef>
-              <a:spcAft>
-                <a:spcPts val="0"/>
-              </a:spcAft>
-              <a:buClr>
-                <a:schemeClr val="lt1"/>
-              </a:buClr>
-              <a:buSzPts val="3600"/>
-              <a:buNone/>
-              <a:defRPr sz="3600">
-                <a:solidFill>
-                  <a:schemeClr val="lt1"/>
-                </a:solidFill>
-              </a:defRPr>
-            </a:lvl4pPr>
-            <a:lvl5pPr lvl="4" algn="ctr">
-              <a:spcBef>
-                <a:spcPts val="0"/>
-              </a:spcBef>
-              <a:spcAft>
-                <a:spcPts val="0"/>
-              </a:spcAft>
-              <a:buClr>
-                <a:schemeClr val="lt1"/>
-              </a:buClr>
-              <a:buSzPts val="3600"/>
-              <a:buNone/>
-              <a:defRPr sz="3600">
-                <a:solidFill>
-                  <a:schemeClr val="lt1"/>
-                </a:solidFill>
-              </a:defRPr>
-            </a:lvl5pPr>
-            <a:lvl6pPr lvl="5" algn="ctr">
-              <a:spcBef>
-                <a:spcPts val="0"/>
-              </a:spcBef>
-              <a:spcAft>
-                <a:spcPts val="0"/>
-              </a:spcAft>
-              <a:buClr>
-                <a:schemeClr val="lt1"/>
-              </a:buClr>
-              <a:buSzPts val="3600"/>
-              <a:buNone/>
-              <a:defRPr sz="3600">
-                <a:solidFill>
-                  <a:schemeClr val="lt1"/>
-                </a:solidFill>
-              </a:defRPr>
-            </a:lvl6pPr>
-            <a:lvl7pPr lvl="6" algn="ctr">
-              <a:spcBef>
-                <a:spcPts val="0"/>
-              </a:spcBef>
-              <a:spcAft>
-                <a:spcPts val="0"/>
-              </a:spcAft>
-              <a:buClr>
-                <a:schemeClr val="lt1"/>
-              </a:buClr>
-              <a:buSzPts val="3600"/>
-              <a:buNone/>
-              <a:defRPr sz="3600">
-                <a:solidFill>
-                  <a:schemeClr val="lt1"/>
-                </a:solidFill>
-              </a:defRPr>
-            </a:lvl7pPr>
-            <a:lvl8pPr lvl="7" algn="ctr">
-              <a:spcBef>
-                <a:spcPts val="0"/>
-              </a:spcBef>
-              <a:spcAft>
-                <a:spcPts val="0"/>
-              </a:spcAft>
-              <a:buClr>
-                <a:schemeClr val="lt1"/>
-              </a:buClr>
-              <a:buSzPts val="3600"/>
-              <a:buNone/>
-              <a:defRPr sz="3600">
-                <a:solidFill>
-                  <a:schemeClr val="lt1"/>
-                </a:solidFill>
-              </a:defRPr>
-            </a:lvl8pPr>
-            <a:lvl9pPr lvl="8" algn="ctr">
-              <a:spcBef>
-                <a:spcPts val="0"/>
-              </a:spcBef>
-              <a:spcAft>
-                <a:spcPts val="0"/>
-              </a:spcAft>
-              <a:buClr>
-                <a:schemeClr val="lt1"/>
-              </a:buClr>
-              <a:buSzPts val="3600"/>
-              <a:buNone/>
-              <a:defRPr sz="3600">
-                <a:solidFill>
-                  <a:schemeClr val="lt1"/>
-                </a:solidFill>
-              </a:defRPr>
-            </a:lvl9pPr>
-          </a:lstStyle>
-          <a:p>
-            <a:endParaRPr/>
-          </a:p>
-        </p:txBody>
-      </p:sp>
-      <p:sp>
-        <p:nvSpPr>
-          <p:cNvPr id="22" name="Google Shape;22;p3"/>
-          <p:cNvSpPr txBox="1">
-            <a:spLocks noGrp="1"/>
-          </p:cNvSpPr>
-          <p:nvPr>
-            <p:ph type="title" idx="2" hasCustomPrompt="1"/>
-          </p:nvPr>
-        </p:nvSpPr>
-        <p:spPr>
-          <a:xfrm>
-            <a:off x="961425" y="1649425"/>
-            <a:ext cx="1032300" cy="743700"/>
-          </a:xfrm>
-          <a:prstGeom prst="rect">
-            <a:avLst/>
-          </a:prstGeom>
-          <a:noFill/>
-        </p:spPr>
-        <p:txBody>
-          <a:bodyPr spcFirstLastPara="1" wrap="square" lIns="91425" tIns="91425" rIns="91425" bIns="91425" anchor="ctr" anchorCtr="0">
-            <a:noAutofit/>
-          </a:bodyPr>
-          <a:lstStyle>
-            <a:lvl1pPr lvl="0" algn="l" rtl="0">
-              <a:spcBef>
-                <a:spcPts val="0"/>
-              </a:spcBef>
-              <a:spcAft>
-                <a:spcPts val="0"/>
-              </a:spcAft>
-              <a:buClr>
-                <a:schemeClr val="lt1"/>
-              </a:buClr>
-              <a:buSzPts val="6000"/>
-              <a:buNone/>
-              <a:defRPr sz="4500" b="0" i="1">
-                <a:solidFill>
-                  <a:schemeClr val="lt1"/>
-                </a:solidFill>
-                <a:latin typeface="Akatab"/>
-                <a:ea typeface="Akatab"/>
-                <a:cs typeface="Akatab"/>
-                <a:sym typeface="Akatab"/>
-              </a:defRPr>
-            </a:lvl1pPr>
-            <a:lvl2pPr lvl="1" algn="ctr" rtl="0">
-              <a:spcBef>
-                <a:spcPts val="0"/>
-              </a:spcBef>
-              <a:spcAft>
-                <a:spcPts val="0"/>
-              </a:spcAft>
-              <a:buClr>
-                <a:schemeClr val="lt1"/>
-              </a:buClr>
-              <a:buSzPts val="6000"/>
-              <a:buNone/>
-              <a:defRPr sz="6000">
-                <a:solidFill>
-                  <a:schemeClr val="lt1"/>
-                </a:solidFill>
-              </a:defRPr>
-            </a:lvl2pPr>
-            <a:lvl3pPr lvl="2" algn="ctr" rtl="0">
-              <a:spcBef>
-                <a:spcPts val="0"/>
-              </a:spcBef>
-              <a:spcAft>
-                <a:spcPts val="0"/>
-              </a:spcAft>
-              <a:buClr>
-                <a:schemeClr val="lt1"/>
-              </a:buClr>
-              <a:buSzPts val="6000"/>
-              <a:buNone/>
-              <a:defRPr sz="6000">
-                <a:solidFill>
-                  <a:schemeClr val="lt1"/>
-                </a:solidFill>
-              </a:defRPr>
-            </a:lvl3pPr>
-            <a:lvl4pPr lvl="3" algn="ctr" rtl="0">
-              <a:spcBef>
-                <a:spcPts val="0"/>
-              </a:spcBef>
-              <a:spcAft>
-                <a:spcPts val="0"/>
-              </a:spcAft>
-              <a:buClr>
-                <a:schemeClr val="lt1"/>
-              </a:buClr>
-              <a:buSzPts val="6000"/>
-              <a:buNone/>
-              <a:defRPr sz="6000">
-                <a:solidFill>
-                  <a:schemeClr val="lt1"/>
-                </a:solidFill>
-              </a:defRPr>
-            </a:lvl4pPr>
-            <a:lvl5pPr lvl="4" algn="ctr" rtl="0">
-              <a:spcBef>
-                <a:spcPts val="0"/>
-              </a:spcBef>
-              <a:spcAft>
-                <a:spcPts val="0"/>
-              </a:spcAft>
-              <a:buClr>
-                <a:schemeClr val="lt1"/>
-              </a:buClr>
-              <a:buSzPts val="6000"/>
-              <a:buNone/>
-              <a:defRPr sz="6000">
-                <a:solidFill>
-                  <a:schemeClr val="lt1"/>
-                </a:solidFill>
-              </a:defRPr>
-            </a:lvl5pPr>
-            <a:lvl6pPr lvl="5" algn="ctr" rtl="0">
-              <a:spcBef>
-                <a:spcPts val="0"/>
-              </a:spcBef>
-              <a:spcAft>
-                <a:spcPts val="0"/>
-              </a:spcAft>
-              <a:buClr>
-                <a:schemeClr val="lt1"/>
-              </a:buClr>
-              <a:buSzPts val="6000"/>
-              <a:buNone/>
-              <a:defRPr sz="6000">
-                <a:solidFill>
-                  <a:schemeClr val="lt1"/>
-                </a:solidFill>
-              </a:defRPr>
-            </a:lvl6pPr>
-            <a:lvl7pPr lvl="6" algn="ctr" rtl="0">
-              <a:spcBef>
-                <a:spcPts val="0"/>
-              </a:spcBef>
-              <a:spcAft>
-                <a:spcPts val="0"/>
-              </a:spcAft>
-              <a:buClr>
-                <a:schemeClr val="lt1"/>
-              </a:buClr>
-              <a:buSzPts val="6000"/>
-              <a:buNone/>
-              <a:defRPr sz="6000">
-                <a:solidFill>
-                  <a:schemeClr val="lt1"/>
-                </a:solidFill>
-              </a:defRPr>
-            </a:lvl7pPr>
-            <a:lvl8pPr lvl="7" algn="ctr" rtl="0">
-              <a:spcBef>
-                <a:spcPts val="0"/>
-              </a:spcBef>
-              <a:spcAft>
-                <a:spcPts val="0"/>
-              </a:spcAft>
-              <a:buClr>
-                <a:schemeClr val="lt1"/>
-              </a:buClr>
-              <a:buSzPts val="6000"/>
-              <a:buNone/>
-              <a:defRPr sz="6000">
-                <a:solidFill>
-                  <a:schemeClr val="lt1"/>
-                </a:solidFill>
-              </a:defRPr>
-            </a:lvl8pPr>
-            <a:lvl9pPr lvl="8" algn="ctr" rtl="0">
-              <a:spcBef>
-                <a:spcPts val="0"/>
-              </a:spcBef>
-              <a:spcAft>
-                <a:spcPts val="0"/>
-              </a:spcAft>
-              <a:buClr>
-                <a:schemeClr val="lt1"/>
-              </a:buClr>
-              <a:buSzPts val="6000"/>
-              <a:buNone/>
-              <a:defRPr sz="6000">
-                <a:solidFill>
-                  <a:schemeClr val="lt1"/>
-                </a:solidFill>
-              </a:defRPr>
-            </a:lvl9pPr>
-          </a:lstStyle>
-          <a:p>
-            <a:r>
-              <a:t>xx%</a:t>
-            </a:r>
-          </a:p>
-        </p:txBody>
-      </p:sp>
-      <p:sp>
-        <p:nvSpPr>
-          <p:cNvPr id="23" name="Google Shape;23;p3"/>
-          <p:cNvSpPr>
-            <a:spLocks noGrp="1"/>
-          </p:cNvSpPr>
-          <p:nvPr>
-            <p:ph type="pic" idx="3"/>
-          </p:nvPr>
-        </p:nvSpPr>
-        <p:spPr>
-          <a:xfrm>
-            <a:off x="5109150" y="539550"/>
-            <a:ext cx="2760600" cy="4064400"/>
-          </a:xfrm>
-          <a:prstGeom prst="roundRect">
-            <a:avLst>
-              <a:gd name="adj" fmla="val 50000"/>
-            </a:avLst>
-          </a:prstGeom>
-          <a:noFill/>
-          <a:ln>
-            <a:noFill/>
-          </a:ln>
-        </p:spPr>
-      </p:sp>
-    </p:spTree>
-  </p:cSld>
-  <p:clrMapOvr>
-    <a:masterClrMapping/>
-  </p:clrMapOvr>
-</p:sldLayout>
-</file>
-
-<file path=ppt/slideLayouts/slideLayout3.xml><?xml version="1.0" encoding="utf-8"?>
 <p:sldLayout xmlns:a="http://schemas.openxmlformats.org/drawingml/2006/main" xmlns:r="http://schemas.openxmlformats.org/officeDocument/2006/relationships" xmlns:p="http://schemas.openxmlformats.org/presentationml/2006/main" matchingName="Main point">
   <p:cSld name="MAIN_POINT">
     <p:spTree>
@@ -2612,7 +1918,7 @@
 </p:sldLayout>
 </file>
 
-<file path=ppt/slideLayouts/slideLayout4.xml><?xml version="1.0" encoding="utf-8"?>
+<file path=ppt/slideLayouts/slideLayout3.xml><?xml version="1.0" encoding="utf-8"?>
 <p:sldLayout xmlns:a="http://schemas.openxmlformats.org/drawingml/2006/main" xmlns:r="http://schemas.openxmlformats.org/officeDocument/2006/relationships" xmlns:p="http://schemas.openxmlformats.org/presentationml/2006/main" matchingName="Section title and description">
   <p:cSld name="SECTION_TITLE_AND_DESCRIPTION">
     <p:spTree>
@@ -3135,7 +2441,7 @@
 </p:sldLayout>
 </file>
 
-<file path=ppt/slideLayouts/slideLayout5.xml><?xml version="1.0" encoding="utf-8"?>
+<file path=ppt/slideLayouts/slideLayout4.xml><?xml version="1.0" encoding="utf-8"?>
 <p:sldLayout xmlns:a="http://schemas.openxmlformats.org/drawingml/2006/main" xmlns:r="http://schemas.openxmlformats.org/officeDocument/2006/relationships" xmlns:p="http://schemas.openxmlformats.org/presentationml/2006/main" matchingName="Blank" type="blank">
   <p:cSld name="BLANK">
     <p:bg>
@@ -3168,2478 +2474,7 @@
 </p:sldLayout>
 </file>
 
-<file path=ppt/slideLayouts/slideLayout6.xml><?xml version="1.0" encoding="utf-8"?>
-<p:sldLayout xmlns:a="http://schemas.openxmlformats.org/drawingml/2006/main" xmlns:r="http://schemas.openxmlformats.org/officeDocument/2006/relationships" xmlns:p="http://schemas.openxmlformats.org/presentationml/2006/main" matchingName="Table of contents">
-  <p:cSld name="BLANK_1_1_1_1_1_1">
-    <p:spTree>
-      <p:nvGrpSpPr>
-        <p:cNvPr id="1" name="Shape 88"/>
-        <p:cNvGrpSpPr/>
-        <p:nvPr/>
-      </p:nvGrpSpPr>
-      <p:grpSpPr>
-        <a:xfrm>
-          <a:off x="0" y="0"/>
-          <a:ext cx="0" cy="0"/>
-          <a:chOff x="0" y="0"/>
-          <a:chExt cx="0" cy="0"/>
-        </a:xfrm>
-      </p:grpSpPr>
-      <p:sp>
-        <p:nvSpPr>
-          <p:cNvPr id="89" name="Google Shape;89;p13"/>
-          <p:cNvSpPr/>
-          <p:nvPr/>
-        </p:nvSpPr>
-        <p:spPr>
-          <a:xfrm>
-            <a:off x="188100" y="188100"/>
-            <a:ext cx="8767800" cy="4767300"/>
-          </a:xfrm>
-          <a:prstGeom prst="rect">
-            <a:avLst/>
-          </a:prstGeom>
-          <a:solidFill>
-            <a:schemeClr val="accent4"/>
-          </a:solidFill>
-          <a:ln>
-            <a:noFill/>
-          </a:ln>
-          <a:effectLst>
-            <a:outerShdw blurRad="42863" dist="9525" algn="bl" rotWithShape="0">
-              <a:schemeClr val="dk2">
-                <a:alpha val="50000"/>
-              </a:schemeClr>
-            </a:outerShdw>
-          </a:effectLst>
-        </p:spPr>
-        <p:txBody>
-          <a:bodyPr spcFirstLastPara="1" wrap="square" lIns="91425" tIns="91425" rIns="91425" bIns="91425" anchor="ctr" anchorCtr="0">
-            <a:noAutofit/>
-          </a:bodyPr>
-          <a:lstStyle/>
-          <a:p>
-            <a:pPr marL="0" lvl="0" indent="0" algn="ctr" rtl="0">
-              <a:spcBef>
-                <a:spcPts val="0"/>
-              </a:spcBef>
-              <a:spcAft>
-                <a:spcPts val="0"/>
-              </a:spcAft>
-              <a:buNone/>
-            </a:pPr>
-            <a:endParaRPr>
-              <a:latin typeface="Akatab"/>
-              <a:ea typeface="Akatab"/>
-              <a:cs typeface="Akatab"/>
-              <a:sym typeface="Akatab"/>
-            </a:endParaRPr>
-          </a:p>
-        </p:txBody>
-      </p:sp>
-      <p:sp>
-        <p:nvSpPr>
-          <p:cNvPr id="90" name="Google Shape;90;p13"/>
-          <p:cNvSpPr txBox="1">
-            <a:spLocks noGrp="1"/>
-          </p:cNvSpPr>
-          <p:nvPr>
-            <p:ph type="title"/>
-          </p:nvPr>
-        </p:nvSpPr>
-        <p:spPr>
-          <a:xfrm>
-            <a:off x="720000" y="445025"/>
-            <a:ext cx="7704000" cy="572700"/>
-          </a:xfrm>
-          <a:prstGeom prst="rect">
-            <a:avLst/>
-          </a:prstGeom>
-        </p:spPr>
-        <p:txBody>
-          <a:bodyPr spcFirstLastPara="1" wrap="square" lIns="91425" tIns="91425" rIns="91425" bIns="91425" anchor="t" anchorCtr="0">
-            <a:noAutofit/>
-          </a:bodyPr>
-          <a:lstStyle>
-            <a:lvl1pPr lvl="0" rtl="0">
-              <a:spcBef>
-                <a:spcPts val="0"/>
-              </a:spcBef>
-              <a:spcAft>
-                <a:spcPts val="0"/>
-              </a:spcAft>
-              <a:buSzPts val="3000"/>
-              <a:buNone/>
-              <a:defRPr/>
-            </a:lvl1pPr>
-            <a:lvl2pPr lvl="1" rtl="0">
-              <a:spcBef>
-                <a:spcPts val="0"/>
-              </a:spcBef>
-              <a:spcAft>
-                <a:spcPts val="0"/>
-              </a:spcAft>
-              <a:buSzPts val="3000"/>
-              <a:buNone/>
-              <a:defRPr/>
-            </a:lvl2pPr>
-            <a:lvl3pPr lvl="2" rtl="0">
-              <a:spcBef>
-                <a:spcPts val="0"/>
-              </a:spcBef>
-              <a:spcAft>
-                <a:spcPts val="0"/>
-              </a:spcAft>
-              <a:buSzPts val="3000"/>
-              <a:buNone/>
-              <a:defRPr/>
-            </a:lvl3pPr>
-            <a:lvl4pPr lvl="3" rtl="0">
-              <a:spcBef>
-                <a:spcPts val="0"/>
-              </a:spcBef>
-              <a:spcAft>
-                <a:spcPts val="0"/>
-              </a:spcAft>
-              <a:buSzPts val="3000"/>
-              <a:buNone/>
-              <a:defRPr/>
-            </a:lvl4pPr>
-            <a:lvl5pPr lvl="4" rtl="0">
-              <a:spcBef>
-                <a:spcPts val="0"/>
-              </a:spcBef>
-              <a:spcAft>
-                <a:spcPts val="0"/>
-              </a:spcAft>
-              <a:buSzPts val="3000"/>
-              <a:buNone/>
-              <a:defRPr/>
-            </a:lvl5pPr>
-            <a:lvl6pPr lvl="5" rtl="0">
-              <a:spcBef>
-                <a:spcPts val="0"/>
-              </a:spcBef>
-              <a:spcAft>
-                <a:spcPts val="0"/>
-              </a:spcAft>
-              <a:buSzPts val="3000"/>
-              <a:buNone/>
-              <a:defRPr/>
-            </a:lvl6pPr>
-            <a:lvl7pPr lvl="6" rtl="0">
-              <a:spcBef>
-                <a:spcPts val="0"/>
-              </a:spcBef>
-              <a:spcAft>
-                <a:spcPts val="0"/>
-              </a:spcAft>
-              <a:buSzPts val="3000"/>
-              <a:buNone/>
-              <a:defRPr/>
-            </a:lvl7pPr>
-            <a:lvl8pPr lvl="7" rtl="0">
-              <a:spcBef>
-                <a:spcPts val="0"/>
-              </a:spcBef>
-              <a:spcAft>
-                <a:spcPts val="0"/>
-              </a:spcAft>
-              <a:buSzPts val="3000"/>
-              <a:buNone/>
-              <a:defRPr/>
-            </a:lvl8pPr>
-            <a:lvl9pPr lvl="8" rtl="0">
-              <a:spcBef>
-                <a:spcPts val="0"/>
-              </a:spcBef>
-              <a:spcAft>
-                <a:spcPts val="0"/>
-              </a:spcAft>
-              <a:buSzPts val="3000"/>
-              <a:buNone/>
-              <a:defRPr/>
-            </a:lvl9pPr>
-          </a:lstStyle>
-          <a:p>
-            <a:endParaRPr/>
-          </a:p>
-        </p:txBody>
-      </p:sp>
-      <p:sp>
-        <p:nvSpPr>
-          <p:cNvPr id="91" name="Google Shape;91;p13"/>
-          <p:cNvSpPr txBox="1">
-            <a:spLocks noGrp="1"/>
-          </p:cNvSpPr>
-          <p:nvPr>
-            <p:ph type="title" idx="2" hasCustomPrompt="1"/>
-          </p:nvPr>
-        </p:nvSpPr>
-        <p:spPr>
-          <a:xfrm>
-            <a:off x="1503825" y="1295883"/>
-            <a:ext cx="734700" cy="447600"/>
-          </a:xfrm>
-          <a:prstGeom prst="rect">
-            <a:avLst/>
-          </a:prstGeom>
-          <a:noFill/>
-        </p:spPr>
-        <p:txBody>
-          <a:bodyPr spcFirstLastPara="1" wrap="square" lIns="91425" tIns="91425" rIns="91425" bIns="91425" anchor="ctr" anchorCtr="0">
-            <a:noAutofit/>
-          </a:bodyPr>
-          <a:lstStyle>
-            <a:lvl1pPr lvl="0" rtl="0">
-              <a:spcBef>
-                <a:spcPts val="0"/>
-              </a:spcBef>
-              <a:spcAft>
-                <a:spcPts val="0"/>
-              </a:spcAft>
-              <a:buSzPts val="3000"/>
-              <a:buNone/>
-              <a:defRPr sz="2000" b="0" i="1">
-                <a:latin typeface="Akatab"/>
-                <a:ea typeface="Akatab"/>
-                <a:cs typeface="Akatab"/>
-                <a:sym typeface="Akatab"/>
-              </a:defRPr>
-            </a:lvl1pPr>
-            <a:lvl2pPr lvl="1" rtl="0">
-              <a:spcBef>
-                <a:spcPts val="0"/>
-              </a:spcBef>
-              <a:spcAft>
-                <a:spcPts val="0"/>
-              </a:spcAft>
-              <a:buSzPts val="3000"/>
-              <a:buNone/>
-              <a:defRPr sz="3000"/>
-            </a:lvl2pPr>
-            <a:lvl3pPr lvl="2" rtl="0">
-              <a:spcBef>
-                <a:spcPts val="0"/>
-              </a:spcBef>
-              <a:spcAft>
-                <a:spcPts val="0"/>
-              </a:spcAft>
-              <a:buSzPts val="3000"/>
-              <a:buNone/>
-              <a:defRPr sz="3000"/>
-            </a:lvl3pPr>
-            <a:lvl4pPr lvl="3" rtl="0">
-              <a:spcBef>
-                <a:spcPts val="0"/>
-              </a:spcBef>
-              <a:spcAft>
-                <a:spcPts val="0"/>
-              </a:spcAft>
-              <a:buSzPts val="3000"/>
-              <a:buNone/>
-              <a:defRPr sz="3000"/>
-            </a:lvl4pPr>
-            <a:lvl5pPr lvl="4" rtl="0">
-              <a:spcBef>
-                <a:spcPts val="0"/>
-              </a:spcBef>
-              <a:spcAft>
-                <a:spcPts val="0"/>
-              </a:spcAft>
-              <a:buSzPts val="3000"/>
-              <a:buNone/>
-              <a:defRPr sz="3000"/>
-            </a:lvl5pPr>
-            <a:lvl6pPr lvl="5" rtl="0">
-              <a:spcBef>
-                <a:spcPts val="0"/>
-              </a:spcBef>
-              <a:spcAft>
-                <a:spcPts val="0"/>
-              </a:spcAft>
-              <a:buSzPts val="3000"/>
-              <a:buNone/>
-              <a:defRPr sz="3000"/>
-            </a:lvl6pPr>
-            <a:lvl7pPr lvl="6" rtl="0">
-              <a:spcBef>
-                <a:spcPts val="0"/>
-              </a:spcBef>
-              <a:spcAft>
-                <a:spcPts val="0"/>
-              </a:spcAft>
-              <a:buSzPts val="3000"/>
-              <a:buNone/>
-              <a:defRPr sz="3000"/>
-            </a:lvl7pPr>
-            <a:lvl8pPr lvl="7" rtl="0">
-              <a:spcBef>
-                <a:spcPts val="0"/>
-              </a:spcBef>
-              <a:spcAft>
-                <a:spcPts val="0"/>
-              </a:spcAft>
-              <a:buSzPts val="3000"/>
-              <a:buNone/>
-              <a:defRPr sz="3000"/>
-            </a:lvl8pPr>
-            <a:lvl9pPr lvl="8" rtl="0">
-              <a:spcBef>
-                <a:spcPts val="0"/>
-              </a:spcBef>
-              <a:spcAft>
-                <a:spcPts val="0"/>
-              </a:spcAft>
-              <a:buSzPts val="3000"/>
-              <a:buNone/>
-              <a:defRPr sz="3000"/>
-            </a:lvl9pPr>
-          </a:lstStyle>
-          <a:p>
-            <a:r>
-              <a:t>xx%</a:t>
-            </a:r>
-          </a:p>
-        </p:txBody>
-      </p:sp>
-      <p:sp>
-        <p:nvSpPr>
-          <p:cNvPr id="92" name="Google Shape;92;p13"/>
-          <p:cNvSpPr txBox="1">
-            <a:spLocks noGrp="1"/>
-          </p:cNvSpPr>
-          <p:nvPr>
-            <p:ph type="title" idx="3" hasCustomPrompt="1"/>
-          </p:nvPr>
-        </p:nvSpPr>
-        <p:spPr>
-          <a:xfrm>
-            <a:off x="1503825" y="2876366"/>
-            <a:ext cx="734700" cy="447600"/>
-          </a:xfrm>
-          <a:prstGeom prst="rect">
-            <a:avLst/>
-          </a:prstGeom>
-          <a:noFill/>
-        </p:spPr>
-        <p:txBody>
-          <a:bodyPr spcFirstLastPara="1" wrap="square" lIns="91425" tIns="91425" rIns="91425" bIns="91425" anchor="ctr" anchorCtr="0">
-            <a:noAutofit/>
-          </a:bodyPr>
-          <a:lstStyle>
-            <a:lvl1pPr lvl="0" rtl="0">
-              <a:spcBef>
-                <a:spcPts val="0"/>
-              </a:spcBef>
-              <a:spcAft>
-                <a:spcPts val="0"/>
-              </a:spcAft>
-              <a:buSzPts val="3000"/>
-              <a:buNone/>
-              <a:defRPr sz="2000" b="0" i="1">
-                <a:latin typeface="Akatab"/>
-                <a:ea typeface="Akatab"/>
-                <a:cs typeface="Akatab"/>
-                <a:sym typeface="Akatab"/>
-              </a:defRPr>
-            </a:lvl1pPr>
-            <a:lvl2pPr lvl="1" rtl="0">
-              <a:spcBef>
-                <a:spcPts val="0"/>
-              </a:spcBef>
-              <a:spcAft>
-                <a:spcPts val="0"/>
-              </a:spcAft>
-              <a:buSzPts val="3000"/>
-              <a:buNone/>
-              <a:defRPr sz="3000"/>
-            </a:lvl2pPr>
-            <a:lvl3pPr lvl="2" rtl="0">
-              <a:spcBef>
-                <a:spcPts val="0"/>
-              </a:spcBef>
-              <a:spcAft>
-                <a:spcPts val="0"/>
-              </a:spcAft>
-              <a:buSzPts val="3000"/>
-              <a:buNone/>
-              <a:defRPr sz="3000"/>
-            </a:lvl3pPr>
-            <a:lvl4pPr lvl="3" rtl="0">
-              <a:spcBef>
-                <a:spcPts val="0"/>
-              </a:spcBef>
-              <a:spcAft>
-                <a:spcPts val="0"/>
-              </a:spcAft>
-              <a:buSzPts val="3000"/>
-              <a:buNone/>
-              <a:defRPr sz="3000"/>
-            </a:lvl4pPr>
-            <a:lvl5pPr lvl="4" rtl="0">
-              <a:spcBef>
-                <a:spcPts val="0"/>
-              </a:spcBef>
-              <a:spcAft>
-                <a:spcPts val="0"/>
-              </a:spcAft>
-              <a:buSzPts val="3000"/>
-              <a:buNone/>
-              <a:defRPr sz="3000"/>
-            </a:lvl5pPr>
-            <a:lvl6pPr lvl="5" rtl="0">
-              <a:spcBef>
-                <a:spcPts val="0"/>
-              </a:spcBef>
-              <a:spcAft>
-                <a:spcPts val="0"/>
-              </a:spcAft>
-              <a:buSzPts val="3000"/>
-              <a:buNone/>
-              <a:defRPr sz="3000"/>
-            </a:lvl6pPr>
-            <a:lvl7pPr lvl="6" rtl="0">
-              <a:spcBef>
-                <a:spcPts val="0"/>
-              </a:spcBef>
-              <a:spcAft>
-                <a:spcPts val="0"/>
-              </a:spcAft>
-              <a:buSzPts val="3000"/>
-              <a:buNone/>
-              <a:defRPr sz="3000"/>
-            </a:lvl7pPr>
-            <a:lvl8pPr lvl="7" rtl="0">
-              <a:spcBef>
-                <a:spcPts val="0"/>
-              </a:spcBef>
-              <a:spcAft>
-                <a:spcPts val="0"/>
-              </a:spcAft>
-              <a:buSzPts val="3000"/>
-              <a:buNone/>
-              <a:defRPr sz="3000"/>
-            </a:lvl8pPr>
-            <a:lvl9pPr lvl="8" rtl="0">
-              <a:spcBef>
-                <a:spcPts val="0"/>
-              </a:spcBef>
-              <a:spcAft>
-                <a:spcPts val="0"/>
-              </a:spcAft>
-              <a:buSzPts val="3000"/>
-              <a:buNone/>
-              <a:defRPr sz="3000"/>
-            </a:lvl9pPr>
-          </a:lstStyle>
-          <a:p>
-            <a:r>
-              <a:t>xx%</a:t>
-            </a:r>
-          </a:p>
-        </p:txBody>
-      </p:sp>
-      <p:sp>
-        <p:nvSpPr>
-          <p:cNvPr id="93" name="Google Shape;93;p13"/>
-          <p:cNvSpPr txBox="1">
-            <a:spLocks noGrp="1"/>
-          </p:cNvSpPr>
-          <p:nvPr>
-            <p:ph type="title" idx="4" hasCustomPrompt="1"/>
-          </p:nvPr>
-        </p:nvSpPr>
-        <p:spPr>
-          <a:xfrm>
-            <a:off x="4204650" y="1295883"/>
-            <a:ext cx="734700" cy="447600"/>
-          </a:xfrm>
-          <a:prstGeom prst="rect">
-            <a:avLst/>
-          </a:prstGeom>
-          <a:noFill/>
-        </p:spPr>
-        <p:txBody>
-          <a:bodyPr spcFirstLastPara="1" wrap="square" lIns="91425" tIns="91425" rIns="91425" bIns="91425" anchor="ctr" anchorCtr="0">
-            <a:noAutofit/>
-          </a:bodyPr>
-          <a:lstStyle>
-            <a:lvl1pPr lvl="0" rtl="0">
-              <a:spcBef>
-                <a:spcPts val="0"/>
-              </a:spcBef>
-              <a:spcAft>
-                <a:spcPts val="0"/>
-              </a:spcAft>
-              <a:buSzPts val="3000"/>
-              <a:buNone/>
-              <a:defRPr sz="2000" b="0" i="1">
-                <a:latin typeface="Akatab"/>
-                <a:ea typeface="Akatab"/>
-                <a:cs typeface="Akatab"/>
-                <a:sym typeface="Akatab"/>
-              </a:defRPr>
-            </a:lvl1pPr>
-            <a:lvl2pPr lvl="1" rtl="0">
-              <a:spcBef>
-                <a:spcPts val="0"/>
-              </a:spcBef>
-              <a:spcAft>
-                <a:spcPts val="0"/>
-              </a:spcAft>
-              <a:buSzPts val="3000"/>
-              <a:buNone/>
-              <a:defRPr sz="3000"/>
-            </a:lvl2pPr>
-            <a:lvl3pPr lvl="2" rtl="0">
-              <a:spcBef>
-                <a:spcPts val="0"/>
-              </a:spcBef>
-              <a:spcAft>
-                <a:spcPts val="0"/>
-              </a:spcAft>
-              <a:buSzPts val="3000"/>
-              <a:buNone/>
-              <a:defRPr sz="3000"/>
-            </a:lvl3pPr>
-            <a:lvl4pPr lvl="3" rtl="0">
-              <a:spcBef>
-                <a:spcPts val="0"/>
-              </a:spcBef>
-              <a:spcAft>
-                <a:spcPts val="0"/>
-              </a:spcAft>
-              <a:buSzPts val="3000"/>
-              <a:buNone/>
-              <a:defRPr sz="3000"/>
-            </a:lvl4pPr>
-            <a:lvl5pPr lvl="4" rtl="0">
-              <a:spcBef>
-                <a:spcPts val="0"/>
-              </a:spcBef>
-              <a:spcAft>
-                <a:spcPts val="0"/>
-              </a:spcAft>
-              <a:buSzPts val="3000"/>
-              <a:buNone/>
-              <a:defRPr sz="3000"/>
-            </a:lvl5pPr>
-            <a:lvl6pPr lvl="5" rtl="0">
-              <a:spcBef>
-                <a:spcPts val="0"/>
-              </a:spcBef>
-              <a:spcAft>
-                <a:spcPts val="0"/>
-              </a:spcAft>
-              <a:buSzPts val="3000"/>
-              <a:buNone/>
-              <a:defRPr sz="3000"/>
-            </a:lvl6pPr>
-            <a:lvl7pPr lvl="6" rtl="0">
-              <a:spcBef>
-                <a:spcPts val="0"/>
-              </a:spcBef>
-              <a:spcAft>
-                <a:spcPts val="0"/>
-              </a:spcAft>
-              <a:buSzPts val="3000"/>
-              <a:buNone/>
-              <a:defRPr sz="3000"/>
-            </a:lvl7pPr>
-            <a:lvl8pPr lvl="7" rtl="0">
-              <a:spcBef>
-                <a:spcPts val="0"/>
-              </a:spcBef>
-              <a:spcAft>
-                <a:spcPts val="0"/>
-              </a:spcAft>
-              <a:buSzPts val="3000"/>
-              <a:buNone/>
-              <a:defRPr sz="3000"/>
-            </a:lvl8pPr>
-            <a:lvl9pPr lvl="8" rtl="0">
-              <a:spcBef>
-                <a:spcPts val="0"/>
-              </a:spcBef>
-              <a:spcAft>
-                <a:spcPts val="0"/>
-              </a:spcAft>
-              <a:buSzPts val="3000"/>
-              <a:buNone/>
-              <a:defRPr sz="3000"/>
-            </a:lvl9pPr>
-          </a:lstStyle>
-          <a:p>
-            <a:r>
-              <a:t>xx%</a:t>
-            </a:r>
-          </a:p>
-        </p:txBody>
-      </p:sp>
-      <p:sp>
-        <p:nvSpPr>
-          <p:cNvPr id="94" name="Google Shape;94;p13"/>
-          <p:cNvSpPr txBox="1">
-            <a:spLocks noGrp="1"/>
-          </p:cNvSpPr>
-          <p:nvPr>
-            <p:ph type="title" idx="5" hasCustomPrompt="1"/>
-          </p:nvPr>
-        </p:nvSpPr>
-        <p:spPr>
-          <a:xfrm>
-            <a:off x="4204650" y="2876366"/>
-            <a:ext cx="734700" cy="447600"/>
-          </a:xfrm>
-          <a:prstGeom prst="rect">
-            <a:avLst/>
-          </a:prstGeom>
-          <a:noFill/>
-        </p:spPr>
-        <p:txBody>
-          <a:bodyPr spcFirstLastPara="1" wrap="square" lIns="91425" tIns="91425" rIns="91425" bIns="91425" anchor="ctr" anchorCtr="0">
-            <a:noAutofit/>
-          </a:bodyPr>
-          <a:lstStyle>
-            <a:lvl1pPr lvl="0" rtl="0">
-              <a:spcBef>
-                <a:spcPts val="0"/>
-              </a:spcBef>
-              <a:spcAft>
-                <a:spcPts val="0"/>
-              </a:spcAft>
-              <a:buSzPts val="3000"/>
-              <a:buNone/>
-              <a:defRPr sz="2000" b="0" i="1">
-                <a:latin typeface="Akatab"/>
-                <a:ea typeface="Akatab"/>
-                <a:cs typeface="Akatab"/>
-                <a:sym typeface="Akatab"/>
-              </a:defRPr>
-            </a:lvl1pPr>
-            <a:lvl2pPr lvl="1" rtl="0">
-              <a:spcBef>
-                <a:spcPts val="0"/>
-              </a:spcBef>
-              <a:spcAft>
-                <a:spcPts val="0"/>
-              </a:spcAft>
-              <a:buSzPts val="3000"/>
-              <a:buNone/>
-              <a:defRPr sz="3000"/>
-            </a:lvl2pPr>
-            <a:lvl3pPr lvl="2" rtl="0">
-              <a:spcBef>
-                <a:spcPts val="0"/>
-              </a:spcBef>
-              <a:spcAft>
-                <a:spcPts val="0"/>
-              </a:spcAft>
-              <a:buSzPts val="3000"/>
-              <a:buNone/>
-              <a:defRPr sz="3000"/>
-            </a:lvl3pPr>
-            <a:lvl4pPr lvl="3" rtl="0">
-              <a:spcBef>
-                <a:spcPts val="0"/>
-              </a:spcBef>
-              <a:spcAft>
-                <a:spcPts val="0"/>
-              </a:spcAft>
-              <a:buSzPts val="3000"/>
-              <a:buNone/>
-              <a:defRPr sz="3000"/>
-            </a:lvl4pPr>
-            <a:lvl5pPr lvl="4" rtl="0">
-              <a:spcBef>
-                <a:spcPts val="0"/>
-              </a:spcBef>
-              <a:spcAft>
-                <a:spcPts val="0"/>
-              </a:spcAft>
-              <a:buSzPts val="3000"/>
-              <a:buNone/>
-              <a:defRPr sz="3000"/>
-            </a:lvl5pPr>
-            <a:lvl6pPr lvl="5" rtl="0">
-              <a:spcBef>
-                <a:spcPts val="0"/>
-              </a:spcBef>
-              <a:spcAft>
-                <a:spcPts val="0"/>
-              </a:spcAft>
-              <a:buSzPts val="3000"/>
-              <a:buNone/>
-              <a:defRPr sz="3000"/>
-            </a:lvl6pPr>
-            <a:lvl7pPr lvl="6" rtl="0">
-              <a:spcBef>
-                <a:spcPts val="0"/>
-              </a:spcBef>
-              <a:spcAft>
-                <a:spcPts val="0"/>
-              </a:spcAft>
-              <a:buSzPts val="3000"/>
-              <a:buNone/>
-              <a:defRPr sz="3000"/>
-            </a:lvl7pPr>
-            <a:lvl8pPr lvl="7" rtl="0">
-              <a:spcBef>
-                <a:spcPts val="0"/>
-              </a:spcBef>
-              <a:spcAft>
-                <a:spcPts val="0"/>
-              </a:spcAft>
-              <a:buSzPts val="3000"/>
-              <a:buNone/>
-              <a:defRPr sz="3000"/>
-            </a:lvl8pPr>
-            <a:lvl9pPr lvl="8" rtl="0">
-              <a:spcBef>
-                <a:spcPts val="0"/>
-              </a:spcBef>
-              <a:spcAft>
-                <a:spcPts val="0"/>
-              </a:spcAft>
-              <a:buSzPts val="3000"/>
-              <a:buNone/>
-              <a:defRPr sz="3000"/>
-            </a:lvl9pPr>
-          </a:lstStyle>
-          <a:p>
-            <a:r>
-              <a:t>xx%</a:t>
-            </a:r>
-          </a:p>
-        </p:txBody>
-      </p:sp>
-      <p:sp>
-        <p:nvSpPr>
-          <p:cNvPr id="95" name="Google Shape;95;p13"/>
-          <p:cNvSpPr txBox="1">
-            <a:spLocks noGrp="1"/>
-          </p:cNvSpPr>
-          <p:nvPr>
-            <p:ph type="title" idx="6" hasCustomPrompt="1"/>
-          </p:nvPr>
-        </p:nvSpPr>
-        <p:spPr>
-          <a:xfrm>
-            <a:off x="6903888" y="1295883"/>
-            <a:ext cx="734700" cy="447600"/>
-          </a:xfrm>
-          <a:prstGeom prst="rect">
-            <a:avLst/>
-          </a:prstGeom>
-          <a:noFill/>
-        </p:spPr>
-        <p:txBody>
-          <a:bodyPr spcFirstLastPara="1" wrap="square" lIns="91425" tIns="91425" rIns="91425" bIns="91425" anchor="ctr" anchorCtr="0">
-            <a:noAutofit/>
-          </a:bodyPr>
-          <a:lstStyle>
-            <a:lvl1pPr lvl="0" rtl="0">
-              <a:spcBef>
-                <a:spcPts val="0"/>
-              </a:spcBef>
-              <a:spcAft>
-                <a:spcPts val="0"/>
-              </a:spcAft>
-              <a:buSzPts val="3000"/>
-              <a:buNone/>
-              <a:defRPr sz="2000" b="0" i="1">
-                <a:latin typeface="Akatab"/>
-                <a:ea typeface="Akatab"/>
-                <a:cs typeface="Akatab"/>
-                <a:sym typeface="Akatab"/>
-              </a:defRPr>
-            </a:lvl1pPr>
-            <a:lvl2pPr lvl="1" rtl="0">
-              <a:spcBef>
-                <a:spcPts val="0"/>
-              </a:spcBef>
-              <a:spcAft>
-                <a:spcPts val="0"/>
-              </a:spcAft>
-              <a:buSzPts val="3000"/>
-              <a:buNone/>
-              <a:defRPr sz="3000"/>
-            </a:lvl2pPr>
-            <a:lvl3pPr lvl="2" rtl="0">
-              <a:spcBef>
-                <a:spcPts val="0"/>
-              </a:spcBef>
-              <a:spcAft>
-                <a:spcPts val="0"/>
-              </a:spcAft>
-              <a:buSzPts val="3000"/>
-              <a:buNone/>
-              <a:defRPr sz="3000"/>
-            </a:lvl3pPr>
-            <a:lvl4pPr lvl="3" rtl="0">
-              <a:spcBef>
-                <a:spcPts val="0"/>
-              </a:spcBef>
-              <a:spcAft>
-                <a:spcPts val="0"/>
-              </a:spcAft>
-              <a:buSzPts val="3000"/>
-              <a:buNone/>
-              <a:defRPr sz="3000"/>
-            </a:lvl4pPr>
-            <a:lvl5pPr lvl="4" rtl="0">
-              <a:spcBef>
-                <a:spcPts val="0"/>
-              </a:spcBef>
-              <a:spcAft>
-                <a:spcPts val="0"/>
-              </a:spcAft>
-              <a:buSzPts val="3000"/>
-              <a:buNone/>
-              <a:defRPr sz="3000"/>
-            </a:lvl5pPr>
-            <a:lvl6pPr lvl="5" rtl="0">
-              <a:spcBef>
-                <a:spcPts val="0"/>
-              </a:spcBef>
-              <a:spcAft>
-                <a:spcPts val="0"/>
-              </a:spcAft>
-              <a:buSzPts val="3000"/>
-              <a:buNone/>
-              <a:defRPr sz="3000"/>
-            </a:lvl6pPr>
-            <a:lvl7pPr lvl="6" rtl="0">
-              <a:spcBef>
-                <a:spcPts val="0"/>
-              </a:spcBef>
-              <a:spcAft>
-                <a:spcPts val="0"/>
-              </a:spcAft>
-              <a:buSzPts val="3000"/>
-              <a:buNone/>
-              <a:defRPr sz="3000"/>
-            </a:lvl7pPr>
-            <a:lvl8pPr lvl="7" rtl="0">
-              <a:spcBef>
-                <a:spcPts val="0"/>
-              </a:spcBef>
-              <a:spcAft>
-                <a:spcPts val="0"/>
-              </a:spcAft>
-              <a:buSzPts val="3000"/>
-              <a:buNone/>
-              <a:defRPr sz="3000"/>
-            </a:lvl8pPr>
-            <a:lvl9pPr lvl="8" rtl="0">
-              <a:spcBef>
-                <a:spcPts val="0"/>
-              </a:spcBef>
-              <a:spcAft>
-                <a:spcPts val="0"/>
-              </a:spcAft>
-              <a:buSzPts val="3000"/>
-              <a:buNone/>
-              <a:defRPr sz="3000"/>
-            </a:lvl9pPr>
-          </a:lstStyle>
-          <a:p>
-            <a:r>
-              <a:t>xx%</a:t>
-            </a:r>
-          </a:p>
-        </p:txBody>
-      </p:sp>
-      <p:sp>
-        <p:nvSpPr>
-          <p:cNvPr id="96" name="Google Shape;96;p13"/>
-          <p:cNvSpPr txBox="1">
-            <a:spLocks noGrp="1"/>
-          </p:cNvSpPr>
-          <p:nvPr>
-            <p:ph type="title" idx="7" hasCustomPrompt="1"/>
-          </p:nvPr>
-        </p:nvSpPr>
-        <p:spPr>
-          <a:xfrm>
-            <a:off x="6903888" y="2876366"/>
-            <a:ext cx="734700" cy="447600"/>
-          </a:xfrm>
-          <a:prstGeom prst="rect">
-            <a:avLst/>
-          </a:prstGeom>
-          <a:noFill/>
-        </p:spPr>
-        <p:txBody>
-          <a:bodyPr spcFirstLastPara="1" wrap="square" lIns="91425" tIns="91425" rIns="91425" bIns="91425" anchor="ctr" anchorCtr="0">
-            <a:noAutofit/>
-          </a:bodyPr>
-          <a:lstStyle>
-            <a:lvl1pPr lvl="0" rtl="0">
-              <a:spcBef>
-                <a:spcPts val="0"/>
-              </a:spcBef>
-              <a:spcAft>
-                <a:spcPts val="0"/>
-              </a:spcAft>
-              <a:buSzPts val="3000"/>
-              <a:buNone/>
-              <a:defRPr sz="2000" b="0" i="1">
-                <a:latin typeface="Akatab"/>
-                <a:ea typeface="Akatab"/>
-                <a:cs typeface="Akatab"/>
-                <a:sym typeface="Akatab"/>
-              </a:defRPr>
-            </a:lvl1pPr>
-            <a:lvl2pPr lvl="1" rtl="0">
-              <a:spcBef>
-                <a:spcPts val="0"/>
-              </a:spcBef>
-              <a:spcAft>
-                <a:spcPts val="0"/>
-              </a:spcAft>
-              <a:buSzPts val="3000"/>
-              <a:buNone/>
-              <a:defRPr sz="3000"/>
-            </a:lvl2pPr>
-            <a:lvl3pPr lvl="2" rtl="0">
-              <a:spcBef>
-                <a:spcPts val="0"/>
-              </a:spcBef>
-              <a:spcAft>
-                <a:spcPts val="0"/>
-              </a:spcAft>
-              <a:buSzPts val="3000"/>
-              <a:buNone/>
-              <a:defRPr sz="3000"/>
-            </a:lvl3pPr>
-            <a:lvl4pPr lvl="3" rtl="0">
-              <a:spcBef>
-                <a:spcPts val="0"/>
-              </a:spcBef>
-              <a:spcAft>
-                <a:spcPts val="0"/>
-              </a:spcAft>
-              <a:buSzPts val="3000"/>
-              <a:buNone/>
-              <a:defRPr sz="3000"/>
-            </a:lvl4pPr>
-            <a:lvl5pPr lvl="4" rtl="0">
-              <a:spcBef>
-                <a:spcPts val="0"/>
-              </a:spcBef>
-              <a:spcAft>
-                <a:spcPts val="0"/>
-              </a:spcAft>
-              <a:buSzPts val="3000"/>
-              <a:buNone/>
-              <a:defRPr sz="3000"/>
-            </a:lvl5pPr>
-            <a:lvl6pPr lvl="5" rtl="0">
-              <a:spcBef>
-                <a:spcPts val="0"/>
-              </a:spcBef>
-              <a:spcAft>
-                <a:spcPts val="0"/>
-              </a:spcAft>
-              <a:buSzPts val="3000"/>
-              <a:buNone/>
-              <a:defRPr sz="3000"/>
-            </a:lvl6pPr>
-            <a:lvl7pPr lvl="6" rtl="0">
-              <a:spcBef>
-                <a:spcPts val="0"/>
-              </a:spcBef>
-              <a:spcAft>
-                <a:spcPts val="0"/>
-              </a:spcAft>
-              <a:buSzPts val="3000"/>
-              <a:buNone/>
-              <a:defRPr sz="3000"/>
-            </a:lvl7pPr>
-            <a:lvl8pPr lvl="7" rtl="0">
-              <a:spcBef>
-                <a:spcPts val="0"/>
-              </a:spcBef>
-              <a:spcAft>
-                <a:spcPts val="0"/>
-              </a:spcAft>
-              <a:buSzPts val="3000"/>
-              <a:buNone/>
-              <a:defRPr sz="3000"/>
-            </a:lvl8pPr>
-            <a:lvl9pPr lvl="8" rtl="0">
-              <a:spcBef>
-                <a:spcPts val="0"/>
-              </a:spcBef>
-              <a:spcAft>
-                <a:spcPts val="0"/>
-              </a:spcAft>
-              <a:buSzPts val="3000"/>
-              <a:buNone/>
-              <a:defRPr sz="3000"/>
-            </a:lvl9pPr>
-          </a:lstStyle>
-          <a:p>
-            <a:r>
-              <a:t>xx%</a:t>
-            </a:r>
-          </a:p>
-        </p:txBody>
-      </p:sp>
-      <p:sp>
-        <p:nvSpPr>
-          <p:cNvPr id="97" name="Google Shape;97;p13"/>
-          <p:cNvSpPr txBox="1">
-            <a:spLocks noGrp="1"/>
-          </p:cNvSpPr>
-          <p:nvPr>
-            <p:ph type="subTitle" idx="1"/>
-          </p:nvPr>
-        </p:nvSpPr>
-        <p:spPr>
-          <a:xfrm>
-            <a:off x="718425" y="1765875"/>
-            <a:ext cx="2305500" cy="788700"/>
-          </a:xfrm>
-          <a:prstGeom prst="rect">
-            <a:avLst/>
-          </a:prstGeom>
-        </p:spPr>
-        <p:txBody>
-          <a:bodyPr spcFirstLastPara="1" wrap="square" lIns="91425" tIns="91425" rIns="91425" bIns="91425" anchor="t" anchorCtr="0">
-            <a:noAutofit/>
-          </a:bodyPr>
-          <a:lstStyle>
-            <a:lvl1pPr lvl="0" rtl="0">
-              <a:lnSpc>
-                <a:spcPct val="100000"/>
-              </a:lnSpc>
-              <a:spcBef>
-                <a:spcPts val="0"/>
-              </a:spcBef>
-              <a:spcAft>
-                <a:spcPts val="0"/>
-              </a:spcAft>
-              <a:buSzPts val="2400"/>
-              <a:buFont typeface="Raleway"/>
-              <a:buNone/>
-              <a:defRPr sz="2000">
-                <a:solidFill>
-                  <a:schemeClr val="dk1"/>
-                </a:solidFill>
-                <a:latin typeface="Castoro"/>
-                <a:ea typeface="Castoro"/>
-                <a:cs typeface="Castoro"/>
-                <a:sym typeface="Castoro"/>
-              </a:defRPr>
-            </a:lvl1pPr>
-            <a:lvl2pPr lvl="1" rtl="0">
-              <a:lnSpc>
-                <a:spcPct val="100000"/>
-              </a:lnSpc>
-              <a:spcBef>
-                <a:spcPts val="0"/>
-              </a:spcBef>
-              <a:spcAft>
-                <a:spcPts val="0"/>
-              </a:spcAft>
-              <a:buSzPts val="2400"/>
-              <a:buFont typeface="Raleway"/>
-              <a:buNone/>
-              <a:defRPr sz="2400" b="1">
-                <a:latin typeface="Raleway"/>
-                <a:ea typeface="Raleway"/>
-                <a:cs typeface="Raleway"/>
-                <a:sym typeface="Raleway"/>
-              </a:defRPr>
-            </a:lvl2pPr>
-            <a:lvl3pPr lvl="2" rtl="0">
-              <a:lnSpc>
-                <a:spcPct val="100000"/>
-              </a:lnSpc>
-              <a:spcBef>
-                <a:spcPts val="0"/>
-              </a:spcBef>
-              <a:spcAft>
-                <a:spcPts val="0"/>
-              </a:spcAft>
-              <a:buSzPts val="2400"/>
-              <a:buFont typeface="Raleway"/>
-              <a:buNone/>
-              <a:defRPr sz="2400" b="1">
-                <a:latin typeface="Raleway"/>
-                <a:ea typeface="Raleway"/>
-                <a:cs typeface="Raleway"/>
-                <a:sym typeface="Raleway"/>
-              </a:defRPr>
-            </a:lvl3pPr>
-            <a:lvl4pPr lvl="3" rtl="0">
-              <a:lnSpc>
-                <a:spcPct val="100000"/>
-              </a:lnSpc>
-              <a:spcBef>
-                <a:spcPts val="0"/>
-              </a:spcBef>
-              <a:spcAft>
-                <a:spcPts val="0"/>
-              </a:spcAft>
-              <a:buSzPts val="2400"/>
-              <a:buFont typeface="Raleway"/>
-              <a:buNone/>
-              <a:defRPr sz="2400" b="1">
-                <a:latin typeface="Raleway"/>
-                <a:ea typeface="Raleway"/>
-                <a:cs typeface="Raleway"/>
-                <a:sym typeface="Raleway"/>
-              </a:defRPr>
-            </a:lvl4pPr>
-            <a:lvl5pPr lvl="4" rtl="0">
-              <a:lnSpc>
-                <a:spcPct val="100000"/>
-              </a:lnSpc>
-              <a:spcBef>
-                <a:spcPts val="0"/>
-              </a:spcBef>
-              <a:spcAft>
-                <a:spcPts val="0"/>
-              </a:spcAft>
-              <a:buSzPts val="2400"/>
-              <a:buFont typeface="Raleway"/>
-              <a:buNone/>
-              <a:defRPr sz="2400" b="1">
-                <a:latin typeface="Raleway"/>
-                <a:ea typeface="Raleway"/>
-                <a:cs typeface="Raleway"/>
-                <a:sym typeface="Raleway"/>
-              </a:defRPr>
-            </a:lvl5pPr>
-            <a:lvl6pPr lvl="5" rtl="0">
-              <a:lnSpc>
-                <a:spcPct val="100000"/>
-              </a:lnSpc>
-              <a:spcBef>
-                <a:spcPts val="0"/>
-              </a:spcBef>
-              <a:spcAft>
-                <a:spcPts val="0"/>
-              </a:spcAft>
-              <a:buSzPts val="2400"/>
-              <a:buFont typeface="Raleway"/>
-              <a:buNone/>
-              <a:defRPr sz="2400" b="1">
-                <a:latin typeface="Raleway"/>
-                <a:ea typeface="Raleway"/>
-                <a:cs typeface="Raleway"/>
-                <a:sym typeface="Raleway"/>
-              </a:defRPr>
-            </a:lvl6pPr>
-            <a:lvl7pPr lvl="6" rtl="0">
-              <a:lnSpc>
-                <a:spcPct val="100000"/>
-              </a:lnSpc>
-              <a:spcBef>
-                <a:spcPts val="0"/>
-              </a:spcBef>
-              <a:spcAft>
-                <a:spcPts val="0"/>
-              </a:spcAft>
-              <a:buSzPts val="2400"/>
-              <a:buFont typeface="Raleway"/>
-              <a:buNone/>
-              <a:defRPr sz="2400" b="1">
-                <a:latin typeface="Raleway"/>
-                <a:ea typeface="Raleway"/>
-                <a:cs typeface="Raleway"/>
-                <a:sym typeface="Raleway"/>
-              </a:defRPr>
-            </a:lvl7pPr>
-            <a:lvl8pPr lvl="7" rtl="0">
-              <a:lnSpc>
-                <a:spcPct val="100000"/>
-              </a:lnSpc>
-              <a:spcBef>
-                <a:spcPts val="0"/>
-              </a:spcBef>
-              <a:spcAft>
-                <a:spcPts val="0"/>
-              </a:spcAft>
-              <a:buSzPts val="2400"/>
-              <a:buFont typeface="Raleway"/>
-              <a:buNone/>
-              <a:defRPr sz="2400" b="1">
-                <a:latin typeface="Raleway"/>
-                <a:ea typeface="Raleway"/>
-                <a:cs typeface="Raleway"/>
-                <a:sym typeface="Raleway"/>
-              </a:defRPr>
-            </a:lvl8pPr>
-            <a:lvl9pPr lvl="8" rtl="0">
-              <a:lnSpc>
-                <a:spcPct val="100000"/>
-              </a:lnSpc>
-              <a:spcBef>
-                <a:spcPts val="0"/>
-              </a:spcBef>
-              <a:spcAft>
-                <a:spcPts val="0"/>
-              </a:spcAft>
-              <a:buSzPts val="2400"/>
-              <a:buFont typeface="Raleway"/>
-              <a:buNone/>
-              <a:defRPr sz="2400" b="1">
-                <a:latin typeface="Raleway"/>
-                <a:ea typeface="Raleway"/>
-                <a:cs typeface="Raleway"/>
-                <a:sym typeface="Raleway"/>
-              </a:defRPr>
-            </a:lvl9pPr>
-          </a:lstStyle>
-          <a:p>
-            <a:endParaRPr/>
-          </a:p>
-        </p:txBody>
-      </p:sp>
-      <p:sp>
-        <p:nvSpPr>
-          <p:cNvPr id="98" name="Google Shape;98;p13"/>
-          <p:cNvSpPr txBox="1">
-            <a:spLocks noGrp="1"/>
-          </p:cNvSpPr>
-          <p:nvPr>
-            <p:ph type="subTitle" idx="8"/>
-          </p:nvPr>
-        </p:nvSpPr>
-        <p:spPr>
-          <a:xfrm>
-            <a:off x="3419250" y="1765875"/>
-            <a:ext cx="2305500" cy="788700"/>
-          </a:xfrm>
-          <a:prstGeom prst="rect">
-            <a:avLst/>
-          </a:prstGeom>
-        </p:spPr>
-        <p:txBody>
-          <a:bodyPr spcFirstLastPara="1" wrap="square" lIns="91425" tIns="91425" rIns="91425" bIns="91425" anchor="t" anchorCtr="0">
-            <a:noAutofit/>
-          </a:bodyPr>
-          <a:lstStyle>
-            <a:lvl1pPr lvl="0" rtl="0">
-              <a:lnSpc>
-                <a:spcPct val="100000"/>
-              </a:lnSpc>
-              <a:spcBef>
-                <a:spcPts val="0"/>
-              </a:spcBef>
-              <a:spcAft>
-                <a:spcPts val="0"/>
-              </a:spcAft>
-              <a:buSzPts val="2400"/>
-              <a:buFont typeface="Raleway"/>
-              <a:buNone/>
-              <a:defRPr sz="2000">
-                <a:solidFill>
-                  <a:schemeClr val="dk1"/>
-                </a:solidFill>
-                <a:latin typeface="Castoro"/>
-                <a:ea typeface="Castoro"/>
-                <a:cs typeface="Castoro"/>
-                <a:sym typeface="Castoro"/>
-              </a:defRPr>
-            </a:lvl1pPr>
-            <a:lvl2pPr lvl="1" rtl="0">
-              <a:lnSpc>
-                <a:spcPct val="100000"/>
-              </a:lnSpc>
-              <a:spcBef>
-                <a:spcPts val="0"/>
-              </a:spcBef>
-              <a:spcAft>
-                <a:spcPts val="0"/>
-              </a:spcAft>
-              <a:buSzPts val="2400"/>
-              <a:buFont typeface="Raleway"/>
-              <a:buNone/>
-              <a:defRPr sz="2400" b="1">
-                <a:latin typeface="Raleway"/>
-                <a:ea typeface="Raleway"/>
-                <a:cs typeface="Raleway"/>
-                <a:sym typeface="Raleway"/>
-              </a:defRPr>
-            </a:lvl2pPr>
-            <a:lvl3pPr lvl="2" rtl="0">
-              <a:lnSpc>
-                <a:spcPct val="100000"/>
-              </a:lnSpc>
-              <a:spcBef>
-                <a:spcPts val="0"/>
-              </a:spcBef>
-              <a:spcAft>
-                <a:spcPts val="0"/>
-              </a:spcAft>
-              <a:buSzPts val="2400"/>
-              <a:buFont typeface="Raleway"/>
-              <a:buNone/>
-              <a:defRPr sz="2400" b="1">
-                <a:latin typeface="Raleway"/>
-                <a:ea typeface="Raleway"/>
-                <a:cs typeface="Raleway"/>
-                <a:sym typeface="Raleway"/>
-              </a:defRPr>
-            </a:lvl3pPr>
-            <a:lvl4pPr lvl="3" rtl="0">
-              <a:lnSpc>
-                <a:spcPct val="100000"/>
-              </a:lnSpc>
-              <a:spcBef>
-                <a:spcPts val="0"/>
-              </a:spcBef>
-              <a:spcAft>
-                <a:spcPts val="0"/>
-              </a:spcAft>
-              <a:buSzPts val="2400"/>
-              <a:buFont typeface="Raleway"/>
-              <a:buNone/>
-              <a:defRPr sz="2400" b="1">
-                <a:latin typeface="Raleway"/>
-                <a:ea typeface="Raleway"/>
-                <a:cs typeface="Raleway"/>
-                <a:sym typeface="Raleway"/>
-              </a:defRPr>
-            </a:lvl4pPr>
-            <a:lvl5pPr lvl="4" rtl="0">
-              <a:lnSpc>
-                <a:spcPct val="100000"/>
-              </a:lnSpc>
-              <a:spcBef>
-                <a:spcPts val="0"/>
-              </a:spcBef>
-              <a:spcAft>
-                <a:spcPts val="0"/>
-              </a:spcAft>
-              <a:buSzPts val="2400"/>
-              <a:buFont typeface="Raleway"/>
-              <a:buNone/>
-              <a:defRPr sz="2400" b="1">
-                <a:latin typeface="Raleway"/>
-                <a:ea typeface="Raleway"/>
-                <a:cs typeface="Raleway"/>
-                <a:sym typeface="Raleway"/>
-              </a:defRPr>
-            </a:lvl5pPr>
-            <a:lvl6pPr lvl="5" rtl="0">
-              <a:lnSpc>
-                <a:spcPct val="100000"/>
-              </a:lnSpc>
-              <a:spcBef>
-                <a:spcPts val="0"/>
-              </a:spcBef>
-              <a:spcAft>
-                <a:spcPts val="0"/>
-              </a:spcAft>
-              <a:buSzPts val="2400"/>
-              <a:buFont typeface="Raleway"/>
-              <a:buNone/>
-              <a:defRPr sz="2400" b="1">
-                <a:latin typeface="Raleway"/>
-                <a:ea typeface="Raleway"/>
-                <a:cs typeface="Raleway"/>
-                <a:sym typeface="Raleway"/>
-              </a:defRPr>
-            </a:lvl6pPr>
-            <a:lvl7pPr lvl="6" rtl="0">
-              <a:lnSpc>
-                <a:spcPct val="100000"/>
-              </a:lnSpc>
-              <a:spcBef>
-                <a:spcPts val="0"/>
-              </a:spcBef>
-              <a:spcAft>
-                <a:spcPts val="0"/>
-              </a:spcAft>
-              <a:buSzPts val="2400"/>
-              <a:buFont typeface="Raleway"/>
-              <a:buNone/>
-              <a:defRPr sz="2400" b="1">
-                <a:latin typeface="Raleway"/>
-                <a:ea typeface="Raleway"/>
-                <a:cs typeface="Raleway"/>
-                <a:sym typeface="Raleway"/>
-              </a:defRPr>
-            </a:lvl7pPr>
-            <a:lvl8pPr lvl="7" rtl="0">
-              <a:lnSpc>
-                <a:spcPct val="100000"/>
-              </a:lnSpc>
-              <a:spcBef>
-                <a:spcPts val="0"/>
-              </a:spcBef>
-              <a:spcAft>
-                <a:spcPts val="0"/>
-              </a:spcAft>
-              <a:buSzPts val="2400"/>
-              <a:buFont typeface="Raleway"/>
-              <a:buNone/>
-              <a:defRPr sz="2400" b="1">
-                <a:latin typeface="Raleway"/>
-                <a:ea typeface="Raleway"/>
-                <a:cs typeface="Raleway"/>
-                <a:sym typeface="Raleway"/>
-              </a:defRPr>
-            </a:lvl8pPr>
-            <a:lvl9pPr lvl="8" rtl="0">
-              <a:lnSpc>
-                <a:spcPct val="100000"/>
-              </a:lnSpc>
-              <a:spcBef>
-                <a:spcPts val="0"/>
-              </a:spcBef>
-              <a:spcAft>
-                <a:spcPts val="0"/>
-              </a:spcAft>
-              <a:buSzPts val="2400"/>
-              <a:buFont typeface="Raleway"/>
-              <a:buNone/>
-              <a:defRPr sz="2400" b="1">
-                <a:latin typeface="Raleway"/>
-                <a:ea typeface="Raleway"/>
-                <a:cs typeface="Raleway"/>
-                <a:sym typeface="Raleway"/>
-              </a:defRPr>
-            </a:lvl9pPr>
-          </a:lstStyle>
-          <a:p>
-            <a:endParaRPr/>
-          </a:p>
-        </p:txBody>
-      </p:sp>
-      <p:sp>
-        <p:nvSpPr>
-          <p:cNvPr id="99" name="Google Shape;99;p13"/>
-          <p:cNvSpPr txBox="1">
-            <a:spLocks noGrp="1"/>
-          </p:cNvSpPr>
-          <p:nvPr>
-            <p:ph type="subTitle" idx="9"/>
-          </p:nvPr>
-        </p:nvSpPr>
-        <p:spPr>
-          <a:xfrm>
-            <a:off x="6118488" y="1765875"/>
-            <a:ext cx="2305500" cy="788700"/>
-          </a:xfrm>
-          <a:prstGeom prst="rect">
-            <a:avLst/>
-          </a:prstGeom>
-        </p:spPr>
-        <p:txBody>
-          <a:bodyPr spcFirstLastPara="1" wrap="square" lIns="91425" tIns="91425" rIns="91425" bIns="91425" anchor="t" anchorCtr="0">
-            <a:noAutofit/>
-          </a:bodyPr>
-          <a:lstStyle>
-            <a:lvl1pPr lvl="0" rtl="0">
-              <a:lnSpc>
-                <a:spcPct val="100000"/>
-              </a:lnSpc>
-              <a:spcBef>
-                <a:spcPts val="0"/>
-              </a:spcBef>
-              <a:spcAft>
-                <a:spcPts val="0"/>
-              </a:spcAft>
-              <a:buSzPts val="2400"/>
-              <a:buFont typeface="Raleway"/>
-              <a:buNone/>
-              <a:defRPr sz="2000">
-                <a:solidFill>
-                  <a:schemeClr val="dk1"/>
-                </a:solidFill>
-                <a:latin typeface="Castoro"/>
-                <a:ea typeface="Castoro"/>
-                <a:cs typeface="Castoro"/>
-                <a:sym typeface="Castoro"/>
-              </a:defRPr>
-            </a:lvl1pPr>
-            <a:lvl2pPr lvl="1" rtl="0">
-              <a:lnSpc>
-                <a:spcPct val="100000"/>
-              </a:lnSpc>
-              <a:spcBef>
-                <a:spcPts val="0"/>
-              </a:spcBef>
-              <a:spcAft>
-                <a:spcPts val="0"/>
-              </a:spcAft>
-              <a:buSzPts val="2400"/>
-              <a:buFont typeface="Raleway"/>
-              <a:buNone/>
-              <a:defRPr sz="2400" b="1">
-                <a:latin typeface="Raleway"/>
-                <a:ea typeface="Raleway"/>
-                <a:cs typeface="Raleway"/>
-                <a:sym typeface="Raleway"/>
-              </a:defRPr>
-            </a:lvl2pPr>
-            <a:lvl3pPr lvl="2" rtl="0">
-              <a:lnSpc>
-                <a:spcPct val="100000"/>
-              </a:lnSpc>
-              <a:spcBef>
-                <a:spcPts val="0"/>
-              </a:spcBef>
-              <a:spcAft>
-                <a:spcPts val="0"/>
-              </a:spcAft>
-              <a:buSzPts val="2400"/>
-              <a:buFont typeface="Raleway"/>
-              <a:buNone/>
-              <a:defRPr sz="2400" b="1">
-                <a:latin typeface="Raleway"/>
-                <a:ea typeface="Raleway"/>
-                <a:cs typeface="Raleway"/>
-                <a:sym typeface="Raleway"/>
-              </a:defRPr>
-            </a:lvl3pPr>
-            <a:lvl4pPr lvl="3" rtl="0">
-              <a:lnSpc>
-                <a:spcPct val="100000"/>
-              </a:lnSpc>
-              <a:spcBef>
-                <a:spcPts val="0"/>
-              </a:spcBef>
-              <a:spcAft>
-                <a:spcPts val="0"/>
-              </a:spcAft>
-              <a:buSzPts val="2400"/>
-              <a:buFont typeface="Raleway"/>
-              <a:buNone/>
-              <a:defRPr sz="2400" b="1">
-                <a:latin typeface="Raleway"/>
-                <a:ea typeface="Raleway"/>
-                <a:cs typeface="Raleway"/>
-                <a:sym typeface="Raleway"/>
-              </a:defRPr>
-            </a:lvl4pPr>
-            <a:lvl5pPr lvl="4" rtl="0">
-              <a:lnSpc>
-                <a:spcPct val="100000"/>
-              </a:lnSpc>
-              <a:spcBef>
-                <a:spcPts val="0"/>
-              </a:spcBef>
-              <a:spcAft>
-                <a:spcPts val="0"/>
-              </a:spcAft>
-              <a:buSzPts val="2400"/>
-              <a:buFont typeface="Raleway"/>
-              <a:buNone/>
-              <a:defRPr sz="2400" b="1">
-                <a:latin typeface="Raleway"/>
-                <a:ea typeface="Raleway"/>
-                <a:cs typeface="Raleway"/>
-                <a:sym typeface="Raleway"/>
-              </a:defRPr>
-            </a:lvl5pPr>
-            <a:lvl6pPr lvl="5" rtl="0">
-              <a:lnSpc>
-                <a:spcPct val="100000"/>
-              </a:lnSpc>
-              <a:spcBef>
-                <a:spcPts val="0"/>
-              </a:spcBef>
-              <a:spcAft>
-                <a:spcPts val="0"/>
-              </a:spcAft>
-              <a:buSzPts val="2400"/>
-              <a:buFont typeface="Raleway"/>
-              <a:buNone/>
-              <a:defRPr sz="2400" b="1">
-                <a:latin typeface="Raleway"/>
-                <a:ea typeface="Raleway"/>
-                <a:cs typeface="Raleway"/>
-                <a:sym typeface="Raleway"/>
-              </a:defRPr>
-            </a:lvl6pPr>
-            <a:lvl7pPr lvl="6" rtl="0">
-              <a:lnSpc>
-                <a:spcPct val="100000"/>
-              </a:lnSpc>
-              <a:spcBef>
-                <a:spcPts val="0"/>
-              </a:spcBef>
-              <a:spcAft>
-                <a:spcPts val="0"/>
-              </a:spcAft>
-              <a:buSzPts val="2400"/>
-              <a:buFont typeface="Raleway"/>
-              <a:buNone/>
-              <a:defRPr sz="2400" b="1">
-                <a:latin typeface="Raleway"/>
-                <a:ea typeface="Raleway"/>
-                <a:cs typeface="Raleway"/>
-                <a:sym typeface="Raleway"/>
-              </a:defRPr>
-            </a:lvl7pPr>
-            <a:lvl8pPr lvl="7" rtl="0">
-              <a:lnSpc>
-                <a:spcPct val="100000"/>
-              </a:lnSpc>
-              <a:spcBef>
-                <a:spcPts val="0"/>
-              </a:spcBef>
-              <a:spcAft>
-                <a:spcPts val="0"/>
-              </a:spcAft>
-              <a:buSzPts val="2400"/>
-              <a:buFont typeface="Raleway"/>
-              <a:buNone/>
-              <a:defRPr sz="2400" b="1">
-                <a:latin typeface="Raleway"/>
-                <a:ea typeface="Raleway"/>
-                <a:cs typeface="Raleway"/>
-                <a:sym typeface="Raleway"/>
-              </a:defRPr>
-            </a:lvl8pPr>
-            <a:lvl9pPr lvl="8" rtl="0">
-              <a:lnSpc>
-                <a:spcPct val="100000"/>
-              </a:lnSpc>
-              <a:spcBef>
-                <a:spcPts val="0"/>
-              </a:spcBef>
-              <a:spcAft>
-                <a:spcPts val="0"/>
-              </a:spcAft>
-              <a:buSzPts val="2400"/>
-              <a:buFont typeface="Raleway"/>
-              <a:buNone/>
-              <a:defRPr sz="2400" b="1">
-                <a:latin typeface="Raleway"/>
-                <a:ea typeface="Raleway"/>
-                <a:cs typeface="Raleway"/>
-                <a:sym typeface="Raleway"/>
-              </a:defRPr>
-            </a:lvl9pPr>
-          </a:lstStyle>
-          <a:p>
-            <a:endParaRPr/>
-          </a:p>
-        </p:txBody>
-      </p:sp>
-      <p:sp>
-        <p:nvSpPr>
-          <p:cNvPr id="100" name="Google Shape;100;p13"/>
-          <p:cNvSpPr txBox="1">
-            <a:spLocks noGrp="1"/>
-          </p:cNvSpPr>
-          <p:nvPr>
-            <p:ph type="subTitle" idx="13"/>
-          </p:nvPr>
-        </p:nvSpPr>
-        <p:spPr>
-          <a:xfrm>
-            <a:off x="718425" y="3346300"/>
-            <a:ext cx="2305500" cy="788700"/>
-          </a:xfrm>
-          <a:prstGeom prst="rect">
-            <a:avLst/>
-          </a:prstGeom>
-        </p:spPr>
-        <p:txBody>
-          <a:bodyPr spcFirstLastPara="1" wrap="square" lIns="91425" tIns="91425" rIns="91425" bIns="91425" anchor="t" anchorCtr="0">
-            <a:noAutofit/>
-          </a:bodyPr>
-          <a:lstStyle>
-            <a:lvl1pPr lvl="0" rtl="0">
-              <a:lnSpc>
-                <a:spcPct val="100000"/>
-              </a:lnSpc>
-              <a:spcBef>
-                <a:spcPts val="0"/>
-              </a:spcBef>
-              <a:spcAft>
-                <a:spcPts val="0"/>
-              </a:spcAft>
-              <a:buSzPts val="2400"/>
-              <a:buFont typeface="Raleway"/>
-              <a:buNone/>
-              <a:defRPr sz="2000">
-                <a:solidFill>
-                  <a:schemeClr val="dk1"/>
-                </a:solidFill>
-                <a:latin typeface="Castoro"/>
-                <a:ea typeface="Castoro"/>
-                <a:cs typeface="Castoro"/>
-                <a:sym typeface="Castoro"/>
-              </a:defRPr>
-            </a:lvl1pPr>
-            <a:lvl2pPr lvl="1" rtl="0">
-              <a:lnSpc>
-                <a:spcPct val="100000"/>
-              </a:lnSpc>
-              <a:spcBef>
-                <a:spcPts val="0"/>
-              </a:spcBef>
-              <a:spcAft>
-                <a:spcPts val="0"/>
-              </a:spcAft>
-              <a:buSzPts val="2400"/>
-              <a:buFont typeface="Raleway"/>
-              <a:buNone/>
-              <a:defRPr sz="2400" b="1">
-                <a:latin typeface="Raleway"/>
-                <a:ea typeface="Raleway"/>
-                <a:cs typeface="Raleway"/>
-                <a:sym typeface="Raleway"/>
-              </a:defRPr>
-            </a:lvl2pPr>
-            <a:lvl3pPr lvl="2" rtl="0">
-              <a:lnSpc>
-                <a:spcPct val="100000"/>
-              </a:lnSpc>
-              <a:spcBef>
-                <a:spcPts val="0"/>
-              </a:spcBef>
-              <a:spcAft>
-                <a:spcPts val="0"/>
-              </a:spcAft>
-              <a:buSzPts val="2400"/>
-              <a:buFont typeface="Raleway"/>
-              <a:buNone/>
-              <a:defRPr sz="2400" b="1">
-                <a:latin typeface="Raleway"/>
-                <a:ea typeface="Raleway"/>
-                <a:cs typeface="Raleway"/>
-                <a:sym typeface="Raleway"/>
-              </a:defRPr>
-            </a:lvl3pPr>
-            <a:lvl4pPr lvl="3" rtl="0">
-              <a:lnSpc>
-                <a:spcPct val="100000"/>
-              </a:lnSpc>
-              <a:spcBef>
-                <a:spcPts val="0"/>
-              </a:spcBef>
-              <a:spcAft>
-                <a:spcPts val="0"/>
-              </a:spcAft>
-              <a:buSzPts val="2400"/>
-              <a:buFont typeface="Raleway"/>
-              <a:buNone/>
-              <a:defRPr sz="2400" b="1">
-                <a:latin typeface="Raleway"/>
-                <a:ea typeface="Raleway"/>
-                <a:cs typeface="Raleway"/>
-                <a:sym typeface="Raleway"/>
-              </a:defRPr>
-            </a:lvl4pPr>
-            <a:lvl5pPr lvl="4" rtl="0">
-              <a:lnSpc>
-                <a:spcPct val="100000"/>
-              </a:lnSpc>
-              <a:spcBef>
-                <a:spcPts val="0"/>
-              </a:spcBef>
-              <a:spcAft>
-                <a:spcPts val="0"/>
-              </a:spcAft>
-              <a:buSzPts val="2400"/>
-              <a:buFont typeface="Raleway"/>
-              <a:buNone/>
-              <a:defRPr sz="2400" b="1">
-                <a:latin typeface="Raleway"/>
-                <a:ea typeface="Raleway"/>
-                <a:cs typeface="Raleway"/>
-                <a:sym typeface="Raleway"/>
-              </a:defRPr>
-            </a:lvl5pPr>
-            <a:lvl6pPr lvl="5" rtl="0">
-              <a:lnSpc>
-                <a:spcPct val="100000"/>
-              </a:lnSpc>
-              <a:spcBef>
-                <a:spcPts val="0"/>
-              </a:spcBef>
-              <a:spcAft>
-                <a:spcPts val="0"/>
-              </a:spcAft>
-              <a:buSzPts val="2400"/>
-              <a:buFont typeface="Raleway"/>
-              <a:buNone/>
-              <a:defRPr sz="2400" b="1">
-                <a:latin typeface="Raleway"/>
-                <a:ea typeface="Raleway"/>
-                <a:cs typeface="Raleway"/>
-                <a:sym typeface="Raleway"/>
-              </a:defRPr>
-            </a:lvl6pPr>
-            <a:lvl7pPr lvl="6" rtl="0">
-              <a:lnSpc>
-                <a:spcPct val="100000"/>
-              </a:lnSpc>
-              <a:spcBef>
-                <a:spcPts val="0"/>
-              </a:spcBef>
-              <a:spcAft>
-                <a:spcPts val="0"/>
-              </a:spcAft>
-              <a:buSzPts val="2400"/>
-              <a:buFont typeface="Raleway"/>
-              <a:buNone/>
-              <a:defRPr sz="2400" b="1">
-                <a:latin typeface="Raleway"/>
-                <a:ea typeface="Raleway"/>
-                <a:cs typeface="Raleway"/>
-                <a:sym typeface="Raleway"/>
-              </a:defRPr>
-            </a:lvl7pPr>
-            <a:lvl8pPr lvl="7" rtl="0">
-              <a:lnSpc>
-                <a:spcPct val="100000"/>
-              </a:lnSpc>
-              <a:spcBef>
-                <a:spcPts val="0"/>
-              </a:spcBef>
-              <a:spcAft>
-                <a:spcPts val="0"/>
-              </a:spcAft>
-              <a:buSzPts val="2400"/>
-              <a:buFont typeface="Raleway"/>
-              <a:buNone/>
-              <a:defRPr sz="2400" b="1">
-                <a:latin typeface="Raleway"/>
-                <a:ea typeface="Raleway"/>
-                <a:cs typeface="Raleway"/>
-                <a:sym typeface="Raleway"/>
-              </a:defRPr>
-            </a:lvl8pPr>
-            <a:lvl9pPr lvl="8" rtl="0">
-              <a:lnSpc>
-                <a:spcPct val="100000"/>
-              </a:lnSpc>
-              <a:spcBef>
-                <a:spcPts val="0"/>
-              </a:spcBef>
-              <a:spcAft>
-                <a:spcPts val="0"/>
-              </a:spcAft>
-              <a:buSzPts val="2400"/>
-              <a:buFont typeface="Raleway"/>
-              <a:buNone/>
-              <a:defRPr sz="2400" b="1">
-                <a:latin typeface="Raleway"/>
-                <a:ea typeface="Raleway"/>
-                <a:cs typeface="Raleway"/>
-                <a:sym typeface="Raleway"/>
-              </a:defRPr>
-            </a:lvl9pPr>
-          </a:lstStyle>
-          <a:p>
-            <a:endParaRPr/>
-          </a:p>
-        </p:txBody>
-      </p:sp>
-      <p:sp>
-        <p:nvSpPr>
-          <p:cNvPr id="101" name="Google Shape;101;p13"/>
-          <p:cNvSpPr txBox="1">
-            <a:spLocks noGrp="1"/>
-          </p:cNvSpPr>
-          <p:nvPr>
-            <p:ph type="subTitle" idx="14"/>
-          </p:nvPr>
-        </p:nvSpPr>
-        <p:spPr>
-          <a:xfrm>
-            <a:off x="3419250" y="3346300"/>
-            <a:ext cx="2305500" cy="788700"/>
-          </a:xfrm>
-          <a:prstGeom prst="rect">
-            <a:avLst/>
-          </a:prstGeom>
-        </p:spPr>
-        <p:txBody>
-          <a:bodyPr spcFirstLastPara="1" wrap="square" lIns="91425" tIns="91425" rIns="91425" bIns="91425" anchor="t" anchorCtr="0">
-            <a:noAutofit/>
-          </a:bodyPr>
-          <a:lstStyle>
-            <a:lvl1pPr lvl="0" rtl="0">
-              <a:lnSpc>
-                <a:spcPct val="100000"/>
-              </a:lnSpc>
-              <a:spcBef>
-                <a:spcPts val="0"/>
-              </a:spcBef>
-              <a:spcAft>
-                <a:spcPts val="0"/>
-              </a:spcAft>
-              <a:buSzPts val="2400"/>
-              <a:buFont typeface="Raleway"/>
-              <a:buNone/>
-              <a:defRPr sz="2000">
-                <a:solidFill>
-                  <a:schemeClr val="dk1"/>
-                </a:solidFill>
-                <a:latin typeface="Castoro"/>
-                <a:ea typeface="Castoro"/>
-                <a:cs typeface="Castoro"/>
-                <a:sym typeface="Castoro"/>
-              </a:defRPr>
-            </a:lvl1pPr>
-            <a:lvl2pPr lvl="1" rtl="0">
-              <a:lnSpc>
-                <a:spcPct val="100000"/>
-              </a:lnSpc>
-              <a:spcBef>
-                <a:spcPts val="0"/>
-              </a:spcBef>
-              <a:spcAft>
-                <a:spcPts val="0"/>
-              </a:spcAft>
-              <a:buSzPts val="2400"/>
-              <a:buFont typeface="Raleway"/>
-              <a:buNone/>
-              <a:defRPr sz="2400" b="1">
-                <a:latin typeface="Raleway"/>
-                <a:ea typeface="Raleway"/>
-                <a:cs typeface="Raleway"/>
-                <a:sym typeface="Raleway"/>
-              </a:defRPr>
-            </a:lvl2pPr>
-            <a:lvl3pPr lvl="2" rtl="0">
-              <a:lnSpc>
-                <a:spcPct val="100000"/>
-              </a:lnSpc>
-              <a:spcBef>
-                <a:spcPts val="0"/>
-              </a:spcBef>
-              <a:spcAft>
-                <a:spcPts val="0"/>
-              </a:spcAft>
-              <a:buSzPts val="2400"/>
-              <a:buFont typeface="Raleway"/>
-              <a:buNone/>
-              <a:defRPr sz="2400" b="1">
-                <a:latin typeface="Raleway"/>
-                <a:ea typeface="Raleway"/>
-                <a:cs typeface="Raleway"/>
-                <a:sym typeface="Raleway"/>
-              </a:defRPr>
-            </a:lvl3pPr>
-            <a:lvl4pPr lvl="3" rtl="0">
-              <a:lnSpc>
-                <a:spcPct val="100000"/>
-              </a:lnSpc>
-              <a:spcBef>
-                <a:spcPts val="0"/>
-              </a:spcBef>
-              <a:spcAft>
-                <a:spcPts val="0"/>
-              </a:spcAft>
-              <a:buSzPts val="2400"/>
-              <a:buFont typeface="Raleway"/>
-              <a:buNone/>
-              <a:defRPr sz="2400" b="1">
-                <a:latin typeface="Raleway"/>
-                <a:ea typeface="Raleway"/>
-                <a:cs typeface="Raleway"/>
-                <a:sym typeface="Raleway"/>
-              </a:defRPr>
-            </a:lvl4pPr>
-            <a:lvl5pPr lvl="4" rtl="0">
-              <a:lnSpc>
-                <a:spcPct val="100000"/>
-              </a:lnSpc>
-              <a:spcBef>
-                <a:spcPts val="0"/>
-              </a:spcBef>
-              <a:spcAft>
-                <a:spcPts val="0"/>
-              </a:spcAft>
-              <a:buSzPts val="2400"/>
-              <a:buFont typeface="Raleway"/>
-              <a:buNone/>
-              <a:defRPr sz="2400" b="1">
-                <a:latin typeface="Raleway"/>
-                <a:ea typeface="Raleway"/>
-                <a:cs typeface="Raleway"/>
-                <a:sym typeface="Raleway"/>
-              </a:defRPr>
-            </a:lvl5pPr>
-            <a:lvl6pPr lvl="5" rtl="0">
-              <a:lnSpc>
-                <a:spcPct val="100000"/>
-              </a:lnSpc>
-              <a:spcBef>
-                <a:spcPts val="0"/>
-              </a:spcBef>
-              <a:spcAft>
-                <a:spcPts val="0"/>
-              </a:spcAft>
-              <a:buSzPts val="2400"/>
-              <a:buFont typeface="Raleway"/>
-              <a:buNone/>
-              <a:defRPr sz="2400" b="1">
-                <a:latin typeface="Raleway"/>
-                <a:ea typeface="Raleway"/>
-                <a:cs typeface="Raleway"/>
-                <a:sym typeface="Raleway"/>
-              </a:defRPr>
-            </a:lvl6pPr>
-            <a:lvl7pPr lvl="6" rtl="0">
-              <a:lnSpc>
-                <a:spcPct val="100000"/>
-              </a:lnSpc>
-              <a:spcBef>
-                <a:spcPts val="0"/>
-              </a:spcBef>
-              <a:spcAft>
-                <a:spcPts val="0"/>
-              </a:spcAft>
-              <a:buSzPts val="2400"/>
-              <a:buFont typeface="Raleway"/>
-              <a:buNone/>
-              <a:defRPr sz="2400" b="1">
-                <a:latin typeface="Raleway"/>
-                <a:ea typeface="Raleway"/>
-                <a:cs typeface="Raleway"/>
-                <a:sym typeface="Raleway"/>
-              </a:defRPr>
-            </a:lvl7pPr>
-            <a:lvl8pPr lvl="7" rtl="0">
-              <a:lnSpc>
-                <a:spcPct val="100000"/>
-              </a:lnSpc>
-              <a:spcBef>
-                <a:spcPts val="0"/>
-              </a:spcBef>
-              <a:spcAft>
-                <a:spcPts val="0"/>
-              </a:spcAft>
-              <a:buSzPts val="2400"/>
-              <a:buFont typeface="Raleway"/>
-              <a:buNone/>
-              <a:defRPr sz="2400" b="1">
-                <a:latin typeface="Raleway"/>
-                <a:ea typeface="Raleway"/>
-                <a:cs typeface="Raleway"/>
-                <a:sym typeface="Raleway"/>
-              </a:defRPr>
-            </a:lvl8pPr>
-            <a:lvl9pPr lvl="8" rtl="0">
-              <a:lnSpc>
-                <a:spcPct val="100000"/>
-              </a:lnSpc>
-              <a:spcBef>
-                <a:spcPts val="0"/>
-              </a:spcBef>
-              <a:spcAft>
-                <a:spcPts val="0"/>
-              </a:spcAft>
-              <a:buSzPts val="2400"/>
-              <a:buFont typeface="Raleway"/>
-              <a:buNone/>
-              <a:defRPr sz="2400" b="1">
-                <a:latin typeface="Raleway"/>
-                <a:ea typeface="Raleway"/>
-                <a:cs typeface="Raleway"/>
-                <a:sym typeface="Raleway"/>
-              </a:defRPr>
-            </a:lvl9pPr>
-          </a:lstStyle>
-          <a:p>
-            <a:endParaRPr/>
-          </a:p>
-        </p:txBody>
-      </p:sp>
-      <p:sp>
-        <p:nvSpPr>
-          <p:cNvPr id="102" name="Google Shape;102;p13"/>
-          <p:cNvSpPr txBox="1">
-            <a:spLocks noGrp="1"/>
-          </p:cNvSpPr>
-          <p:nvPr>
-            <p:ph type="subTitle" idx="15"/>
-          </p:nvPr>
-        </p:nvSpPr>
-        <p:spPr>
-          <a:xfrm>
-            <a:off x="6118488" y="3346300"/>
-            <a:ext cx="2305500" cy="788700"/>
-          </a:xfrm>
-          <a:prstGeom prst="rect">
-            <a:avLst/>
-          </a:prstGeom>
-        </p:spPr>
-        <p:txBody>
-          <a:bodyPr spcFirstLastPara="1" wrap="square" lIns="91425" tIns="91425" rIns="91425" bIns="91425" anchor="t" anchorCtr="0">
-            <a:noAutofit/>
-          </a:bodyPr>
-          <a:lstStyle>
-            <a:lvl1pPr lvl="0" rtl="0">
-              <a:lnSpc>
-                <a:spcPct val="100000"/>
-              </a:lnSpc>
-              <a:spcBef>
-                <a:spcPts val="0"/>
-              </a:spcBef>
-              <a:spcAft>
-                <a:spcPts val="0"/>
-              </a:spcAft>
-              <a:buSzPts val="2400"/>
-              <a:buFont typeface="Raleway"/>
-              <a:buNone/>
-              <a:defRPr sz="2000">
-                <a:solidFill>
-                  <a:schemeClr val="dk1"/>
-                </a:solidFill>
-                <a:latin typeface="Castoro"/>
-                <a:ea typeface="Castoro"/>
-                <a:cs typeface="Castoro"/>
-                <a:sym typeface="Castoro"/>
-              </a:defRPr>
-            </a:lvl1pPr>
-            <a:lvl2pPr lvl="1" rtl="0">
-              <a:lnSpc>
-                <a:spcPct val="100000"/>
-              </a:lnSpc>
-              <a:spcBef>
-                <a:spcPts val="0"/>
-              </a:spcBef>
-              <a:spcAft>
-                <a:spcPts val="0"/>
-              </a:spcAft>
-              <a:buSzPts val="2400"/>
-              <a:buFont typeface="Raleway"/>
-              <a:buNone/>
-              <a:defRPr sz="2400" b="1">
-                <a:latin typeface="Raleway"/>
-                <a:ea typeface="Raleway"/>
-                <a:cs typeface="Raleway"/>
-                <a:sym typeface="Raleway"/>
-              </a:defRPr>
-            </a:lvl2pPr>
-            <a:lvl3pPr lvl="2" rtl="0">
-              <a:lnSpc>
-                <a:spcPct val="100000"/>
-              </a:lnSpc>
-              <a:spcBef>
-                <a:spcPts val="0"/>
-              </a:spcBef>
-              <a:spcAft>
-                <a:spcPts val="0"/>
-              </a:spcAft>
-              <a:buSzPts val="2400"/>
-              <a:buFont typeface="Raleway"/>
-              <a:buNone/>
-              <a:defRPr sz="2400" b="1">
-                <a:latin typeface="Raleway"/>
-                <a:ea typeface="Raleway"/>
-                <a:cs typeface="Raleway"/>
-                <a:sym typeface="Raleway"/>
-              </a:defRPr>
-            </a:lvl3pPr>
-            <a:lvl4pPr lvl="3" rtl="0">
-              <a:lnSpc>
-                <a:spcPct val="100000"/>
-              </a:lnSpc>
-              <a:spcBef>
-                <a:spcPts val="0"/>
-              </a:spcBef>
-              <a:spcAft>
-                <a:spcPts val="0"/>
-              </a:spcAft>
-              <a:buSzPts val="2400"/>
-              <a:buFont typeface="Raleway"/>
-              <a:buNone/>
-              <a:defRPr sz="2400" b="1">
-                <a:latin typeface="Raleway"/>
-                <a:ea typeface="Raleway"/>
-                <a:cs typeface="Raleway"/>
-                <a:sym typeface="Raleway"/>
-              </a:defRPr>
-            </a:lvl4pPr>
-            <a:lvl5pPr lvl="4" rtl="0">
-              <a:lnSpc>
-                <a:spcPct val="100000"/>
-              </a:lnSpc>
-              <a:spcBef>
-                <a:spcPts val="0"/>
-              </a:spcBef>
-              <a:spcAft>
-                <a:spcPts val="0"/>
-              </a:spcAft>
-              <a:buSzPts val="2400"/>
-              <a:buFont typeface="Raleway"/>
-              <a:buNone/>
-              <a:defRPr sz="2400" b="1">
-                <a:latin typeface="Raleway"/>
-                <a:ea typeface="Raleway"/>
-                <a:cs typeface="Raleway"/>
-                <a:sym typeface="Raleway"/>
-              </a:defRPr>
-            </a:lvl5pPr>
-            <a:lvl6pPr lvl="5" rtl="0">
-              <a:lnSpc>
-                <a:spcPct val="100000"/>
-              </a:lnSpc>
-              <a:spcBef>
-                <a:spcPts val="0"/>
-              </a:spcBef>
-              <a:spcAft>
-                <a:spcPts val="0"/>
-              </a:spcAft>
-              <a:buSzPts val="2400"/>
-              <a:buFont typeface="Raleway"/>
-              <a:buNone/>
-              <a:defRPr sz="2400" b="1">
-                <a:latin typeface="Raleway"/>
-                <a:ea typeface="Raleway"/>
-                <a:cs typeface="Raleway"/>
-                <a:sym typeface="Raleway"/>
-              </a:defRPr>
-            </a:lvl6pPr>
-            <a:lvl7pPr lvl="6" rtl="0">
-              <a:lnSpc>
-                <a:spcPct val="100000"/>
-              </a:lnSpc>
-              <a:spcBef>
-                <a:spcPts val="0"/>
-              </a:spcBef>
-              <a:spcAft>
-                <a:spcPts val="0"/>
-              </a:spcAft>
-              <a:buSzPts val="2400"/>
-              <a:buFont typeface="Raleway"/>
-              <a:buNone/>
-              <a:defRPr sz="2400" b="1">
-                <a:latin typeface="Raleway"/>
-                <a:ea typeface="Raleway"/>
-                <a:cs typeface="Raleway"/>
-                <a:sym typeface="Raleway"/>
-              </a:defRPr>
-            </a:lvl7pPr>
-            <a:lvl8pPr lvl="7" rtl="0">
-              <a:lnSpc>
-                <a:spcPct val="100000"/>
-              </a:lnSpc>
-              <a:spcBef>
-                <a:spcPts val="0"/>
-              </a:spcBef>
-              <a:spcAft>
-                <a:spcPts val="0"/>
-              </a:spcAft>
-              <a:buSzPts val="2400"/>
-              <a:buFont typeface="Raleway"/>
-              <a:buNone/>
-              <a:defRPr sz="2400" b="1">
-                <a:latin typeface="Raleway"/>
-                <a:ea typeface="Raleway"/>
-                <a:cs typeface="Raleway"/>
-                <a:sym typeface="Raleway"/>
-              </a:defRPr>
-            </a:lvl8pPr>
-            <a:lvl9pPr lvl="8" rtl="0">
-              <a:lnSpc>
-                <a:spcPct val="100000"/>
-              </a:lnSpc>
-              <a:spcBef>
-                <a:spcPts val="0"/>
-              </a:spcBef>
-              <a:spcAft>
-                <a:spcPts val="0"/>
-              </a:spcAft>
-              <a:buSzPts val="2400"/>
-              <a:buFont typeface="Raleway"/>
-              <a:buNone/>
-              <a:defRPr sz="2400" b="1">
-                <a:latin typeface="Raleway"/>
-                <a:ea typeface="Raleway"/>
-                <a:cs typeface="Raleway"/>
-                <a:sym typeface="Raleway"/>
-              </a:defRPr>
-            </a:lvl9pPr>
-          </a:lstStyle>
-          <a:p>
-            <a:endParaRPr/>
-          </a:p>
-        </p:txBody>
-      </p:sp>
-      <p:grpSp>
-        <p:nvGrpSpPr>
-          <p:cNvPr id="103" name="Google Shape;103;p13"/>
-          <p:cNvGrpSpPr/>
-          <p:nvPr/>
-        </p:nvGrpSpPr>
-        <p:grpSpPr>
-          <a:xfrm>
-            <a:off x="410425" y="185850"/>
-            <a:ext cx="8553763" cy="4632105"/>
-            <a:chOff x="410425" y="185850"/>
-            <a:chExt cx="8553763" cy="4632105"/>
-          </a:xfrm>
-        </p:grpSpPr>
-        <p:sp>
-          <p:nvSpPr>
-            <p:cNvPr id="104" name="Google Shape;104;p13"/>
-            <p:cNvSpPr/>
-            <p:nvPr/>
-          </p:nvSpPr>
-          <p:spPr>
-            <a:xfrm rot="5400000">
-              <a:off x="3038138" y="4524105"/>
-              <a:ext cx="81900" cy="505800"/>
-            </a:xfrm>
-            <a:prstGeom prst="roundRect">
-              <a:avLst>
-                <a:gd name="adj" fmla="val 50000"/>
-              </a:avLst>
-            </a:prstGeom>
-            <a:solidFill>
-              <a:schemeClr val="dk1"/>
-            </a:solidFill>
-            <a:ln>
-              <a:noFill/>
-            </a:ln>
-          </p:spPr>
-          <p:txBody>
-            <a:bodyPr spcFirstLastPara="1" wrap="square" lIns="91425" tIns="91425" rIns="91425" bIns="91425" anchor="ctr" anchorCtr="0">
-              <a:noAutofit/>
-            </a:bodyPr>
-            <a:lstStyle/>
-            <a:p>
-              <a:pPr marL="0" lvl="0" indent="0" algn="ctr" rtl="0">
-                <a:spcBef>
-                  <a:spcPts val="0"/>
-                </a:spcBef>
-                <a:spcAft>
-                  <a:spcPts val="0"/>
-                </a:spcAft>
-                <a:buNone/>
-              </a:pPr>
-              <a:endParaRPr>
-                <a:latin typeface="Akatab"/>
-                <a:ea typeface="Akatab"/>
-                <a:cs typeface="Akatab"/>
-                <a:sym typeface="Akatab"/>
-              </a:endParaRPr>
-            </a:p>
-          </p:txBody>
-        </p:sp>
-        <p:cxnSp>
-          <p:nvCxnSpPr>
-            <p:cNvPr id="105" name="Google Shape;105;p13"/>
-            <p:cNvCxnSpPr>
-              <a:stCxn id="104" idx="0"/>
-            </p:cNvCxnSpPr>
-            <p:nvPr/>
-          </p:nvCxnSpPr>
-          <p:spPr>
-            <a:xfrm>
-              <a:off x="3331988" y="4777005"/>
-              <a:ext cx="5632200" cy="0"/>
-            </a:xfrm>
-            <a:prstGeom prst="straightConnector1">
-              <a:avLst/>
-            </a:prstGeom>
-            <a:noFill/>
-            <a:ln w="9525" cap="flat" cmpd="sng">
-              <a:solidFill>
-                <a:schemeClr val="dk1"/>
-              </a:solidFill>
-              <a:prstDash val="solid"/>
-              <a:round/>
-              <a:headEnd type="none" w="med" len="med"/>
-              <a:tailEnd type="none" w="med" len="med"/>
-            </a:ln>
-          </p:spPr>
-        </p:cxnSp>
-        <p:sp>
-          <p:nvSpPr>
-            <p:cNvPr id="106" name="Google Shape;106;p13"/>
-            <p:cNvSpPr/>
-            <p:nvPr/>
-          </p:nvSpPr>
-          <p:spPr>
-            <a:xfrm>
-              <a:off x="410425" y="1386150"/>
-              <a:ext cx="81900" cy="505800"/>
-            </a:xfrm>
-            <a:prstGeom prst="roundRect">
-              <a:avLst>
-                <a:gd name="adj" fmla="val 50000"/>
-              </a:avLst>
-            </a:prstGeom>
-            <a:solidFill>
-              <a:schemeClr val="dk1"/>
-            </a:solidFill>
-            <a:ln>
-              <a:noFill/>
-            </a:ln>
-          </p:spPr>
-          <p:txBody>
-            <a:bodyPr spcFirstLastPara="1" wrap="square" lIns="91425" tIns="91425" rIns="91425" bIns="91425" anchor="ctr" anchorCtr="0">
-              <a:noAutofit/>
-            </a:bodyPr>
-            <a:lstStyle/>
-            <a:p>
-              <a:pPr marL="0" lvl="0" indent="0" algn="ctr" rtl="0">
-                <a:spcBef>
-                  <a:spcPts val="0"/>
-                </a:spcBef>
-                <a:spcAft>
-                  <a:spcPts val="0"/>
-                </a:spcAft>
-                <a:buNone/>
-              </a:pPr>
-              <a:endParaRPr>
-                <a:latin typeface="Akatab"/>
-                <a:ea typeface="Akatab"/>
-                <a:cs typeface="Akatab"/>
-                <a:sym typeface="Akatab"/>
-              </a:endParaRPr>
-            </a:p>
-          </p:txBody>
-        </p:sp>
-        <p:cxnSp>
-          <p:nvCxnSpPr>
-            <p:cNvPr id="107" name="Google Shape;107;p13"/>
-            <p:cNvCxnSpPr>
-              <a:stCxn id="106" idx="0"/>
-            </p:cNvCxnSpPr>
-            <p:nvPr/>
-          </p:nvCxnSpPr>
-          <p:spPr>
-            <a:xfrm rot="10800000">
-              <a:off x="451375" y="185850"/>
-              <a:ext cx="0" cy="1200300"/>
-            </a:xfrm>
-            <a:prstGeom prst="straightConnector1">
-              <a:avLst/>
-            </a:prstGeom>
-            <a:noFill/>
-            <a:ln w="9525" cap="flat" cmpd="sng">
-              <a:solidFill>
-                <a:schemeClr val="dk1"/>
-              </a:solidFill>
-              <a:prstDash val="dot"/>
-              <a:round/>
-              <a:headEnd type="none" w="med" len="med"/>
-              <a:tailEnd type="none" w="med" len="med"/>
-            </a:ln>
-          </p:spPr>
-        </p:cxnSp>
-      </p:grpSp>
-    </p:spTree>
-  </p:cSld>
-  <p:clrMapOvr>
-    <a:masterClrMapping/>
-  </p:clrMapOvr>
-</p:sldLayout>
-</file>
-
-<file path=ppt/slideLayouts/slideLayout7.xml><?xml version="1.0" encoding="utf-8"?>
+<file path=ppt/slideLayouts/slideLayout5.xml><?xml version="1.0" encoding="utf-8"?>
 <p:sldLayout xmlns:a="http://schemas.openxmlformats.org/drawingml/2006/main" xmlns:r="http://schemas.openxmlformats.org/officeDocument/2006/relationships" xmlns:p="http://schemas.openxmlformats.org/presentationml/2006/main" matchingName="Thanks">
   <p:cSld name="CUSTOM_3_1">
     <p:bg>
@@ -6374,7 +3209,7 @@
 </p:sldLayout>
 </file>
 
-<file path=ppt/slideLayouts/slideLayout8.xml><?xml version="1.0" encoding="utf-8"?>
+<file path=ppt/slideLayouts/slideLayout6.xml><?xml version="1.0" encoding="utf-8"?>
 <p:sldLayout xmlns:a="http://schemas.openxmlformats.org/drawingml/2006/main" xmlns:r="http://schemas.openxmlformats.org/officeDocument/2006/relationships" xmlns:p="http://schemas.openxmlformats.org/presentationml/2006/main" matchingName="Background">
   <p:cSld name="CUSTOM_9">
     <p:spTree>
@@ -6628,7 +3463,7 @@
 </p:sldLayout>
 </file>
 
-<file path=ppt/slideLayouts/slideLayout9.xml><?xml version="1.0" encoding="utf-8"?>
+<file path=ppt/slideLayouts/slideLayout7.xml><?xml version="1.0" encoding="utf-8"?>
 <p:sldLayout xmlns:a="http://schemas.openxmlformats.org/drawingml/2006/main" xmlns:r="http://schemas.openxmlformats.org/officeDocument/2006/relationships" xmlns:p="http://schemas.openxmlformats.org/presentationml/2006/main" matchingName="Background 1">
   <p:cSld name="CUSTOM_9_1">
     <p:spTree>
@@ -7409,14 +4244,12 @@
   <p:clrMap bg1="lt1" tx1="dk1" bg2="dk2" tx2="lt2" accent1="accent1" accent2="accent2" accent3="accent3" accent4="accent4" accent5="accent5" accent6="accent6" hlink="hlink" folHlink="folHlink"/>
   <p:sldLayoutIdLst>
     <p:sldLayoutId id="2147483648" r:id="rId1"/>
-    <p:sldLayoutId id="2147483649" r:id="rId2"/>
-    <p:sldLayoutId id="2147483654" r:id="rId3"/>
-    <p:sldLayoutId id="2147483655" r:id="rId4"/>
-    <p:sldLayoutId id="2147483658" r:id="rId5"/>
-    <p:sldLayoutId id="2147483659" r:id="rId6"/>
-    <p:sldLayoutId id="2147483670" r:id="rId7"/>
-    <p:sldLayoutId id="2147483671" r:id="rId8"/>
-    <p:sldLayoutId id="2147483672" r:id="rId9"/>
+    <p:sldLayoutId id="2147483654" r:id="rId2"/>
+    <p:sldLayoutId id="2147483655" r:id="rId3"/>
+    <p:sldLayoutId id="2147483658" r:id="rId4"/>
+    <p:sldLayoutId id="2147483670" r:id="rId5"/>
+    <p:sldLayoutId id="2147483671" r:id="rId6"/>
+    <p:sldLayoutId id="2147483672" r:id="rId7"/>
   </p:sldLayoutIdLst>
   <p:hf hdr="0" ftr="0" dt="0"/>
   <p:txStyles>
@@ -8140,8 +4973,8 @@
         </p:nvSpPr>
         <p:spPr>
           <a:xfrm>
-            <a:off x="1597400" y="667850"/>
-            <a:ext cx="6396300" cy="2296500"/>
+            <a:off x="845820" y="667850"/>
+            <a:ext cx="7147880" cy="2296500"/>
           </a:xfrm>
           <a:prstGeom prst="rect">
             <a:avLst/>
@@ -8163,14 +4996,54 @@
               <a:buNone/>
             </a:pPr>
             <a:r>
-              <a:rPr lang="en" sz="6000"/>
-              <a:t>Executive Design </a:t>
+              <a:rPr lang="es-MX" sz="5400" b="1" dirty="0" err="1"/>
+              <a:t>Simulated</a:t>
             </a:r>
             <a:r>
-              <a:rPr lang="en" sz="4000" i="1"/>
-              <a:t>Company Profile</a:t>
+              <a:rPr lang="es-MX" sz="5400" b="1" dirty="0"/>
+              <a:t> </a:t>
             </a:r>
-            <a:endParaRPr sz="4000" i="1"/>
+            <a:r>
+              <a:rPr lang="es-MX" sz="5400" b="1" dirty="0" err="1"/>
+              <a:t>Annealing</a:t>
+            </a:r>
+            <a:r>
+              <a:rPr lang="es-MX" sz="5400" b="1" dirty="0"/>
+              <a:t> </a:t>
+            </a:r>
+            <a:r>
+              <a:rPr lang="es-MX" sz="5400" dirty="0"/>
+              <a:t>vs </a:t>
+            </a:r>
+            <a:r>
+              <a:rPr lang="es-MX" sz="5400" b="1" dirty="0"/>
+              <a:t>Hill </a:t>
+            </a:r>
+            <a:r>
+              <a:rPr lang="es-MX" sz="5400" b="1" dirty="0" err="1"/>
+              <a:t>Climbing</a:t>
+            </a:r>
+            <a:endParaRPr lang="es-MX" sz="5400" b="1" dirty="0"/>
+          </a:p>
+          <a:p>
+            <a:pPr marL="0" lvl="0" indent="0" algn="r" rtl="0">
+              <a:spcBef>
+                <a:spcPts val="600"/>
+              </a:spcBef>
+              <a:spcAft>
+                <a:spcPts val="0"/>
+              </a:spcAft>
+              <a:buNone/>
+            </a:pPr>
+            <a:r>
+              <a:rPr lang="es-MX" sz="2000" i="1" dirty="0"/>
+              <a:t>Implementación, comparativa y análisis de </a:t>
+            </a:r>
+            <a:r>
+              <a:rPr lang="es-MX" sz="2000" i="1" dirty="0" err="1"/>
+              <a:t>hiperparámetros</a:t>
+            </a:r>
+            <a:endParaRPr lang="es-MX" sz="2000" i="1" dirty="0"/>
           </a:p>
         </p:txBody>
       </p:sp>
@@ -8186,8 +5059,8 @@
         </p:nvSpPr>
         <p:spPr>
           <a:xfrm>
-            <a:off x="5463800" y="3480892"/>
-            <a:ext cx="2529900" cy="679500"/>
+            <a:off x="3566160" y="3480892"/>
+            <a:ext cx="4427540" cy="679500"/>
           </a:xfrm>
           <a:prstGeom prst="rect">
             <a:avLst/>
@@ -8209,14 +5082,63 @@
               <a:buNone/>
             </a:pPr>
             <a:r>
-              <a:rPr lang="en"/>
-              <a:t>Here is where your presentation begins</a:t>
+              <a:rPr lang="es-MX" sz="1400" b="1" dirty="0"/>
+              <a:t>Inteligencia Artificial · Algoritmos de Búsqueda</a:t>
             </a:r>
-            <a:endParaRPr/>
+          </a:p>
+          <a:p>
+            <a:pPr marL="0" lvl="0" indent="0" algn="r" rtl="0">
+              <a:spcBef>
+                <a:spcPts val="200"/>
+              </a:spcBef>
+              <a:spcAft>
+                <a:spcPts val="0"/>
+              </a:spcAft>
+              <a:buNone/>
+            </a:pPr>
+            <a:r>
+              <a:rPr lang="es-MX" sz="1200" dirty="0"/>
+              <a:t>Patrick Ramirez</a:t>
+            </a:r>
+          </a:p>
+          <a:p>
+            <a:pPr marL="0" lvl="0" indent="0" algn="r" rtl="0">
+              <a:spcBef>
+                <a:spcPts val="200"/>
+              </a:spcBef>
+              <a:spcAft>
+                <a:spcPts val="0"/>
+              </a:spcAft>
+              <a:buNone/>
+            </a:pPr>
+            <a:r>
+              <a:rPr lang="es-MX" sz="1200" dirty="0"/>
+              <a:t>Rodrigo Ancori</a:t>
+            </a:r>
+          </a:p>
+          <a:p>
+            <a:pPr marL="0" lvl="0" indent="0" algn="r" rtl="0">
+              <a:spcBef>
+                <a:spcPts val="200"/>
+              </a:spcBef>
+              <a:spcAft>
+                <a:spcPts val="0"/>
+              </a:spcAft>
+              <a:buNone/>
+            </a:pPr>
+            <a:r>
+              <a:rPr lang="es-MX" sz="1200" i="1" dirty="0"/>
+              <a:t>30 de abril de 2026</a:t>
+            </a:r>
           </a:p>
         </p:txBody>
       </p:sp>
     </p:spTree>
+    <p:extLst>
+      <p:ext uri="{BB962C8B-B14F-4D97-AF65-F5344CB8AC3E}">
+        <p14:creationId xmlns:p14="http://schemas.microsoft.com/office/powerpoint/2010/main" val="3552722720"/>
+      </p:ext>
+    </p:extLst>
   </p:cSld>
   <p:clrMapOvr>
     <a:masterClrMapping/>
@@ -8224,20 +5146,12 @@
 </p:sld>
 </file>
 
-<file path=ppt/slides/slide2.xml><?xml version="1.0" encoding="utf-8"?>
+<file path=ppt/slides/slide10.xml><?xml version="1.0" encoding="utf-8"?>
 <p:sld xmlns:a="http://schemas.openxmlformats.org/drawingml/2006/main" xmlns:r="http://schemas.openxmlformats.org/officeDocument/2006/relationships" xmlns:p="http://schemas.openxmlformats.org/presentationml/2006/main">
   <p:cSld>
-    <p:bg>
-      <p:bgPr>
-        <a:solidFill>
-          <a:schemeClr val="dk2"/>
-        </a:solidFill>
-        <a:effectLst/>
-      </p:bgPr>
-    </p:bg>
     <p:spTree>
       <p:nvGrpSpPr>
-        <p:cNvPr id="1" name="Shape 262"/>
+        <p:cNvPr id="1" name=""/>
         <p:cNvGrpSpPr/>
         <p:nvPr/>
       </p:nvGrpSpPr>
@@ -8251,330 +5165,669 @@
       </p:grpSpPr>
       <p:sp>
         <p:nvSpPr>
-          <p:cNvPr id="263" name="Google Shape;263;p32"/>
-          <p:cNvSpPr txBox="1">
-            <a:spLocks noGrp="1"/>
-          </p:cNvSpPr>
-          <p:nvPr>
-            <p:ph type="title"/>
-          </p:nvPr>
+          <p:cNvPr id="2" name="CuadroTexto 1">
+            <a:extLst>
+              <a:ext uri="{FF2B5EF4-FFF2-40B4-BE49-F238E27FC236}">
+                <a16:creationId xmlns:a16="http://schemas.microsoft.com/office/drawing/2014/main" id="{65A99E2C-666A-4A88-B060-2C3869AC4F11}"/>
+              </a:ext>
+            </a:extLst>
+          </p:cNvPr>
+          <p:cNvSpPr txBox="1"/>
+          <p:nvPr/>
         </p:nvSpPr>
         <p:spPr>
           <a:xfrm>
-            <a:off x="961425" y="2680575"/>
-            <a:ext cx="4383600" cy="1723800"/>
+            <a:off x="508000" y="381000"/>
+            <a:ext cx="8128000" cy="457200"/>
           </a:xfrm>
           <a:prstGeom prst="rect">
             <a:avLst/>
           </a:prstGeom>
+          <a:noFill/>
         </p:spPr>
         <p:txBody>
-          <a:bodyPr spcFirstLastPara="1" wrap="square" lIns="91425" tIns="91425" rIns="91425" bIns="91425" anchor="t" anchorCtr="0">
+          <a:bodyPr vertOverflow="overflow" vert="horz" wrap="square" rtlCol="0" anchor="t">
             <a:noAutofit/>
           </a:bodyPr>
           <a:lstStyle/>
           <a:p>
-            <a:pPr marL="0" lvl="0" indent="0" algn="l" rtl="0">
-              <a:spcBef>
-                <a:spcPts val="0"/>
-              </a:spcBef>
-              <a:spcAft>
-                <a:spcPts val="0"/>
-              </a:spcAft>
-              <a:buNone/>
-            </a:pPr>
+            <a:pPr algn="l"/>
             <a:r>
-              <a:rPr lang="en">
-                <a:solidFill>
-                  <a:schemeClr val="lt1"/>
+              <a:rPr lang="es-MX" sz="2800" b="1">
+                <a:solidFill>
+                  <a:srgbClr val="030920"/>
                 </a:solidFill>
               </a:rPr>
-              <a:t>Name of</a:t>
+              <a:t>Valores recomendados</a:t>
             </a:r>
-            <a:endParaRPr>
-              <a:solidFill>
-                <a:schemeClr val="lt1"/>
-              </a:solidFill>
-            </a:endParaRPr>
-          </a:p>
-          <a:p>
-            <a:pPr marL="0" lvl="0" indent="0" algn="l" rtl="0">
-              <a:spcBef>
-                <a:spcPts val="0"/>
-              </a:spcBef>
-              <a:spcAft>
-                <a:spcPts val="0"/>
-              </a:spcAft>
-              <a:buNone/>
-            </a:pPr>
-            <a:r>
-              <a:rPr lang="en">
-                <a:solidFill>
-                  <a:schemeClr val="lt1"/>
-                </a:solidFill>
-              </a:rPr>
-              <a:t>the section</a:t>
-            </a:r>
-            <a:endParaRPr>
-              <a:solidFill>
-                <a:schemeClr val="lt1"/>
-              </a:solidFill>
-            </a:endParaRPr>
           </a:p>
         </p:txBody>
       </p:sp>
       <p:sp>
         <p:nvSpPr>
-          <p:cNvPr id="264" name="Google Shape;264;p32"/>
-          <p:cNvSpPr txBox="1">
-            <a:spLocks noGrp="1"/>
-          </p:cNvSpPr>
-          <p:nvPr>
-            <p:ph type="title" idx="2"/>
-          </p:nvPr>
+          <p:cNvPr id="3" name="CuadroTexto 2">
+            <a:extLst>
+              <a:ext uri="{FF2B5EF4-FFF2-40B4-BE49-F238E27FC236}">
+                <a16:creationId xmlns:a16="http://schemas.microsoft.com/office/drawing/2014/main" id="{CAFDAE4C-9FAE-4B0E-8A29-3A104B338A07}"/>
+              </a:ext>
+            </a:extLst>
+          </p:cNvPr>
+          <p:cNvSpPr txBox="1"/>
+          <p:nvPr/>
         </p:nvSpPr>
         <p:spPr>
           <a:xfrm>
-            <a:off x="961425" y="1649425"/>
-            <a:ext cx="1032300" cy="743700"/>
+            <a:off x="508000" y="825500"/>
+            <a:ext cx="8128000" cy="279400"/>
           </a:xfrm>
           <a:prstGeom prst="rect">
             <a:avLst/>
           </a:prstGeom>
+          <a:noFill/>
         </p:spPr>
         <p:txBody>
-          <a:bodyPr spcFirstLastPara="1" wrap="square" lIns="91425" tIns="91425" rIns="91425" bIns="91425" anchor="ctr" anchorCtr="0">
+          <a:bodyPr vertOverflow="overflow" vert="horz" wrap="square" rtlCol="0" anchor="t">
             <a:noAutofit/>
           </a:bodyPr>
           <a:lstStyle/>
           <a:p>
-            <a:pPr marL="0" lvl="0" indent="0" algn="l" rtl="0">
-              <a:spcBef>
-                <a:spcPts val="0"/>
-              </a:spcBef>
-              <a:spcAft>
-                <a:spcPts val="0"/>
-              </a:spcAft>
-              <a:buNone/>
-            </a:pPr>
+            <a:pPr algn="l"/>
             <a:r>
-              <a:rPr lang="en"/>
-              <a:t>01.</a:t>
+              <a:rPr lang="es-MX" sz="1300" i="1">
+                <a:solidFill>
+                  <a:srgbClr val="030920"/>
+                </a:solidFill>
+              </a:rPr>
+              <a:t>Configuración de Simulated Annealing</a:t>
             </a:r>
-            <a:endParaRPr/>
           </a:p>
         </p:txBody>
       </p:sp>
-      <p:grpSp>
-        <p:nvGrpSpPr>
-          <p:cNvPr id="265" name="Google Shape;265;p32"/>
-          <p:cNvGrpSpPr/>
+      <p:graphicFrame>
+        <p:nvGraphicFramePr>
+          <p:cNvPr id="5" name="Tabla 4">
+            <a:extLst>
+              <a:ext uri="{FF2B5EF4-FFF2-40B4-BE49-F238E27FC236}">
+                <a16:creationId xmlns:a16="http://schemas.microsoft.com/office/drawing/2014/main" id="{94C03598-4F2E-4DC7-8E2C-249B1110C25E}"/>
+              </a:ext>
+            </a:extLst>
+          </p:cNvPr>
+          <p:cNvGraphicFramePr>
+            <a:graphicFrameLocks noGrp="1"/>
+          </p:cNvGraphicFramePr>
+          <p:nvPr>
+            <p:extLst>
+              <p:ext uri="{D42A27DB-BD31-4B8C-83A1-F6EECF244321}">
+                <p14:modId xmlns:p14="http://schemas.microsoft.com/office/powerpoint/2010/main" val="2598090760"/>
+              </p:ext>
+            </p:extLst>
+          </p:nvPr>
+        </p:nvGraphicFramePr>
+        <p:xfrm>
+          <a:off x="508000" y="1333500"/>
+          <a:ext cx="8128000" cy="2921000"/>
+        </p:xfrm>
+        <a:graphic>
+          <a:graphicData uri="http://schemas.openxmlformats.org/drawingml/2006/table">
+            <a:tbl>
+              <a:tblPr firstRow="1" bandRow="1">
+                <a:tableStyleId>{AE4A624E-C7F9-4CB7-A30D-41E38F5E4052}</a:tableStyleId>
+              </a:tblPr>
+              <a:tblGrid>
+                <a:gridCol w="2032000">
+                  <a:extLst>
+                    <a:ext uri="{9D8B030D-6E8A-4147-A177-3AD203B41FA5}">
+                      <a16:colId xmlns:a16="http://schemas.microsoft.com/office/drawing/2014/main" val="3680816420"/>
+                    </a:ext>
+                  </a:extLst>
+                </a:gridCol>
+                <a:gridCol w="2032000">
+                  <a:extLst>
+                    <a:ext uri="{9D8B030D-6E8A-4147-A177-3AD203B41FA5}">
+                      <a16:colId xmlns:a16="http://schemas.microsoft.com/office/drawing/2014/main" val="441758112"/>
+                    </a:ext>
+                  </a:extLst>
+                </a:gridCol>
+                <a:gridCol w="2032000">
+                  <a:extLst>
+                    <a:ext uri="{9D8B030D-6E8A-4147-A177-3AD203B41FA5}">
+                      <a16:colId xmlns:a16="http://schemas.microsoft.com/office/drawing/2014/main" val="3081748676"/>
+                    </a:ext>
+                  </a:extLst>
+                </a:gridCol>
+                <a:gridCol w="2032000">
+                  <a:extLst>
+                    <a:ext uri="{9D8B030D-6E8A-4147-A177-3AD203B41FA5}">
+                      <a16:colId xmlns:a16="http://schemas.microsoft.com/office/drawing/2014/main" val="1628708488"/>
+                    </a:ext>
+                  </a:extLst>
+                </a:gridCol>
+              </a:tblGrid>
+              <a:tr h="584200">
+                <a:tc>
+                  <a:txBody>
+                    <a:bodyPr/>
+                    <a:lstStyle/>
+                    <a:p>
+                      <a:pPr algn="ctr"/>
+                      <a:r>
+                        <a:rPr lang="es-MX" sz="1400" b="1">
+                          <a:solidFill>
+                            <a:srgbClr val="FFFFFF"/>
+                          </a:solidFill>
+                        </a:rPr>
+                        <a:t>Hiperparámetro</a:t>
+                      </a:r>
+                    </a:p>
+                  </a:txBody>
+                  <a:tcPr anchor="ctr">
+                    <a:solidFill>
+                      <a:srgbClr val="1F77B4"/>
+                    </a:solidFill>
+                  </a:tcPr>
+                </a:tc>
+                <a:tc>
+                  <a:txBody>
+                    <a:bodyPr/>
+                    <a:lstStyle/>
+                    <a:p>
+                      <a:pPr algn="ctr"/>
+                      <a:r>
+                        <a:rPr lang="es-MX" sz="1400" b="1">
+                          <a:solidFill>
+                            <a:srgbClr val="FFFFFF"/>
+                          </a:solidFill>
+                        </a:rPr>
+                        <a:t>Rango bajo</a:t>
+                      </a:r>
+                    </a:p>
+                  </a:txBody>
+                  <a:tcPr anchor="ctr">
+                    <a:solidFill>
+                      <a:srgbClr val="1F77B4"/>
+                    </a:solidFill>
+                  </a:tcPr>
+                </a:tc>
+                <a:tc>
+                  <a:txBody>
+                    <a:bodyPr/>
+                    <a:lstStyle/>
+                    <a:p>
+                      <a:pPr algn="ctr"/>
+                      <a:r>
+                        <a:rPr lang="es-MX" sz="1400" b="1">
+                          <a:solidFill>
+                            <a:srgbClr val="FFFFFF"/>
+                          </a:solidFill>
+                        </a:rPr>
+                        <a:t>Recomendado</a:t>
+                      </a:r>
+                    </a:p>
+                  </a:txBody>
+                  <a:tcPr anchor="ctr">
+                    <a:solidFill>
+                      <a:srgbClr val="1F77B4"/>
+                    </a:solidFill>
+                  </a:tcPr>
+                </a:tc>
+                <a:tc>
+                  <a:txBody>
+                    <a:bodyPr/>
+                    <a:lstStyle/>
+                    <a:p>
+                      <a:pPr algn="ctr"/>
+                      <a:r>
+                        <a:rPr lang="es-MX" sz="1400" b="1">
+                          <a:solidFill>
+                            <a:srgbClr val="FFFFFF"/>
+                          </a:solidFill>
+                        </a:rPr>
+                        <a:t>Rango alto</a:t>
+                      </a:r>
+                    </a:p>
+                  </a:txBody>
+                  <a:tcPr anchor="ctr">
+                    <a:solidFill>
+                      <a:srgbClr val="1F77B4"/>
+                    </a:solidFill>
+                  </a:tcPr>
+                </a:tc>
+                <a:extLst>
+                  <a:ext uri="{0D108BD9-81ED-4DB2-BD59-A6C34878D82A}">
+                    <a16:rowId xmlns:a16="http://schemas.microsoft.com/office/drawing/2014/main" val="609375703"/>
+                  </a:ext>
+                </a:extLst>
+              </a:tr>
+              <a:tr h="584200">
+                <a:tc>
+                  <a:txBody>
+                    <a:bodyPr/>
+                    <a:lstStyle/>
+                    <a:p>
+                      <a:pPr algn="l"/>
+                      <a:r>
+                        <a:rPr lang="es-MX" sz="1400">
+                          <a:solidFill>
+                            <a:srgbClr val="030920"/>
+                          </a:solidFill>
+                        </a:rPr>
+                        <a:t>T₀  (temperatura inicial)</a:t>
+                      </a:r>
+                    </a:p>
+                  </a:txBody>
+                  <a:tcPr anchor="ctr">
+                    <a:solidFill>
+                      <a:srgbClr val="FFFFFF"/>
+                    </a:solidFill>
+                  </a:tcPr>
+                </a:tc>
+                <a:tc>
+                  <a:txBody>
+                    <a:bodyPr/>
+                    <a:lstStyle/>
+                    <a:p>
+                      <a:pPr algn="ctr"/>
+                      <a:r>
+                        <a:rPr lang="es-MX" sz="1400">
+                          <a:solidFill>
+                            <a:srgbClr val="030920"/>
+                          </a:solidFill>
+                        </a:rPr>
+                        <a:t>1 – 5</a:t>
+                      </a:r>
+                    </a:p>
+                  </a:txBody>
+                  <a:tcPr anchor="ctr">
+                    <a:solidFill>
+                      <a:srgbClr val="FFFFFF"/>
+                    </a:solidFill>
+                  </a:tcPr>
+                </a:tc>
+                <a:tc>
+                  <a:txBody>
+                    <a:bodyPr/>
+                    <a:lstStyle/>
+                    <a:p>
+                      <a:pPr algn="ctr"/>
+                      <a:r>
+                        <a:rPr lang="es-MX" sz="1400" b="1">
+                          <a:solidFill>
+                            <a:srgbClr val="030920"/>
+                          </a:solidFill>
+                        </a:rPr>
+                        <a:t>50 – 100</a:t>
+                      </a:r>
+                    </a:p>
+                  </a:txBody>
+                  <a:tcPr anchor="ctr">
+                    <a:solidFill>
+                      <a:srgbClr val="DDE6ED"/>
+                    </a:solidFill>
+                  </a:tcPr>
+                </a:tc>
+                <a:tc>
+                  <a:txBody>
+                    <a:bodyPr/>
+                    <a:lstStyle/>
+                    <a:p>
+                      <a:pPr algn="ctr"/>
+                      <a:r>
+                        <a:rPr lang="es-MX" sz="1400">
+                          <a:solidFill>
+                            <a:srgbClr val="030920"/>
+                          </a:solidFill>
+                        </a:rPr>
+                        <a:t>500+</a:t>
+                      </a:r>
+                    </a:p>
+                  </a:txBody>
+                  <a:tcPr anchor="ctr">
+                    <a:solidFill>
+                      <a:srgbClr val="FFFFFF"/>
+                    </a:solidFill>
+                  </a:tcPr>
+                </a:tc>
+                <a:extLst>
+                  <a:ext uri="{0D108BD9-81ED-4DB2-BD59-A6C34878D82A}">
+                    <a16:rowId xmlns:a16="http://schemas.microsoft.com/office/drawing/2014/main" val="473524490"/>
+                  </a:ext>
+                </a:extLst>
+              </a:tr>
+              <a:tr h="584200">
+                <a:tc>
+                  <a:txBody>
+                    <a:bodyPr/>
+                    <a:lstStyle/>
+                    <a:p>
+                      <a:pPr algn="l"/>
+                      <a:r>
+                        <a:rPr lang="es-MX" sz="1400">
+                          <a:solidFill>
+                            <a:srgbClr val="030920"/>
+                          </a:solidFill>
+                        </a:rPr>
+                        <a:t>α  (factor de enfriamiento)</a:t>
+                      </a:r>
+                    </a:p>
+                  </a:txBody>
+                  <a:tcPr anchor="ctr">
+                    <a:solidFill>
+                      <a:srgbClr val="FFFFFF"/>
+                    </a:solidFill>
+                  </a:tcPr>
+                </a:tc>
+                <a:tc>
+                  <a:txBody>
+                    <a:bodyPr/>
+                    <a:lstStyle/>
+                    <a:p>
+                      <a:pPr algn="ctr"/>
+                      <a:r>
+                        <a:rPr lang="es-MX" sz="1400">
+                          <a:solidFill>
+                            <a:srgbClr val="030920"/>
+                          </a:solidFill>
+                        </a:rPr>
+                        <a:t>0.80 – 0.90</a:t>
+                      </a:r>
+                    </a:p>
+                  </a:txBody>
+                  <a:tcPr anchor="ctr">
+                    <a:solidFill>
+                      <a:srgbClr val="FFFFFF"/>
+                    </a:solidFill>
+                  </a:tcPr>
+                </a:tc>
+                <a:tc>
+                  <a:txBody>
+                    <a:bodyPr/>
+                    <a:lstStyle/>
+                    <a:p>
+                      <a:pPr algn="ctr"/>
+                      <a:r>
+                        <a:rPr lang="es-MX" sz="1400" b="1">
+                          <a:solidFill>
+                            <a:srgbClr val="030920"/>
+                          </a:solidFill>
+                        </a:rPr>
+                        <a:t>0.99 – 0.995</a:t>
+                      </a:r>
+                    </a:p>
+                  </a:txBody>
+                  <a:tcPr anchor="ctr">
+                    <a:solidFill>
+                      <a:srgbClr val="DDE6ED"/>
+                    </a:solidFill>
+                  </a:tcPr>
+                </a:tc>
+                <a:tc>
+                  <a:txBody>
+                    <a:bodyPr/>
+                    <a:lstStyle/>
+                    <a:p>
+                      <a:pPr algn="ctr"/>
+                      <a:r>
+                        <a:rPr lang="es-MX" sz="1400">
+                          <a:solidFill>
+                            <a:srgbClr val="030920"/>
+                          </a:solidFill>
+                        </a:rPr>
+                        <a:t>0.999</a:t>
+                      </a:r>
+                    </a:p>
+                  </a:txBody>
+                  <a:tcPr anchor="ctr">
+                    <a:solidFill>
+                      <a:srgbClr val="FFFFFF"/>
+                    </a:solidFill>
+                  </a:tcPr>
+                </a:tc>
+                <a:extLst>
+                  <a:ext uri="{0D108BD9-81ED-4DB2-BD59-A6C34878D82A}">
+                    <a16:rowId xmlns:a16="http://schemas.microsoft.com/office/drawing/2014/main" val="4124227161"/>
+                  </a:ext>
+                </a:extLst>
+              </a:tr>
+              <a:tr h="584200">
+                <a:tc>
+                  <a:txBody>
+                    <a:bodyPr/>
+                    <a:lstStyle/>
+                    <a:p>
+                      <a:pPr algn="l"/>
+                      <a:r>
+                        <a:rPr lang="es-MX" sz="1400">
+                          <a:solidFill>
+                            <a:srgbClr val="030920"/>
+                          </a:solidFill>
+                        </a:rPr>
+                        <a:t>iter_por_T</a:t>
+                      </a:r>
+                    </a:p>
+                  </a:txBody>
+                  <a:tcPr anchor="ctr">
+                    <a:solidFill>
+                      <a:srgbClr val="FFFFFF"/>
+                    </a:solidFill>
+                  </a:tcPr>
+                </a:tc>
+                <a:tc>
+                  <a:txBody>
+                    <a:bodyPr/>
+                    <a:lstStyle/>
+                    <a:p>
+                      <a:pPr algn="ctr"/>
+                      <a:r>
+                        <a:rPr lang="es-MX" sz="1400">
+                          <a:solidFill>
+                            <a:srgbClr val="030920"/>
+                          </a:solidFill>
+                        </a:rPr>
+                        <a:t>1 – 5</a:t>
+                      </a:r>
+                    </a:p>
+                  </a:txBody>
+                  <a:tcPr anchor="ctr">
+                    <a:solidFill>
+                      <a:srgbClr val="FFFFFF"/>
+                    </a:solidFill>
+                  </a:tcPr>
+                </a:tc>
+                <a:tc>
+                  <a:txBody>
+                    <a:bodyPr/>
+                    <a:lstStyle/>
+                    <a:p>
+                      <a:pPr algn="ctr"/>
+                      <a:r>
+                        <a:rPr lang="es-MX" sz="1400" b="1">
+                          <a:solidFill>
+                            <a:srgbClr val="030920"/>
+                          </a:solidFill>
+                        </a:rPr>
+                        <a:t>15 – 25</a:t>
+                      </a:r>
+                    </a:p>
+                  </a:txBody>
+                  <a:tcPr anchor="ctr">
+                    <a:solidFill>
+                      <a:srgbClr val="DDE6ED"/>
+                    </a:solidFill>
+                  </a:tcPr>
+                </a:tc>
+                <a:tc>
+                  <a:txBody>
+                    <a:bodyPr/>
+                    <a:lstStyle/>
+                    <a:p>
+                      <a:pPr algn="ctr"/>
+                      <a:r>
+                        <a:rPr lang="es-MX" sz="1400">
+                          <a:solidFill>
+                            <a:srgbClr val="030920"/>
+                          </a:solidFill>
+                        </a:rPr>
+                        <a:t>50+</a:t>
+                      </a:r>
+                    </a:p>
+                  </a:txBody>
+                  <a:tcPr anchor="ctr">
+                    <a:solidFill>
+                      <a:srgbClr val="FFFFFF"/>
+                    </a:solidFill>
+                  </a:tcPr>
+                </a:tc>
+                <a:extLst>
+                  <a:ext uri="{0D108BD9-81ED-4DB2-BD59-A6C34878D82A}">
+                    <a16:rowId xmlns:a16="http://schemas.microsoft.com/office/drawing/2014/main" val="313005453"/>
+                  </a:ext>
+                </a:extLst>
+              </a:tr>
+              <a:tr h="584200">
+                <a:tc>
+                  <a:txBody>
+                    <a:bodyPr/>
+                    <a:lstStyle/>
+                    <a:p>
+                      <a:pPr algn="l"/>
+                      <a:r>
+                        <a:rPr lang="es-MX" sz="1400">
+                          <a:solidFill>
+                            <a:srgbClr val="030920"/>
+                          </a:solidFill>
+                        </a:rPr>
+                        <a:t>T_final</a:t>
+                      </a:r>
+                    </a:p>
+                  </a:txBody>
+                  <a:tcPr anchor="ctr">
+                    <a:solidFill>
+                      <a:srgbClr val="FFFFFF"/>
+                    </a:solidFill>
+                  </a:tcPr>
+                </a:tc>
+                <a:tc>
+                  <a:txBody>
+                    <a:bodyPr/>
+                    <a:lstStyle/>
+                    <a:p>
+                      <a:pPr algn="ctr"/>
+                      <a:r>
+                        <a:rPr lang="es-MX" sz="1400">
+                          <a:solidFill>
+                            <a:srgbClr val="030920"/>
+                          </a:solidFill>
+                        </a:rPr>
+                        <a:t>—</a:t>
+                      </a:r>
+                    </a:p>
+                  </a:txBody>
+                  <a:tcPr anchor="ctr">
+                    <a:solidFill>
+                      <a:srgbClr val="FFFFFF"/>
+                    </a:solidFill>
+                  </a:tcPr>
+                </a:tc>
+                <a:tc>
+                  <a:txBody>
+                    <a:bodyPr/>
+                    <a:lstStyle/>
+                    <a:p>
+                      <a:pPr algn="ctr"/>
+                      <a:r>
+                        <a:rPr lang="es-MX" sz="1400" b="1">
+                          <a:solidFill>
+                            <a:srgbClr val="030920"/>
+                          </a:solidFill>
+                        </a:rPr>
+                        <a:t>0.01 – 0.1</a:t>
+                      </a:r>
+                    </a:p>
+                  </a:txBody>
+                  <a:tcPr anchor="ctr">
+                    <a:solidFill>
+                      <a:srgbClr val="DDE6ED"/>
+                    </a:solidFill>
+                  </a:tcPr>
+                </a:tc>
+                <a:tc>
+                  <a:txBody>
+                    <a:bodyPr/>
+                    <a:lstStyle/>
+                    <a:p>
+                      <a:pPr algn="ctr"/>
+                      <a:r>
+                        <a:rPr lang="es-MX" sz="1400">
+                          <a:solidFill>
+                            <a:srgbClr val="030920"/>
+                          </a:solidFill>
+                        </a:rPr>
+                        <a:t>—</a:t>
+                      </a:r>
+                    </a:p>
+                  </a:txBody>
+                  <a:tcPr anchor="ctr">
+                    <a:solidFill>
+                      <a:srgbClr val="FFFFFF"/>
+                    </a:solidFill>
+                  </a:tcPr>
+                </a:tc>
+                <a:extLst>
+                  <a:ext uri="{0D108BD9-81ED-4DB2-BD59-A6C34878D82A}">
+                    <a16:rowId xmlns:a16="http://schemas.microsoft.com/office/drawing/2014/main" val="1321055002"/>
+                  </a:ext>
+                </a:extLst>
+              </a:tr>
+            </a:tbl>
+          </a:graphicData>
+        </a:graphic>
+      </p:graphicFrame>
+      <p:sp>
+        <p:nvSpPr>
+          <p:cNvPr id="6" name="CuadroTexto 5">
+            <a:extLst>
+              <a:ext uri="{FF2B5EF4-FFF2-40B4-BE49-F238E27FC236}">
+                <a16:creationId xmlns:a16="http://schemas.microsoft.com/office/drawing/2014/main" id="{ADD682E1-B67D-4E45-99E0-D5FF37398051}"/>
+              </a:ext>
+            </a:extLst>
+          </p:cNvPr>
+          <p:cNvSpPr txBox="1"/>
           <p:nvPr/>
-        </p:nvGrpSpPr>
-        <p:grpSpPr>
-          <a:xfrm>
-            <a:off x="188271" y="722355"/>
-            <a:ext cx="4707300" cy="81900"/>
-            <a:chOff x="196113" y="722355"/>
-            <a:chExt cx="4707300" cy="81900"/>
-          </a:xfrm>
-        </p:grpSpPr>
-        <p:sp>
-          <p:nvSpPr>
-            <p:cNvPr id="266" name="Google Shape;266;p32"/>
-            <p:cNvSpPr/>
-            <p:nvPr/>
-          </p:nvSpPr>
-          <p:spPr>
-            <a:xfrm rot="-5400000" flipH="1">
-              <a:off x="4609563" y="510405"/>
-              <a:ext cx="81900" cy="505800"/>
-            </a:xfrm>
-            <a:prstGeom prst="roundRect">
-              <a:avLst>
-                <a:gd name="adj" fmla="val 50000"/>
-              </a:avLst>
-            </a:prstGeom>
-            <a:solidFill>
-              <a:schemeClr val="lt1"/>
-            </a:solidFill>
-            <a:ln>
-              <a:noFill/>
-            </a:ln>
-          </p:spPr>
-          <p:txBody>
-            <a:bodyPr spcFirstLastPara="1" wrap="square" lIns="91425" tIns="91425" rIns="91425" bIns="91425" anchor="ctr" anchorCtr="0">
-              <a:noAutofit/>
-            </a:bodyPr>
-            <a:lstStyle/>
-            <a:p>
-              <a:pPr marL="0" lvl="0" indent="0" algn="ctr" rtl="0">
-                <a:spcBef>
-                  <a:spcPts val="0"/>
-                </a:spcBef>
-                <a:spcAft>
-                  <a:spcPts val="0"/>
-                </a:spcAft>
-                <a:buNone/>
-              </a:pPr>
-              <a:endParaRPr>
-                <a:latin typeface="Akatab"/>
-                <a:ea typeface="Akatab"/>
-                <a:cs typeface="Akatab"/>
-                <a:sym typeface="Akatab"/>
-              </a:endParaRPr>
-            </a:p>
-          </p:txBody>
-        </p:sp>
-        <p:cxnSp>
-          <p:nvCxnSpPr>
-            <p:cNvPr id="267" name="Google Shape;267;p32"/>
-            <p:cNvCxnSpPr>
-              <a:stCxn id="266" idx="0"/>
-            </p:cNvCxnSpPr>
-            <p:nvPr/>
-          </p:nvCxnSpPr>
-          <p:spPr>
-            <a:xfrm rot="10800000">
-              <a:off x="196113" y="763305"/>
-              <a:ext cx="4201500" cy="0"/>
-            </a:xfrm>
-            <a:prstGeom prst="straightConnector1">
-              <a:avLst/>
-            </a:prstGeom>
-            <a:noFill/>
-            <a:ln w="9525" cap="flat" cmpd="sng">
-              <a:solidFill>
-                <a:schemeClr val="lt1"/>
-              </a:solidFill>
-              <a:prstDash val="solid"/>
-              <a:round/>
-              <a:headEnd type="none" w="med" len="med"/>
-              <a:tailEnd type="none" w="med" len="med"/>
-            </a:ln>
-          </p:spPr>
-        </p:cxnSp>
-      </p:grpSp>
-      <p:grpSp>
-        <p:nvGrpSpPr>
-          <p:cNvPr id="268" name="Google Shape;268;p32"/>
-          <p:cNvGrpSpPr/>
-          <p:nvPr/>
-        </p:nvGrpSpPr>
-        <p:grpSpPr>
-          <a:xfrm>
-            <a:off x="8402038" y="1961930"/>
-            <a:ext cx="81900" cy="2993100"/>
-            <a:chOff x="8615038" y="1961930"/>
-            <a:chExt cx="81900" cy="2993100"/>
-          </a:xfrm>
-        </p:grpSpPr>
-        <p:sp>
-          <p:nvSpPr>
-            <p:cNvPr id="269" name="Google Shape;269;p32"/>
-            <p:cNvSpPr/>
-            <p:nvPr/>
-          </p:nvSpPr>
-          <p:spPr>
-            <a:xfrm>
-              <a:off x="8615038" y="1961930"/>
-              <a:ext cx="81900" cy="505800"/>
-            </a:xfrm>
-            <a:prstGeom prst="roundRect">
-              <a:avLst>
-                <a:gd name="adj" fmla="val 50000"/>
-              </a:avLst>
-            </a:prstGeom>
-            <a:solidFill>
-              <a:schemeClr val="lt1"/>
-            </a:solidFill>
-            <a:ln>
-              <a:noFill/>
-            </a:ln>
-          </p:spPr>
-          <p:txBody>
-            <a:bodyPr spcFirstLastPara="1" wrap="square" lIns="91425" tIns="91425" rIns="91425" bIns="91425" anchor="ctr" anchorCtr="0">
-              <a:noAutofit/>
-            </a:bodyPr>
-            <a:lstStyle/>
-            <a:p>
-              <a:pPr marL="0" lvl="0" indent="0" algn="ctr" rtl="0">
-                <a:spcBef>
-                  <a:spcPts val="0"/>
-                </a:spcBef>
-                <a:spcAft>
-                  <a:spcPts val="0"/>
-                </a:spcAft>
-                <a:buNone/>
-              </a:pPr>
-              <a:endParaRPr>
-                <a:latin typeface="Akatab"/>
-                <a:ea typeface="Akatab"/>
-                <a:cs typeface="Akatab"/>
-                <a:sym typeface="Akatab"/>
-              </a:endParaRPr>
-            </a:p>
-          </p:txBody>
-        </p:sp>
-        <p:cxnSp>
-          <p:nvCxnSpPr>
-            <p:cNvPr id="270" name="Google Shape;270;p32"/>
-            <p:cNvCxnSpPr>
-              <a:stCxn id="269" idx="2"/>
-            </p:cNvCxnSpPr>
-            <p:nvPr/>
-          </p:nvCxnSpPr>
-          <p:spPr>
-            <a:xfrm>
-              <a:off x="8655988" y="2467730"/>
-              <a:ext cx="0" cy="2487300"/>
-            </a:xfrm>
-            <a:prstGeom prst="straightConnector1">
-              <a:avLst/>
-            </a:prstGeom>
-            <a:noFill/>
-            <a:ln w="9525" cap="flat" cmpd="sng">
-              <a:solidFill>
-                <a:schemeClr val="lt1"/>
-              </a:solidFill>
-              <a:prstDash val="dot"/>
-              <a:round/>
-              <a:headEnd type="none" w="med" len="med"/>
-              <a:tailEnd type="none" w="med" len="med"/>
-            </a:ln>
-          </p:spPr>
-        </p:cxnSp>
-      </p:grpSp>
-      <p:pic>
-        <p:nvPicPr>
-          <p:cNvPr id="271" name="Google Shape;271;p32"/>
-          <p:cNvPicPr preferRelativeResize="0">
-            <a:picLocks noGrp="1"/>
-          </p:cNvPicPr>
-          <p:nvPr>
-            <p:ph type="pic" idx="3"/>
-          </p:nvPr>
-        </p:nvPicPr>
-        <p:blipFill rotWithShape="1">
-          <a:blip r:embed="rId3">
-            <a:alphaModFix/>
-          </a:blip>
-          <a:srcRect l="16544" r="38153"/>
-          <a:stretch/>
-        </p:blipFill>
+        </p:nvSpPr>
         <p:spPr>
           <a:xfrm>
-            <a:off x="5109150" y="539550"/>
-            <a:ext cx="2760600" cy="4064400"/>
-          </a:xfrm>
-          <a:prstGeom prst="roundRect">
-            <a:avLst>
-              <a:gd name="adj" fmla="val 50000"/>
-            </a:avLst>
+            <a:off x="508000" y="4445000"/>
+            <a:ext cx="8128000" cy="279400"/>
+          </a:xfrm>
+          <a:prstGeom prst="rect">
+            <a:avLst/>
           </a:prstGeom>
+          <a:noFill/>
         </p:spPr>
-      </p:pic>
+        <p:txBody>
+          <a:bodyPr vertOverflow="overflow" vert="horz" wrap="square" rtlCol="0" anchor="t">
+            <a:noAutofit/>
+          </a:bodyPr>
+          <a:lstStyle/>
+          <a:p>
+            <a:pPr algn="l"/>
+            <a:r>
+              <a:rPr lang="es-MX" sz="1100" i="1">
+                <a:solidFill>
+                  <a:srgbClr val="030920"/>
+                </a:solidFill>
+              </a:rPr>
+              <a:t>La columna “Recomendado” es el sweet spot calidad/tiempo encontrado en nuestras pruebas</a:t>
+            </a:r>
+          </a:p>
+        </p:txBody>
+      </p:sp>
     </p:spTree>
+    <p:extLst>
+      <p:ext uri="{BB962C8B-B14F-4D97-AF65-F5344CB8AC3E}">
+        <p14:creationId xmlns:p14="http://schemas.microsoft.com/office/powerpoint/2010/main" val="97219363"/>
+      </p:ext>
+    </p:extLst>
   </p:cSld>
   <p:clrMapOvr>
     <a:masterClrMapping/>
@@ -8582,12 +5835,12 @@
 </p:sld>
 </file>
 
-<file path=ppt/slides/slide3.xml><?xml version="1.0" encoding="utf-8"?>
+<file path=ppt/slides/slide11.xml><?xml version="1.0" encoding="utf-8"?>
 <p:sld xmlns:a="http://schemas.openxmlformats.org/drawingml/2006/main" xmlns:r="http://schemas.openxmlformats.org/officeDocument/2006/relationships" xmlns:p="http://schemas.openxmlformats.org/presentationml/2006/main">
   <p:cSld>
     <p:spTree>
       <p:nvGrpSpPr>
-        <p:cNvPr id="1" name="Shape 275"/>
+        <p:cNvPr id="1" name=""/>
         <p:cNvGrpSpPr/>
         <p:nvPr/>
       </p:nvGrpSpPr>
@@ -8601,647 +5854,617 @@
       </p:grpSpPr>
       <p:sp>
         <p:nvSpPr>
-          <p:cNvPr id="276" name="Google Shape;276;p33"/>
-          <p:cNvSpPr txBox="1">
-            <a:spLocks noGrp="1"/>
-          </p:cNvSpPr>
-          <p:nvPr>
-            <p:ph type="title"/>
-          </p:nvPr>
+          <p:cNvPr id="2" name="CuadroTexto 1">
+            <a:extLst>
+              <a:ext uri="{FF2B5EF4-FFF2-40B4-BE49-F238E27FC236}">
+                <a16:creationId xmlns:a16="http://schemas.microsoft.com/office/drawing/2014/main" id="{EC044850-5B77-4A55-8F14-2A97A29FA0F7}"/>
+              </a:ext>
+            </a:extLst>
+          </p:cNvPr>
+          <p:cNvSpPr txBox="1"/>
+          <p:nvPr/>
         </p:nvSpPr>
         <p:spPr>
           <a:xfrm>
-            <a:off x="720000" y="445025"/>
-            <a:ext cx="7704000" cy="572700"/>
+            <a:off x="508000" y="381000"/>
+            <a:ext cx="8128000" cy="457200"/>
           </a:xfrm>
           <a:prstGeom prst="rect">
             <a:avLst/>
           </a:prstGeom>
+          <a:noFill/>
         </p:spPr>
         <p:txBody>
-          <a:bodyPr spcFirstLastPara="1" wrap="square" lIns="91425" tIns="91425" rIns="91425" bIns="91425" anchor="t" anchorCtr="0">
+          <a:bodyPr vertOverflow="overflow" vert="horz" wrap="square" rtlCol="0" anchor="t">
             <a:noAutofit/>
           </a:bodyPr>
           <a:lstStyle/>
           <a:p>
-            <a:pPr marL="0" lvl="0" indent="0" algn="ctr" rtl="0">
-              <a:spcBef>
-                <a:spcPts val="0"/>
-              </a:spcBef>
-              <a:spcAft>
-                <a:spcPts val="0"/>
-              </a:spcAft>
-              <a:buNone/>
-            </a:pPr>
+            <a:pPr algn="l"/>
             <a:r>
-              <a:rPr lang="en"/>
-              <a:t>Table of contents</a:t>
+              <a:rPr lang="es-MX" sz="2800" b="1">
+                <a:solidFill>
+                  <a:srgbClr val="030920"/>
+                </a:solidFill>
+              </a:rPr>
+              <a:t>Conclusiones</a:t>
             </a:r>
-            <a:endParaRPr/>
           </a:p>
         </p:txBody>
       </p:sp>
       <p:sp>
         <p:nvSpPr>
-          <p:cNvPr id="277" name="Google Shape;277;p33"/>
-          <p:cNvSpPr txBox="1">
-            <a:spLocks noGrp="1"/>
-          </p:cNvSpPr>
-          <p:nvPr>
-            <p:ph type="title" idx="2"/>
-          </p:nvPr>
+          <p:cNvPr id="3" name="Rectángulo 2">
+            <a:extLst>
+              <a:ext uri="{FF2B5EF4-FFF2-40B4-BE49-F238E27FC236}">
+                <a16:creationId xmlns:a16="http://schemas.microsoft.com/office/drawing/2014/main" id="{777EAACF-75F9-4E1C-B11F-006FADDD92A3}"/>
+              </a:ext>
+            </a:extLst>
+          </p:cNvPr>
+          <p:cNvSpPr/>
+          <p:nvPr/>
         </p:nvSpPr>
         <p:spPr>
           <a:xfrm>
-            <a:off x="1503825" y="1295883"/>
-            <a:ext cx="734700" cy="447600"/>
+            <a:off x="508000" y="1206500"/>
+            <a:ext cx="3937000" cy="1397000"/>
           </a:xfrm>
           <a:prstGeom prst="rect">
             <a:avLst/>
           </a:prstGeom>
+          <a:solidFill>
+            <a:srgbClr val="3A1A1A"/>
+          </a:solidFill>
+          <a:ln w="19050" cap="flat" cmpd="sng" algn="ctr">
+            <a:solidFill>
+              <a:srgbClr val="D62728"/>
+            </a:solidFill>
+            <a:prstDash val="solid"/>
+          </a:ln>
         </p:spPr>
+        <p:style>
+          <a:lnRef idx="2">
+            <a:schemeClr val="accent1">
+              <a:shade val="15000"/>
+            </a:schemeClr>
+          </a:lnRef>
+          <a:fillRef idx="1">
+            <a:schemeClr val="accent1"/>
+          </a:fillRef>
+          <a:effectRef idx="0">
+            <a:schemeClr val="accent1"/>
+          </a:effectRef>
+          <a:fontRef idx="minor">
+            <a:schemeClr val="lt1"/>
+          </a:fontRef>
+        </p:style>
         <p:txBody>
-          <a:bodyPr spcFirstLastPara="1" wrap="square" lIns="91425" tIns="91425" rIns="91425" bIns="91425" anchor="ctr" anchorCtr="0">
-            <a:noAutofit/>
-          </a:bodyPr>
+          <a:bodyPr vertOverflow="clip" horzOverflow="clip" rtlCol="0" anchor="t"/>
           <a:lstStyle/>
           <a:p>
-            <a:pPr marL="0" lvl="0" indent="0" algn="ctr" rtl="0">
-              <a:spcBef>
-                <a:spcPts val="0"/>
-              </a:spcBef>
-              <a:spcAft>
-                <a:spcPts val="0"/>
-              </a:spcAft>
-              <a:buNone/>
-            </a:pPr>
-            <a:r>
-              <a:rPr lang="en"/>
-              <a:t>01.</a:t>
-            </a:r>
-            <a:endParaRPr/>
+            <a:pPr algn="l"/>
+            <a:endParaRPr lang="es-MX"/>
           </a:p>
         </p:txBody>
       </p:sp>
       <p:sp>
         <p:nvSpPr>
-          <p:cNvPr id="278" name="Google Shape;278;p33"/>
-          <p:cNvSpPr txBox="1">
-            <a:spLocks noGrp="1"/>
-          </p:cNvSpPr>
-          <p:nvPr>
-            <p:ph type="title" idx="3"/>
-          </p:nvPr>
+          <p:cNvPr id="4" name="CuadroTexto 3">
+            <a:extLst>
+              <a:ext uri="{FF2B5EF4-FFF2-40B4-BE49-F238E27FC236}">
+                <a16:creationId xmlns:a16="http://schemas.microsoft.com/office/drawing/2014/main" id="{B00D66F4-D33E-47AD-A285-D157F8712EC8}"/>
+              </a:ext>
+            </a:extLst>
+          </p:cNvPr>
+          <p:cNvSpPr txBox="1"/>
+          <p:nvPr/>
         </p:nvSpPr>
         <p:spPr>
           <a:xfrm>
-            <a:off x="1503825" y="2876366"/>
-            <a:ext cx="734700" cy="447600"/>
+            <a:off x="698500" y="1333500"/>
+            <a:ext cx="3556000" cy="304800"/>
           </a:xfrm>
           <a:prstGeom prst="rect">
             <a:avLst/>
           </a:prstGeom>
+          <a:noFill/>
         </p:spPr>
         <p:txBody>
-          <a:bodyPr spcFirstLastPara="1" wrap="square" lIns="91425" tIns="91425" rIns="91425" bIns="91425" anchor="ctr" anchorCtr="0">
+          <a:bodyPr vertOverflow="overflow" vert="horz" wrap="square" rtlCol="0" anchor="t">
             <a:noAutofit/>
           </a:bodyPr>
           <a:lstStyle/>
           <a:p>
-            <a:pPr marL="0" lvl="0" indent="0" algn="ctr" rtl="0">
-              <a:spcBef>
-                <a:spcPts val="0"/>
-              </a:spcBef>
-              <a:spcAft>
-                <a:spcPts val="0"/>
-              </a:spcAft>
-              <a:buNone/>
-            </a:pPr>
+            <a:pPr algn="l"/>
             <a:r>
-              <a:rPr lang="en"/>
-              <a:t>04.</a:t>
+              <a:rPr lang="es-MX" sz="1600" b="1">
+                <a:solidFill>
+                  <a:srgbClr val="D62728"/>
+                </a:solidFill>
+              </a:rPr>
+              <a:t>Hill Climbing</a:t>
             </a:r>
-            <a:endParaRPr/>
           </a:p>
         </p:txBody>
       </p:sp>
       <p:sp>
         <p:nvSpPr>
-          <p:cNvPr id="279" name="Google Shape;279;p33"/>
-          <p:cNvSpPr txBox="1">
-            <a:spLocks noGrp="1"/>
-          </p:cNvSpPr>
-          <p:nvPr>
-            <p:ph type="title" idx="4"/>
-          </p:nvPr>
+          <p:cNvPr id="5" name="CuadroTexto 4">
+            <a:extLst>
+              <a:ext uri="{FF2B5EF4-FFF2-40B4-BE49-F238E27FC236}">
+                <a16:creationId xmlns:a16="http://schemas.microsoft.com/office/drawing/2014/main" id="{78241588-BE2E-4B78-9F8F-776AA57BB4CF}"/>
+              </a:ext>
+            </a:extLst>
+          </p:cNvPr>
+          <p:cNvSpPr txBox="1"/>
+          <p:nvPr/>
         </p:nvSpPr>
         <p:spPr>
           <a:xfrm>
-            <a:off x="4204650" y="1295883"/>
-            <a:ext cx="734700" cy="447600"/>
+            <a:off x="698500" y="1714500"/>
+            <a:ext cx="3556000" cy="762000"/>
           </a:xfrm>
           <a:prstGeom prst="rect">
             <a:avLst/>
           </a:prstGeom>
+          <a:noFill/>
         </p:spPr>
         <p:txBody>
-          <a:bodyPr spcFirstLastPara="1" wrap="square" lIns="91425" tIns="91425" rIns="91425" bIns="91425" anchor="ctr" anchorCtr="0">
+          <a:bodyPr vertOverflow="overflow" vert="horz" wrap="square" rtlCol="0" anchor="t">
             <a:noAutofit/>
           </a:bodyPr>
           <a:lstStyle/>
           <a:p>
-            <a:pPr marL="0" lvl="0" indent="0" algn="ctr" rtl="0">
-              <a:spcBef>
-                <a:spcPts val="0"/>
-              </a:spcBef>
-              <a:spcAft>
-                <a:spcPts val="0"/>
-              </a:spcAft>
-              <a:buNone/>
-            </a:pPr>
+            <a:pPr algn="l"/>
             <a:r>
-              <a:rPr lang="en"/>
-              <a:t>02.</a:t>
+              <a:rPr lang="es-MX" sz="1300">
+                <a:solidFill>
+                  <a:srgbClr val="FFFFFF"/>
+                </a:solidFill>
+              </a:rPr>
+              <a:t>Rápido y simple.
+Útil para problemas pequeños o convexos.</a:t>
             </a:r>
-            <a:endParaRPr/>
           </a:p>
         </p:txBody>
       </p:sp>
       <p:sp>
         <p:nvSpPr>
-          <p:cNvPr id="280" name="Google Shape;280;p33"/>
-          <p:cNvSpPr txBox="1">
-            <a:spLocks noGrp="1"/>
-          </p:cNvSpPr>
-          <p:nvPr>
-            <p:ph type="title" idx="5"/>
-          </p:nvPr>
+          <p:cNvPr id="6" name="Rectángulo 5">
+            <a:extLst>
+              <a:ext uri="{FF2B5EF4-FFF2-40B4-BE49-F238E27FC236}">
+                <a16:creationId xmlns:a16="http://schemas.microsoft.com/office/drawing/2014/main" id="{4F8870F6-1258-41E0-80FF-2A48518F222B}"/>
+              </a:ext>
+            </a:extLst>
+          </p:cNvPr>
+          <p:cNvSpPr/>
+          <p:nvPr/>
         </p:nvSpPr>
         <p:spPr>
           <a:xfrm>
-            <a:off x="4204650" y="2876366"/>
-            <a:ext cx="734700" cy="447600"/>
+            <a:off x="4699000" y="1206500"/>
+            <a:ext cx="3937000" cy="1397000"/>
           </a:xfrm>
           <a:prstGeom prst="rect">
             <a:avLst/>
           </a:prstGeom>
+          <a:solidFill>
+            <a:srgbClr val="0F2540"/>
+          </a:solidFill>
+          <a:ln w="19050" cap="flat" cmpd="sng" algn="ctr">
+            <a:solidFill>
+              <a:srgbClr val="1F77B4"/>
+            </a:solidFill>
+            <a:prstDash val="solid"/>
+          </a:ln>
         </p:spPr>
+        <p:style>
+          <a:lnRef idx="2">
+            <a:schemeClr val="accent1">
+              <a:shade val="15000"/>
+            </a:schemeClr>
+          </a:lnRef>
+          <a:fillRef idx="1">
+            <a:schemeClr val="accent1"/>
+          </a:fillRef>
+          <a:effectRef idx="0">
+            <a:schemeClr val="accent1"/>
+          </a:effectRef>
+          <a:fontRef idx="minor">
+            <a:schemeClr val="lt1"/>
+          </a:fontRef>
+        </p:style>
         <p:txBody>
-          <a:bodyPr spcFirstLastPara="1" wrap="square" lIns="91425" tIns="91425" rIns="91425" bIns="91425" anchor="ctr" anchorCtr="0">
-            <a:noAutofit/>
-          </a:bodyPr>
+          <a:bodyPr vertOverflow="clip" horzOverflow="clip" rtlCol="0" anchor="t"/>
           <a:lstStyle/>
           <a:p>
-            <a:pPr marL="0" lvl="0" indent="0" algn="ctr" rtl="0">
-              <a:spcBef>
-                <a:spcPts val="0"/>
-              </a:spcBef>
-              <a:spcAft>
-                <a:spcPts val="0"/>
-              </a:spcAft>
-              <a:buNone/>
-            </a:pPr>
-            <a:r>
-              <a:rPr lang="en"/>
-              <a:t>05.</a:t>
-            </a:r>
-            <a:endParaRPr/>
+            <a:pPr algn="l"/>
+            <a:endParaRPr lang="es-MX"/>
           </a:p>
         </p:txBody>
       </p:sp>
       <p:sp>
         <p:nvSpPr>
-          <p:cNvPr id="281" name="Google Shape;281;p33"/>
-          <p:cNvSpPr txBox="1">
-            <a:spLocks noGrp="1"/>
-          </p:cNvSpPr>
-          <p:nvPr>
-            <p:ph type="title" idx="6"/>
-          </p:nvPr>
+          <p:cNvPr id="7" name="CuadroTexto 6">
+            <a:extLst>
+              <a:ext uri="{FF2B5EF4-FFF2-40B4-BE49-F238E27FC236}">
+                <a16:creationId xmlns:a16="http://schemas.microsoft.com/office/drawing/2014/main" id="{EE18D225-78CD-487F-9298-3DD55288C8EA}"/>
+              </a:ext>
+            </a:extLst>
+          </p:cNvPr>
+          <p:cNvSpPr txBox="1"/>
+          <p:nvPr/>
         </p:nvSpPr>
         <p:spPr>
           <a:xfrm>
-            <a:off x="6903888" y="1295883"/>
-            <a:ext cx="734700" cy="447600"/>
+            <a:off x="4889500" y="1333500"/>
+            <a:ext cx="3556000" cy="304800"/>
           </a:xfrm>
           <a:prstGeom prst="rect">
             <a:avLst/>
           </a:prstGeom>
+          <a:noFill/>
         </p:spPr>
         <p:txBody>
-          <a:bodyPr spcFirstLastPara="1" wrap="square" lIns="91425" tIns="91425" rIns="91425" bIns="91425" anchor="ctr" anchorCtr="0">
+          <a:bodyPr vertOverflow="overflow" vert="horz" wrap="square" rtlCol="0" anchor="t">
             <a:noAutofit/>
           </a:bodyPr>
           <a:lstStyle/>
           <a:p>
-            <a:pPr marL="0" lvl="0" indent="0" algn="ctr" rtl="0">
-              <a:spcBef>
-                <a:spcPts val="0"/>
-              </a:spcBef>
-              <a:spcAft>
-                <a:spcPts val="0"/>
-              </a:spcAft>
-              <a:buNone/>
-            </a:pPr>
+            <a:pPr algn="l"/>
             <a:r>
-              <a:rPr lang="en"/>
-              <a:t>03.</a:t>
+              <a:rPr lang="es-MX" sz="1600" b="1">
+                <a:solidFill>
+                  <a:srgbClr val="1F77B4"/>
+                </a:solidFill>
+              </a:rPr>
+              <a:t>Simulated Annealing</a:t>
             </a:r>
-            <a:endParaRPr/>
           </a:p>
         </p:txBody>
       </p:sp>
       <p:sp>
         <p:nvSpPr>
-          <p:cNvPr id="282" name="Google Shape;282;p33"/>
-          <p:cNvSpPr txBox="1">
-            <a:spLocks noGrp="1"/>
-          </p:cNvSpPr>
-          <p:nvPr>
-            <p:ph type="title" idx="7"/>
-          </p:nvPr>
+          <p:cNvPr id="8" name="CuadroTexto 7">
+            <a:extLst>
+              <a:ext uri="{FF2B5EF4-FFF2-40B4-BE49-F238E27FC236}">
+                <a16:creationId xmlns:a16="http://schemas.microsoft.com/office/drawing/2014/main" id="{3774136C-8E79-490A-8E11-6CEE742B43E3}"/>
+              </a:ext>
+            </a:extLst>
+          </p:cNvPr>
+          <p:cNvSpPr txBox="1"/>
+          <p:nvPr/>
         </p:nvSpPr>
         <p:spPr>
           <a:xfrm>
-            <a:off x="6903888" y="2876366"/>
-            <a:ext cx="734700" cy="447600"/>
+            <a:off x="4889500" y="1714500"/>
+            <a:ext cx="3556000" cy="762000"/>
           </a:xfrm>
           <a:prstGeom prst="rect">
             <a:avLst/>
           </a:prstGeom>
+          <a:noFill/>
         </p:spPr>
         <p:txBody>
-          <a:bodyPr spcFirstLastPara="1" wrap="square" lIns="91425" tIns="91425" rIns="91425" bIns="91425" anchor="ctr" anchorCtr="0">
+          <a:bodyPr vertOverflow="overflow" vert="horz" wrap="square" rtlCol="0" anchor="t">
             <a:noAutofit/>
           </a:bodyPr>
           <a:lstStyle/>
           <a:p>
-            <a:pPr marL="0" lvl="0" indent="0" algn="ctr" rtl="0">
-              <a:spcBef>
-                <a:spcPts val="0"/>
-              </a:spcBef>
-              <a:spcAft>
-                <a:spcPts val="0"/>
-              </a:spcAft>
-              <a:buNone/>
-            </a:pPr>
+            <a:pPr algn="l"/>
             <a:r>
-              <a:rPr lang="en"/>
-              <a:t>06.</a:t>
+              <a:rPr lang="es-MX" sz="1300">
+                <a:solidFill>
+                  <a:srgbClr val="FFFFFF"/>
+                </a:solidFill>
+              </a:rPr>
+              <a:t>Más lento, pero mejor calidad.
+Escala mejor con n grande.</a:t>
             </a:r>
-            <a:endParaRPr/>
           </a:p>
         </p:txBody>
       </p:sp>
       <p:sp>
         <p:nvSpPr>
-          <p:cNvPr id="283" name="Google Shape;283;p33"/>
-          <p:cNvSpPr txBox="1">
-            <a:spLocks noGrp="1"/>
-          </p:cNvSpPr>
-          <p:nvPr>
-            <p:ph type="subTitle" idx="1"/>
-          </p:nvPr>
+          <p:cNvPr id="9" name="Rectángulo 8">
+            <a:extLst>
+              <a:ext uri="{FF2B5EF4-FFF2-40B4-BE49-F238E27FC236}">
+                <a16:creationId xmlns:a16="http://schemas.microsoft.com/office/drawing/2014/main" id="{E330661E-393B-4442-B63A-A85B8D7D7A0F}"/>
+              </a:ext>
+            </a:extLst>
+          </p:cNvPr>
+          <p:cNvSpPr/>
+          <p:nvPr/>
         </p:nvSpPr>
         <p:spPr>
           <a:xfrm>
-            <a:off x="718425" y="1765875"/>
-            <a:ext cx="2305500" cy="788700"/>
+            <a:off x="508000" y="2794000"/>
+            <a:ext cx="8128000" cy="508000"/>
           </a:xfrm>
           <a:prstGeom prst="rect">
             <a:avLst/>
           </a:prstGeom>
+          <a:solidFill>
+            <a:srgbClr val="1A2238"/>
+          </a:solidFill>
+          <a:ln w="25400" cap="flat" cmpd="sng" algn="ctr">
+            <a:noFill/>
+            <a:prstDash val="solid"/>
+          </a:ln>
         </p:spPr>
+        <p:style>
+          <a:lnRef idx="2">
+            <a:schemeClr val="accent1">
+              <a:shade val="15000"/>
+            </a:schemeClr>
+          </a:lnRef>
+          <a:fillRef idx="1">
+            <a:schemeClr val="accent1"/>
+          </a:fillRef>
+          <a:effectRef idx="0">
+            <a:schemeClr val="accent1"/>
+          </a:effectRef>
+          <a:fontRef idx="minor">
+            <a:schemeClr val="lt1"/>
+          </a:fontRef>
+        </p:style>
         <p:txBody>
-          <a:bodyPr spcFirstLastPara="1" wrap="square" lIns="91425" tIns="91425" rIns="91425" bIns="91425" anchor="t" anchorCtr="0">
-            <a:noAutofit/>
-          </a:bodyPr>
+          <a:bodyPr vertOverflow="clip" horzOverflow="clip" rtlCol="0" anchor="t"/>
           <a:lstStyle/>
           <a:p>
-            <a:pPr marL="0" lvl="0" indent="0" algn="ctr" rtl="0">
-              <a:spcBef>
-                <a:spcPts val="0"/>
-              </a:spcBef>
-              <a:spcAft>
-                <a:spcPts val="0"/>
-              </a:spcAft>
-              <a:buNone/>
-            </a:pPr>
-            <a:r>
-              <a:rPr lang="en"/>
-              <a:t>Name of</a:t>
-            </a:r>
-            <a:endParaRPr/>
-          </a:p>
-          <a:p>
-            <a:pPr marL="0" lvl="0" indent="0" algn="ctr" rtl="0">
-              <a:spcBef>
-                <a:spcPts val="0"/>
-              </a:spcBef>
-              <a:spcAft>
-                <a:spcPts val="0"/>
-              </a:spcAft>
-              <a:buNone/>
-            </a:pPr>
-            <a:r>
-              <a:rPr lang="en"/>
-              <a:t>the section</a:t>
-            </a:r>
-            <a:endParaRPr/>
+            <a:pPr algn="l"/>
+            <a:endParaRPr lang="es-MX"/>
           </a:p>
         </p:txBody>
       </p:sp>
       <p:sp>
         <p:nvSpPr>
-          <p:cNvPr id="284" name="Google Shape;284;p33"/>
-          <p:cNvSpPr txBox="1">
-            <a:spLocks noGrp="1"/>
-          </p:cNvSpPr>
-          <p:nvPr>
-            <p:ph type="subTitle" idx="8"/>
-          </p:nvPr>
+          <p:cNvPr id="10" name="CuadroTexto 9">
+            <a:extLst>
+              <a:ext uri="{FF2B5EF4-FFF2-40B4-BE49-F238E27FC236}">
+                <a16:creationId xmlns:a16="http://schemas.microsoft.com/office/drawing/2014/main" id="{2F46CB41-270E-48C2-B4E2-762961DA0DE7}"/>
+              </a:ext>
+            </a:extLst>
+          </p:cNvPr>
+          <p:cNvSpPr txBox="1"/>
+          <p:nvPr/>
         </p:nvSpPr>
         <p:spPr>
           <a:xfrm>
-            <a:off x="3419250" y="1765875"/>
-            <a:ext cx="2305500" cy="788700"/>
+            <a:off x="698500" y="2794000"/>
+            <a:ext cx="7874000" cy="508000"/>
           </a:xfrm>
           <a:prstGeom prst="rect">
             <a:avLst/>
           </a:prstGeom>
+          <a:noFill/>
         </p:spPr>
         <p:txBody>
-          <a:bodyPr spcFirstLastPara="1" wrap="square" lIns="91425" tIns="91425" rIns="91425" bIns="91425" anchor="t" anchorCtr="0">
+          <a:bodyPr vertOverflow="overflow" vert="horz" wrap="square" rtlCol="0" anchor="ctr" anchorCtr="0">
             <a:noAutofit/>
           </a:bodyPr>
           <a:lstStyle/>
           <a:p>
-            <a:pPr marL="0" lvl="0" indent="0" algn="ctr" rtl="0">
-              <a:spcBef>
-                <a:spcPts val="0"/>
-              </a:spcBef>
-              <a:spcAft>
-                <a:spcPts val="0"/>
-              </a:spcAft>
-              <a:buNone/>
-            </a:pPr>
+            <a:pPr algn="l"/>
             <a:r>
-              <a:rPr lang="en"/>
-              <a:t>Name of</a:t>
+              <a:rPr lang="es-MX" b="1" dirty="0">
+                <a:solidFill>
+                  <a:srgbClr val="FFFFFF"/>
+                </a:solidFill>
+              </a:rPr>
+              <a:t>◆  Los </a:t>
             </a:r>
-            <a:endParaRPr/>
-          </a:p>
-          <a:p>
-            <a:pPr marL="0" lvl="0" indent="0" algn="ctr" rtl="0">
-              <a:spcBef>
-                <a:spcPts val="0"/>
-              </a:spcBef>
-              <a:spcAft>
-                <a:spcPts val="0"/>
-              </a:spcAft>
-              <a:buNone/>
-            </a:pPr>
             <a:r>
-              <a:rPr lang="en"/>
-              <a:t>the section</a:t>
+              <a:rPr lang="es-MX" b="1" dirty="0" err="1">
+                <a:solidFill>
+                  <a:srgbClr val="FFFFFF"/>
+                </a:solidFill>
+              </a:rPr>
+              <a:t>hiperparámetros</a:t>
             </a:r>
-            <a:endParaRPr/>
+            <a:r>
+              <a:rPr lang="es-MX" b="1" dirty="0">
+                <a:solidFill>
+                  <a:srgbClr val="FFFFFF"/>
+                </a:solidFill>
+              </a:rPr>
+              <a:t> importan: α es el más sensible</a:t>
+            </a:r>
           </a:p>
         </p:txBody>
       </p:sp>
       <p:sp>
         <p:nvSpPr>
-          <p:cNvPr id="285" name="Google Shape;285;p33"/>
-          <p:cNvSpPr txBox="1">
-            <a:spLocks noGrp="1"/>
-          </p:cNvSpPr>
-          <p:nvPr>
-            <p:ph type="subTitle" idx="9"/>
-          </p:nvPr>
+          <p:cNvPr id="11" name="Rectángulo 10">
+            <a:extLst>
+              <a:ext uri="{FF2B5EF4-FFF2-40B4-BE49-F238E27FC236}">
+                <a16:creationId xmlns:a16="http://schemas.microsoft.com/office/drawing/2014/main" id="{A1AB54A2-AAC5-4578-900D-E81737ADA3CA}"/>
+              </a:ext>
+            </a:extLst>
+          </p:cNvPr>
+          <p:cNvSpPr/>
+          <p:nvPr/>
         </p:nvSpPr>
         <p:spPr>
           <a:xfrm>
-            <a:off x="6118488" y="1765875"/>
-            <a:ext cx="2305500" cy="788700"/>
+            <a:off x="508000" y="3403600"/>
+            <a:ext cx="8128000" cy="508000"/>
           </a:xfrm>
           <a:prstGeom prst="rect">
             <a:avLst/>
           </a:prstGeom>
+          <a:solidFill>
+            <a:srgbClr val="1A2238"/>
+          </a:solidFill>
+          <a:ln w="25400" cap="flat" cmpd="sng" algn="ctr">
+            <a:noFill/>
+            <a:prstDash val="solid"/>
+          </a:ln>
         </p:spPr>
+        <p:style>
+          <a:lnRef idx="2">
+            <a:schemeClr val="accent1">
+              <a:shade val="15000"/>
+            </a:schemeClr>
+          </a:lnRef>
+          <a:fillRef idx="1">
+            <a:schemeClr val="accent1"/>
+          </a:fillRef>
+          <a:effectRef idx="0">
+            <a:schemeClr val="accent1"/>
+          </a:effectRef>
+          <a:fontRef idx="minor">
+            <a:schemeClr val="lt1"/>
+          </a:fontRef>
+        </p:style>
         <p:txBody>
-          <a:bodyPr spcFirstLastPara="1" wrap="square" lIns="91425" tIns="91425" rIns="91425" bIns="91425" anchor="t" anchorCtr="0">
-            <a:noAutofit/>
-          </a:bodyPr>
+          <a:bodyPr vertOverflow="clip" horzOverflow="clip" rtlCol="0" anchor="t"/>
           <a:lstStyle/>
           <a:p>
-            <a:pPr marL="0" lvl="0" indent="0" algn="ctr" rtl="0">
-              <a:spcBef>
-                <a:spcPts val="0"/>
-              </a:spcBef>
-              <a:spcAft>
-                <a:spcPts val="0"/>
-              </a:spcAft>
-              <a:buNone/>
-            </a:pPr>
-            <a:r>
-              <a:rPr lang="en"/>
-              <a:t>Name of</a:t>
-            </a:r>
-            <a:endParaRPr/>
-          </a:p>
-          <a:p>
-            <a:pPr marL="0" lvl="0" indent="0" algn="ctr" rtl="0">
-              <a:spcBef>
-                <a:spcPts val="0"/>
-              </a:spcBef>
-              <a:spcAft>
-                <a:spcPts val="0"/>
-              </a:spcAft>
-              <a:buNone/>
-            </a:pPr>
-            <a:r>
-              <a:rPr lang="en"/>
-              <a:t>the section</a:t>
-            </a:r>
-            <a:endParaRPr/>
+            <a:pPr algn="l"/>
+            <a:endParaRPr lang="es-MX"/>
           </a:p>
         </p:txBody>
       </p:sp>
       <p:sp>
         <p:nvSpPr>
-          <p:cNvPr id="286" name="Google Shape;286;p33"/>
-          <p:cNvSpPr txBox="1">
-            <a:spLocks noGrp="1"/>
-          </p:cNvSpPr>
-          <p:nvPr>
-            <p:ph type="subTitle" idx="13"/>
-          </p:nvPr>
+          <p:cNvPr id="12" name="CuadroTexto 11">
+            <a:extLst>
+              <a:ext uri="{FF2B5EF4-FFF2-40B4-BE49-F238E27FC236}">
+                <a16:creationId xmlns:a16="http://schemas.microsoft.com/office/drawing/2014/main" id="{CA34ED34-E84C-46D3-9DEB-0C0A9EB68695}"/>
+              </a:ext>
+            </a:extLst>
+          </p:cNvPr>
+          <p:cNvSpPr txBox="1"/>
+          <p:nvPr/>
         </p:nvSpPr>
         <p:spPr>
           <a:xfrm>
-            <a:off x="718425" y="3346300"/>
-            <a:ext cx="2305500" cy="788700"/>
+            <a:off x="698500" y="3403600"/>
+            <a:ext cx="7874000" cy="508000"/>
           </a:xfrm>
           <a:prstGeom prst="rect">
             <a:avLst/>
           </a:prstGeom>
+          <a:noFill/>
         </p:spPr>
         <p:txBody>
-          <a:bodyPr spcFirstLastPara="1" wrap="square" lIns="91425" tIns="91425" rIns="91425" bIns="91425" anchor="t" anchorCtr="0">
+          <a:bodyPr vertOverflow="overflow" vert="horz" wrap="square" rtlCol="0" anchor="ctr" anchorCtr="0">
             <a:noAutofit/>
           </a:bodyPr>
           <a:lstStyle/>
           <a:p>
-            <a:pPr marL="0" lvl="0" indent="0" algn="ctr" rtl="0">
-              <a:spcBef>
-                <a:spcPts val="0"/>
-              </a:spcBef>
-              <a:spcAft>
-                <a:spcPts val="0"/>
-              </a:spcAft>
-              <a:buNone/>
-            </a:pPr>
+            <a:pPr algn="l"/>
             <a:r>
-              <a:rPr lang="en"/>
-              <a:t>Name of</a:t>
+              <a:rPr lang="es-MX" b="1">
+                <a:solidFill>
+                  <a:srgbClr val="FFFFFF"/>
+                </a:solidFill>
+              </a:rPr>
+              <a:t>◆  En problemas combinatorios grandes (TSP n ≥ 30), SA es la mejor opción</a:t>
             </a:r>
-            <a:endParaRPr/>
-          </a:p>
-          <a:p>
-            <a:pPr marL="0" lvl="0" indent="0" algn="ctr" rtl="0">
-              <a:spcBef>
-                <a:spcPts val="0"/>
-              </a:spcBef>
-              <a:spcAft>
-                <a:spcPts val="0"/>
-              </a:spcAft>
-              <a:buNone/>
-            </a:pPr>
-            <a:r>
-              <a:rPr lang="en"/>
-              <a:t>the section</a:t>
-            </a:r>
-            <a:endParaRPr/>
           </a:p>
         </p:txBody>
       </p:sp>
       <p:sp>
         <p:nvSpPr>
-          <p:cNvPr id="287" name="Google Shape;287;p33"/>
-          <p:cNvSpPr txBox="1">
-            <a:spLocks noGrp="1"/>
-          </p:cNvSpPr>
-          <p:nvPr>
-            <p:ph type="subTitle" idx="14"/>
-          </p:nvPr>
+          <p:cNvPr id="13" name="Rectángulo 12">
+            <a:extLst>
+              <a:ext uri="{FF2B5EF4-FFF2-40B4-BE49-F238E27FC236}">
+                <a16:creationId xmlns:a16="http://schemas.microsoft.com/office/drawing/2014/main" id="{0CA27114-77A5-4668-824A-B82095615F0D}"/>
+              </a:ext>
+            </a:extLst>
+          </p:cNvPr>
+          <p:cNvSpPr/>
+          <p:nvPr/>
         </p:nvSpPr>
         <p:spPr>
           <a:xfrm>
-            <a:off x="3419250" y="3346300"/>
-            <a:ext cx="2305500" cy="788700"/>
+            <a:off x="508000" y="4013200"/>
+            <a:ext cx="8128000" cy="508000"/>
           </a:xfrm>
           <a:prstGeom prst="rect">
             <a:avLst/>
           </a:prstGeom>
+          <a:solidFill>
+            <a:srgbClr val="2A3250"/>
+          </a:solidFill>
+          <a:ln w="25400" cap="flat" cmpd="sng" algn="ctr">
+            <a:noFill/>
+            <a:prstDash val="solid"/>
+          </a:ln>
         </p:spPr>
+        <p:style>
+          <a:lnRef idx="2">
+            <a:schemeClr val="accent1">
+              <a:shade val="15000"/>
+            </a:schemeClr>
+          </a:lnRef>
+          <a:fillRef idx="1">
+            <a:schemeClr val="accent1"/>
+          </a:fillRef>
+          <a:effectRef idx="0">
+            <a:schemeClr val="accent1"/>
+          </a:effectRef>
+          <a:fontRef idx="minor">
+            <a:schemeClr val="lt1"/>
+          </a:fontRef>
+        </p:style>
         <p:txBody>
-          <a:bodyPr spcFirstLastPara="1" wrap="square" lIns="91425" tIns="91425" rIns="91425" bIns="91425" anchor="t" anchorCtr="0">
-            <a:noAutofit/>
-          </a:bodyPr>
+          <a:bodyPr vertOverflow="clip" horzOverflow="clip" rtlCol="0" anchor="t"/>
           <a:lstStyle/>
           <a:p>
-            <a:pPr marL="0" lvl="0" indent="0" algn="ctr" rtl="0">
-              <a:spcBef>
-                <a:spcPts val="0"/>
-              </a:spcBef>
-              <a:spcAft>
-                <a:spcPts val="0"/>
-              </a:spcAft>
-              <a:buNone/>
-            </a:pPr>
-            <a:r>
-              <a:rPr lang="en"/>
-              <a:t>Name of</a:t>
-            </a:r>
-            <a:endParaRPr/>
-          </a:p>
-          <a:p>
-            <a:pPr marL="0" lvl="0" indent="0" algn="ctr" rtl="0">
-              <a:spcBef>
-                <a:spcPts val="0"/>
-              </a:spcBef>
-              <a:spcAft>
-                <a:spcPts val="0"/>
-              </a:spcAft>
-              <a:buNone/>
-            </a:pPr>
-            <a:r>
-              <a:rPr lang="en"/>
-              <a:t>the section</a:t>
-            </a:r>
-            <a:endParaRPr/>
+            <a:pPr algn="l"/>
+            <a:endParaRPr lang="es-MX"/>
           </a:p>
         </p:txBody>
       </p:sp>
       <p:sp>
         <p:nvSpPr>
-          <p:cNvPr id="288" name="Google Shape;288;p33"/>
-          <p:cNvSpPr txBox="1">
-            <a:spLocks noGrp="1"/>
-          </p:cNvSpPr>
-          <p:nvPr>
-            <p:ph type="subTitle" idx="15"/>
-          </p:nvPr>
+          <p:cNvPr id="14" name="CuadroTexto 13">
+            <a:extLst>
+              <a:ext uri="{FF2B5EF4-FFF2-40B4-BE49-F238E27FC236}">
+                <a16:creationId xmlns:a16="http://schemas.microsoft.com/office/drawing/2014/main" id="{3790F5A5-5581-4135-BD7F-2FFCB7669857}"/>
+              </a:ext>
+            </a:extLst>
+          </p:cNvPr>
+          <p:cNvSpPr txBox="1"/>
+          <p:nvPr/>
         </p:nvSpPr>
         <p:spPr>
           <a:xfrm>
-            <a:off x="6118488" y="3346300"/>
-            <a:ext cx="2305500" cy="788700"/>
+            <a:off x="698500" y="4013200"/>
+            <a:ext cx="7874000" cy="508000"/>
           </a:xfrm>
           <a:prstGeom prst="rect">
             <a:avLst/>
           </a:prstGeom>
+          <a:noFill/>
         </p:spPr>
         <p:txBody>
-          <a:bodyPr spcFirstLastPara="1" wrap="square" lIns="91425" tIns="91425" rIns="91425" bIns="91425" anchor="t" anchorCtr="0">
+          <a:bodyPr vertOverflow="overflow" vert="horz" wrap="square" rtlCol="0" anchor="ctr" anchorCtr="0">
             <a:noAutofit/>
           </a:bodyPr>
           <a:lstStyle/>
           <a:p>
-            <a:pPr marL="0" lvl="0" indent="0" algn="ctr" rtl="0">
-              <a:spcBef>
-                <a:spcPts val="0"/>
-              </a:spcBef>
-              <a:spcAft>
-                <a:spcPts val="0"/>
-              </a:spcAft>
-              <a:buNone/>
-            </a:pPr>
+            <a:pPr algn="l"/>
             <a:r>
-              <a:rPr lang="en"/>
-              <a:t>Name of</a:t>
+              <a:rPr lang="es-MX" b="1">
+                <a:solidFill>
+                  <a:srgbClr val="FFFFFF"/>
+                </a:solidFill>
+              </a:rPr>
+              <a:t>◆  Trade-off claro:  calidad  vs  tiempo</a:t>
             </a:r>
-            <a:endParaRPr/>
-          </a:p>
-          <a:p>
-            <a:pPr marL="0" lvl="0" indent="0" algn="ctr" rtl="0">
-              <a:spcBef>
-                <a:spcPts val="0"/>
-              </a:spcBef>
-              <a:spcAft>
-                <a:spcPts val="0"/>
-              </a:spcAft>
-              <a:buNone/>
-            </a:pPr>
-            <a:r>
-              <a:rPr lang="en"/>
-              <a:t>the section</a:t>
-            </a:r>
-            <a:endParaRPr/>
           </a:p>
         </p:txBody>
       </p:sp>
     </p:spTree>
+    <p:extLst>
+      <p:ext uri="{BB962C8B-B14F-4D97-AF65-F5344CB8AC3E}">
+        <p14:creationId xmlns:p14="http://schemas.microsoft.com/office/powerpoint/2010/main" val="1042811233"/>
+      </p:ext>
+    </p:extLst>
   </p:cSld>
   <p:clrMapOvr>
     <a:masterClrMapping/>
@@ -9249,7 +6472,7 @@
 </p:sld>
 </file>
 
-<file path=ppt/slides/slide4.xml><?xml version="1.0" encoding="utf-8"?>
+<file path=ppt/slides/slide12.xml><?xml version="1.0" encoding="utf-8"?>
 <p:sld xmlns:a="http://schemas.openxmlformats.org/drawingml/2006/main" xmlns:r="http://schemas.openxmlformats.org/officeDocument/2006/relationships" xmlns:p="http://schemas.openxmlformats.org/presentationml/2006/main">
   <p:cSld>
     <p:spTree>
@@ -9442,10 +6665,9 @@
               <a:buNone/>
             </a:pPr>
             <a:r>
-              <a:rPr lang="en"/>
-              <a:t>Thanks!</a:t>
+              <a:rPr lang="es-MX" b="1"/>
+              <a:t>¡Gracias!</a:t>
             </a:r>
-            <a:endParaRPr/>
           </a:p>
         </p:txBody>
       </p:sp>
@@ -9484,15 +6706,14 @@
               <a:buNone/>
             </a:pPr>
             <a:r>
-              <a:rPr lang="en" b="1"/>
-              <a:t>Do you have any questions?</a:t>
+              <a:rPr lang="es-MX" b="1" dirty="0"/>
+              <a:t>¿Preguntas?</a:t>
             </a:r>
-            <a:endParaRPr b="1"/>
           </a:p>
           <a:p>
             <a:pPr marL="0" lvl="0" indent="0" algn="ctr" rtl="0">
               <a:spcBef>
-                <a:spcPts val="0"/>
+                <a:spcPts val="300"/>
               </a:spcBef>
               <a:spcAft>
                 <a:spcPts val="0"/>
@@ -9500,15 +6721,14 @@
               <a:buNone/>
             </a:pPr>
             <a:r>
-              <a:rPr lang="en"/>
-              <a:t>youremail@freepik.com</a:t>
+              <a:rPr lang="es-MX" sz="1400" dirty="0"/>
+              <a:t>Patrick Ramirez</a:t>
             </a:r>
-            <a:endParaRPr/>
           </a:p>
           <a:p>
             <a:pPr marL="0" lvl="0" indent="0" algn="ctr" rtl="0">
               <a:spcBef>
-                <a:spcPts val="0"/>
+                <a:spcPts val="300"/>
               </a:spcBef>
               <a:spcAft>
                 <a:spcPts val="0"/>
@@ -9516,15 +6736,14 @@
               <a:buNone/>
             </a:pPr>
             <a:r>
-              <a:rPr lang="en"/>
-              <a:t>+34 654 321 432</a:t>
+              <a:rPr lang="es-MX" dirty="0"/>
+              <a:t>Rodrigo Ancori</a:t>
             </a:r>
-            <a:endParaRPr/>
           </a:p>
           <a:p>
             <a:pPr marL="0" lvl="0" indent="0" algn="ctr" rtl="0">
               <a:spcBef>
-                <a:spcPts val="0"/>
+                <a:spcPts val="300"/>
               </a:spcBef>
               <a:spcAft>
                 <a:spcPts val="0"/>
@@ -9532,10 +6751,9 @@
               <a:buNone/>
             </a:pPr>
             <a:r>
-              <a:rPr lang="en"/>
-              <a:t>yourwebsite.com</a:t>
+              <a:rPr lang="es-MX" sz="1200" i="1" dirty="0"/>
+              <a:t>Inteligencia Artificial · Algoritmos de Búsqueda</a:t>
             </a:r>
-            <a:endParaRPr/>
           </a:p>
         </p:txBody>
       </p:sp>
@@ -10761,7 +7979,7 @@
               <a:buNone/>
             </a:pPr>
             <a:r>
-              <a:rPr lang="en" sz="1200">
+              <a:rPr lang="en" sz="1200" dirty="0">
                 <a:solidFill>
                   <a:schemeClr val="dk1"/>
                 </a:solidFill>
@@ -10772,7 +7990,7 @@
               </a:rPr>
               <a:t>Please keep this slide for attribution</a:t>
             </a:r>
-            <a:endParaRPr sz="1200">
+            <a:endParaRPr sz="1200" dirty="0">
               <a:solidFill>
                 <a:schemeClr val="dk1"/>
               </a:solidFill>
@@ -10963,6 +8181,4094 @@
         </p:cxnSp>
       </p:grpSp>
     </p:spTree>
+    <p:extLst>
+      <p:ext uri="{BB962C8B-B14F-4D97-AF65-F5344CB8AC3E}">
+        <p14:creationId xmlns:p14="http://schemas.microsoft.com/office/powerpoint/2010/main" val="469384208"/>
+      </p:ext>
+    </p:extLst>
+  </p:cSld>
+  <p:clrMapOvr>
+    <a:masterClrMapping/>
+  </p:clrMapOvr>
+</p:sld>
+</file>
+
+<file path=ppt/slides/slide2.xml><?xml version="1.0" encoding="utf-8"?>
+<p:sld xmlns:a="http://schemas.openxmlformats.org/drawingml/2006/main" xmlns:r="http://schemas.openxmlformats.org/officeDocument/2006/relationships" xmlns:p="http://schemas.openxmlformats.org/presentationml/2006/main">
+  <p:cSld>
+    <p:spTree>
+      <p:nvGrpSpPr>
+        <p:cNvPr id="1" name=""/>
+        <p:cNvGrpSpPr/>
+        <p:nvPr/>
+      </p:nvGrpSpPr>
+      <p:grpSpPr>
+        <a:xfrm>
+          <a:off x="0" y="0"/>
+          <a:ext cx="0" cy="0"/>
+          <a:chOff x="0" y="0"/>
+          <a:chExt cx="0" cy="0"/>
+        </a:xfrm>
+      </p:grpSpPr>
+      <p:sp>
+        <p:nvSpPr>
+          <p:cNvPr id="2" name="CuadroTexto 1">
+            <a:extLst>
+              <a:ext uri="{FF2B5EF4-FFF2-40B4-BE49-F238E27FC236}">
+                <a16:creationId xmlns:a16="http://schemas.microsoft.com/office/drawing/2014/main" id="{A2E2414A-4D1D-4D54-A449-D16E87CABB88}"/>
+              </a:ext>
+            </a:extLst>
+          </p:cNvPr>
+          <p:cNvSpPr txBox="1"/>
+          <p:nvPr/>
+        </p:nvSpPr>
+        <p:spPr>
+          <a:xfrm>
+            <a:off x="508000" y="381000"/>
+            <a:ext cx="8128000" cy="508000"/>
+          </a:xfrm>
+          <a:prstGeom prst="rect">
+            <a:avLst/>
+          </a:prstGeom>
+          <a:noFill/>
+        </p:spPr>
+        <p:txBody>
+          <a:bodyPr vertOverflow="overflow" vert="horz" wrap="square" rtlCol="0" anchor="t">
+            <a:noAutofit/>
+          </a:bodyPr>
+          <a:lstStyle/>
+          <a:p>
+            <a:pPr algn="l"/>
+            <a:r>
+              <a:rPr lang="es-MX" sz="2800" b="1">
+                <a:solidFill>
+                  <a:srgbClr val="030920"/>
+                </a:solidFill>
+              </a:rPr>
+              <a:t>Introducción al problema</a:t>
+            </a:r>
+          </a:p>
+        </p:txBody>
+      </p:sp>
+      <p:sp>
+        <p:nvSpPr>
+          <p:cNvPr id="3" name="CuadroTexto 2">
+            <a:extLst>
+              <a:ext uri="{FF2B5EF4-FFF2-40B4-BE49-F238E27FC236}">
+                <a16:creationId xmlns:a16="http://schemas.microsoft.com/office/drawing/2014/main" id="{6DB8B0BA-4EDD-4FA6-A6A0-A51960C8F30A}"/>
+              </a:ext>
+            </a:extLst>
+          </p:cNvPr>
+          <p:cNvSpPr txBox="1"/>
+          <p:nvPr/>
+        </p:nvSpPr>
+        <p:spPr>
+          <a:xfrm>
+            <a:off x="508000" y="1206500"/>
+            <a:ext cx="4064000" cy="3429000"/>
+          </a:xfrm>
+          <a:prstGeom prst="rect">
+            <a:avLst/>
+          </a:prstGeom>
+          <a:noFill/>
+        </p:spPr>
+        <p:txBody>
+          <a:bodyPr vertOverflow="overflow" vert="horz" wrap="square" rtlCol="0" anchor="t">
+            <a:noAutofit/>
+          </a:bodyPr>
+          <a:lstStyle/>
+          <a:p>
+            <a:pPr algn="l"/>
+            <a:r>
+              <a:rPr lang="es-MX">
+                <a:solidFill>
+                  <a:srgbClr val="030920"/>
+                </a:solidFill>
+              </a:rPr>
+              <a:t>La optimización busca el mejor valor en un espacio de soluciones.
+Mínimo local: punto bajo en una región.
+Mínimo global: el punto más bajo de todos.
+Los algoritmos avaros se atascan en valles locales.
+Necesitamos exploración para escapar.</a:t>
+            </a:r>
+          </a:p>
+        </p:txBody>
+      </p:sp>
+      <p:sp>
+        <p:nvSpPr>
+          <p:cNvPr id="4" name="Rectángulo 3">
+            <a:extLst>
+              <a:ext uri="{FF2B5EF4-FFF2-40B4-BE49-F238E27FC236}">
+                <a16:creationId xmlns:a16="http://schemas.microsoft.com/office/drawing/2014/main" id="{1EFAFB12-1FE9-40C8-978E-0140A0DDDCCF}"/>
+              </a:ext>
+            </a:extLst>
+          </p:cNvPr>
+          <p:cNvSpPr/>
+          <p:nvPr/>
+        </p:nvSpPr>
+        <p:spPr>
+          <a:xfrm>
+            <a:off x="4826000" y="1206500"/>
+            <a:ext cx="3810000" cy="3175000"/>
+          </a:xfrm>
+          <a:prstGeom prst="rect">
+            <a:avLst/>
+          </a:prstGeom>
+          <a:solidFill>
+            <a:srgbClr val="1A2238"/>
+          </a:solidFill>
+          <a:ln w="25400" cap="flat" cmpd="sng" algn="ctr">
+            <a:noFill/>
+            <a:prstDash val="solid"/>
+          </a:ln>
+        </p:spPr>
+        <p:style>
+          <a:lnRef idx="2">
+            <a:schemeClr val="accent1">
+              <a:shade val="15000"/>
+            </a:schemeClr>
+          </a:lnRef>
+          <a:fillRef idx="1">
+            <a:schemeClr val="accent1"/>
+          </a:fillRef>
+          <a:effectRef idx="0">
+            <a:schemeClr val="accent1"/>
+          </a:effectRef>
+          <a:fontRef idx="minor">
+            <a:schemeClr val="lt1"/>
+          </a:fontRef>
+        </p:style>
+        <p:txBody>
+          <a:bodyPr vertOverflow="clip" horzOverflow="clip" rtlCol="0" anchor="t"/>
+          <a:lstStyle/>
+          <a:p>
+            <a:pPr algn="l"/>
+            <a:endParaRPr lang="es-MX"/>
+          </a:p>
+        </p:txBody>
+      </p:sp>
+      <p:sp>
+        <p:nvSpPr>
+          <p:cNvPr id="5" name="Elipse 4">
+            <a:extLst>
+              <a:ext uri="{FF2B5EF4-FFF2-40B4-BE49-F238E27FC236}">
+                <a16:creationId xmlns:a16="http://schemas.microsoft.com/office/drawing/2014/main" id="{AA9F3FF1-DC20-435F-8111-2EAB600463DD}"/>
+              </a:ext>
+            </a:extLst>
+          </p:cNvPr>
+          <p:cNvSpPr/>
+          <p:nvPr/>
+        </p:nvSpPr>
+        <p:spPr>
+          <a:xfrm>
+            <a:off x="5080000" y="2768600"/>
+            <a:ext cx="762000" cy="762000"/>
+          </a:xfrm>
+          <a:prstGeom prst="ellipse">
+            <a:avLst/>
+          </a:prstGeom>
+          <a:solidFill>
+            <a:srgbClr val="526D82"/>
+          </a:solidFill>
+          <a:ln w="25400" cap="flat" cmpd="sng" algn="ctr">
+            <a:noFill/>
+            <a:prstDash val="solid"/>
+          </a:ln>
+        </p:spPr>
+        <p:style>
+          <a:lnRef idx="2">
+            <a:schemeClr val="accent1">
+              <a:shade val="15000"/>
+            </a:schemeClr>
+          </a:lnRef>
+          <a:fillRef idx="1">
+            <a:schemeClr val="accent1"/>
+          </a:fillRef>
+          <a:effectRef idx="0">
+            <a:schemeClr val="accent1"/>
+          </a:effectRef>
+          <a:fontRef idx="minor">
+            <a:schemeClr val="lt1"/>
+          </a:fontRef>
+        </p:style>
+        <p:txBody>
+          <a:bodyPr vertOverflow="clip" horzOverflow="clip" rtlCol="0" anchor="t"/>
+          <a:lstStyle/>
+          <a:p>
+            <a:pPr algn="l"/>
+            <a:endParaRPr lang="es-MX"/>
+          </a:p>
+        </p:txBody>
+      </p:sp>
+      <p:sp>
+        <p:nvSpPr>
+          <p:cNvPr id="6" name="Elipse 5">
+            <a:extLst>
+              <a:ext uri="{FF2B5EF4-FFF2-40B4-BE49-F238E27FC236}">
+                <a16:creationId xmlns:a16="http://schemas.microsoft.com/office/drawing/2014/main" id="{C694F870-87A6-4F8A-8C03-9E052FE94FBD}"/>
+              </a:ext>
+            </a:extLst>
+          </p:cNvPr>
+          <p:cNvSpPr/>
+          <p:nvPr/>
+        </p:nvSpPr>
+        <p:spPr>
+          <a:xfrm>
+            <a:off x="6096000" y="3238500"/>
+            <a:ext cx="762000" cy="762000"/>
+          </a:xfrm>
+          <a:prstGeom prst="ellipse">
+            <a:avLst/>
+          </a:prstGeom>
+          <a:solidFill>
+            <a:srgbClr val="526D82"/>
+          </a:solidFill>
+          <a:ln w="25400" cap="flat" cmpd="sng" algn="ctr">
+            <a:noFill/>
+            <a:prstDash val="solid"/>
+          </a:ln>
+        </p:spPr>
+        <p:style>
+          <a:lnRef idx="2">
+            <a:schemeClr val="accent1">
+              <a:shade val="15000"/>
+            </a:schemeClr>
+          </a:lnRef>
+          <a:fillRef idx="1">
+            <a:schemeClr val="accent1"/>
+          </a:fillRef>
+          <a:effectRef idx="0">
+            <a:schemeClr val="accent1"/>
+          </a:effectRef>
+          <a:fontRef idx="minor">
+            <a:schemeClr val="lt1"/>
+          </a:fontRef>
+        </p:style>
+        <p:txBody>
+          <a:bodyPr vertOverflow="clip" horzOverflow="clip" rtlCol="0" anchor="t"/>
+          <a:lstStyle/>
+          <a:p>
+            <a:pPr algn="l"/>
+            <a:endParaRPr lang="es-MX"/>
+          </a:p>
+        </p:txBody>
+      </p:sp>
+      <p:sp>
+        <p:nvSpPr>
+          <p:cNvPr id="7" name="Elipse 6">
+            <a:extLst>
+              <a:ext uri="{FF2B5EF4-FFF2-40B4-BE49-F238E27FC236}">
+                <a16:creationId xmlns:a16="http://schemas.microsoft.com/office/drawing/2014/main" id="{50F5EB8B-E3E6-4222-85BF-585F572B1D9D}"/>
+              </a:ext>
+            </a:extLst>
+          </p:cNvPr>
+          <p:cNvSpPr/>
+          <p:nvPr/>
+        </p:nvSpPr>
+        <p:spPr>
+          <a:xfrm>
+            <a:off x="7366000" y="2387600"/>
+            <a:ext cx="762000" cy="762000"/>
+          </a:xfrm>
+          <a:prstGeom prst="ellipse">
+            <a:avLst/>
+          </a:prstGeom>
+          <a:solidFill>
+            <a:srgbClr val="526D82"/>
+          </a:solidFill>
+          <a:ln w="25400" cap="flat" cmpd="sng" algn="ctr">
+            <a:noFill/>
+            <a:prstDash val="solid"/>
+          </a:ln>
+        </p:spPr>
+        <p:style>
+          <a:lnRef idx="2">
+            <a:schemeClr val="accent1">
+              <a:shade val="15000"/>
+            </a:schemeClr>
+          </a:lnRef>
+          <a:fillRef idx="1">
+            <a:schemeClr val="accent1"/>
+          </a:fillRef>
+          <a:effectRef idx="0">
+            <a:schemeClr val="accent1"/>
+          </a:effectRef>
+          <a:fontRef idx="minor">
+            <a:schemeClr val="lt1"/>
+          </a:fontRef>
+        </p:style>
+        <p:txBody>
+          <a:bodyPr vertOverflow="clip" horzOverflow="clip" rtlCol="0" anchor="t"/>
+          <a:lstStyle/>
+          <a:p>
+            <a:pPr algn="l"/>
+            <a:endParaRPr lang="es-MX"/>
+          </a:p>
+        </p:txBody>
+      </p:sp>
+      <p:sp>
+        <p:nvSpPr>
+          <p:cNvPr id="8" name="Estrella: 5 puntas 7">
+            <a:extLst>
+              <a:ext uri="{FF2B5EF4-FFF2-40B4-BE49-F238E27FC236}">
+                <a16:creationId xmlns:a16="http://schemas.microsoft.com/office/drawing/2014/main" id="{78A39770-8DCB-4BB7-83D9-4139189E8205}"/>
+              </a:ext>
+            </a:extLst>
+          </p:cNvPr>
+          <p:cNvSpPr/>
+          <p:nvPr/>
+        </p:nvSpPr>
+        <p:spPr>
+          <a:xfrm>
+            <a:off x="6286500" y="3556000"/>
+            <a:ext cx="381000" cy="381000"/>
+          </a:xfrm>
+          <a:prstGeom prst="star5">
+            <a:avLst/>
+          </a:prstGeom>
+          <a:solidFill>
+            <a:srgbClr val="FFD700"/>
+          </a:solidFill>
+          <a:ln w="25400" cap="flat" cmpd="sng" algn="ctr">
+            <a:noFill/>
+            <a:prstDash val="solid"/>
+          </a:ln>
+        </p:spPr>
+        <p:style>
+          <a:lnRef idx="2">
+            <a:schemeClr val="accent1">
+              <a:shade val="15000"/>
+            </a:schemeClr>
+          </a:lnRef>
+          <a:fillRef idx="1">
+            <a:schemeClr val="accent1"/>
+          </a:fillRef>
+          <a:effectRef idx="0">
+            <a:schemeClr val="accent1"/>
+          </a:effectRef>
+          <a:fontRef idx="minor">
+            <a:schemeClr val="lt1"/>
+          </a:fontRef>
+        </p:style>
+        <p:txBody>
+          <a:bodyPr vertOverflow="clip" horzOverflow="clip" rtlCol="0" anchor="t"/>
+          <a:lstStyle/>
+          <a:p>
+            <a:pPr algn="l"/>
+            <a:endParaRPr lang="es-MX"/>
+          </a:p>
+        </p:txBody>
+      </p:sp>
+      <p:sp>
+        <p:nvSpPr>
+          <p:cNvPr id="9" name="CuadroTexto 8">
+            <a:extLst>
+              <a:ext uri="{FF2B5EF4-FFF2-40B4-BE49-F238E27FC236}">
+                <a16:creationId xmlns:a16="http://schemas.microsoft.com/office/drawing/2014/main" id="{FB261142-6C22-41C3-AF82-7DCCA1E6E704}"/>
+              </a:ext>
+            </a:extLst>
+          </p:cNvPr>
+          <p:cNvSpPr txBox="1"/>
+          <p:nvPr/>
+        </p:nvSpPr>
+        <p:spPr>
+          <a:xfrm>
+            <a:off x="5016500" y="2387600"/>
+            <a:ext cx="1016000" cy="228600"/>
+          </a:xfrm>
+          <a:prstGeom prst="rect">
+            <a:avLst/>
+          </a:prstGeom>
+          <a:noFill/>
+        </p:spPr>
+        <p:txBody>
+          <a:bodyPr vertOverflow="overflow" vert="horz" wrap="square" rtlCol="0" anchor="t">
+            <a:noAutofit/>
+          </a:bodyPr>
+          <a:lstStyle/>
+          <a:p>
+            <a:pPr algn="l"/>
+            <a:r>
+              <a:rPr lang="es-MX" sz="1000">
+                <a:solidFill>
+                  <a:srgbClr val="FFFFFF"/>
+                </a:solidFill>
+              </a:rPr>
+              <a:t>Mínimo local</a:t>
+            </a:r>
+          </a:p>
+        </p:txBody>
+      </p:sp>
+      <p:sp>
+        <p:nvSpPr>
+          <p:cNvPr id="10" name="CuadroTexto 9">
+            <a:extLst>
+              <a:ext uri="{FF2B5EF4-FFF2-40B4-BE49-F238E27FC236}">
+                <a16:creationId xmlns:a16="http://schemas.microsoft.com/office/drawing/2014/main" id="{CA593B31-74CE-4BAC-A2C4-88CA9BD67E6B}"/>
+              </a:ext>
+            </a:extLst>
+          </p:cNvPr>
+          <p:cNvSpPr txBox="1"/>
+          <p:nvPr/>
+        </p:nvSpPr>
+        <p:spPr>
+          <a:xfrm>
+            <a:off x="6070600" y="4038600"/>
+            <a:ext cx="1206500" cy="228600"/>
+          </a:xfrm>
+          <a:prstGeom prst="rect">
+            <a:avLst/>
+          </a:prstGeom>
+          <a:noFill/>
+        </p:spPr>
+        <p:txBody>
+          <a:bodyPr vertOverflow="overflow" vert="horz" wrap="square" rtlCol="0" anchor="t">
+            <a:noAutofit/>
+          </a:bodyPr>
+          <a:lstStyle/>
+          <a:p>
+            <a:pPr algn="l"/>
+            <a:r>
+              <a:rPr lang="es-MX" sz="1000" b="1">
+                <a:solidFill>
+                  <a:srgbClr val="FFD700"/>
+                </a:solidFill>
+              </a:rPr>
+              <a:t>Mínimo global</a:t>
+            </a:r>
+          </a:p>
+        </p:txBody>
+      </p:sp>
+      <p:sp>
+        <p:nvSpPr>
+          <p:cNvPr id="11" name="CuadroTexto 10">
+            <a:extLst>
+              <a:ext uri="{FF2B5EF4-FFF2-40B4-BE49-F238E27FC236}">
+                <a16:creationId xmlns:a16="http://schemas.microsoft.com/office/drawing/2014/main" id="{A5BC3996-70A1-470E-995C-506549913052}"/>
+              </a:ext>
+            </a:extLst>
+          </p:cNvPr>
+          <p:cNvSpPr txBox="1"/>
+          <p:nvPr/>
+        </p:nvSpPr>
+        <p:spPr>
+          <a:xfrm>
+            <a:off x="7302500" y="2006600"/>
+            <a:ext cx="1016000" cy="228600"/>
+          </a:xfrm>
+          <a:prstGeom prst="rect">
+            <a:avLst/>
+          </a:prstGeom>
+          <a:noFill/>
+        </p:spPr>
+        <p:txBody>
+          <a:bodyPr vertOverflow="overflow" vert="horz" wrap="square" rtlCol="0" anchor="t">
+            <a:noAutofit/>
+          </a:bodyPr>
+          <a:lstStyle/>
+          <a:p>
+            <a:pPr algn="l"/>
+            <a:r>
+              <a:rPr lang="es-MX" sz="1000">
+                <a:solidFill>
+                  <a:srgbClr val="FFFFFF"/>
+                </a:solidFill>
+              </a:rPr>
+              <a:t>Mínimo local</a:t>
+            </a:r>
+          </a:p>
+        </p:txBody>
+      </p:sp>
+      <p:sp>
+        <p:nvSpPr>
+          <p:cNvPr id="12" name="Rectángulo 11">
+            <a:extLst>
+              <a:ext uri="{FF2B5EF4-FFF2-40B4-BE49-F238E27FC236}">
+                <a16:creationId xmlns:a16="http://schemas.microsoft.com/office/drawing/2014/main" id="{46F80166-9B50-4027-8369-490306C0ECAC}"/>
+              </a:ext>
+            </a:extLst>
+          </p:cNvPr>
+          <p:cNvSpPr/>
+          <p:nvPr/>
+        </p:nvSpPr>
+        <p:spPr>
+          <a:xfrm>
+            <a:off x="508000" y="4635500"/>
+            <a:ext cx="8128000" cy="355600"/>
+          </a:xfrm>
+          <a:prstGeom prst="rect">
+            <a:avLst/>
+          </a:prstGeom>
+          <a:solidFill>
+            <a:srgbClr val="2A3250"/>
+          </a:solidFill>
+          <a:ln w="25400" cap="flat" cmpd="sng" algn="ctr">
+            <a:noFill/>
+            <a:prstDash val="solid"/>
+          </a:ln>
+        </p:spPr>
+        <p:style>
+          <a:lnRef idx="2">
+            <a:schemeClr val="accent1">
+              <a:shade val="15000"/>
+            </a:schemeClr>
+          </a:lnRef>
+          <a:fillRef idx="1">
+            <a:schemeClr val="accent1"/>
+          </a:fillRef>
+          <a:effectRef idx="0">
+            <a:schemeClr val="accent1"/>
+          </a:effectRef>
+          <a:fontRef idx="minor">
+            <a:schemeClr val="lt1"/>
+          </a:fontRef>
+        </p:style>
+        <p:txBody>
+          <a:bodyPr vertOverflow="clip" horzOverflow="clip" rtlCol="0" anchor="ctr" anchorCtr="0">
+            <a:noAutofit/>
+          </a:bodyPr>
+          <a:lstStyle/>
+          <a:p>
+            <a:pPr algn="l"/>
+            <a:r>
+              <a:rPr lang="es-MX" sz="1300" b="1" i="1">
+                <a:solidFill>
+                  <a:srgbClr val="FFFFFF"/>
+                </a:solidFill>
+              </a:rPr>
+              <a:t>Los algoritmos avaros se atascan; necesitamos exploración</a:t>
+            </a:r>
+          </a:p>
+        </p:txBody>
+      </p:sp>
+    </p:spTree>
+    <p:extLst>
+      <p:ext uri="{BB962C8B-B14F-4D97-AF65-F5344CB8AC3E}">
+        <p14:creationId xmlns:p14="http://schemas.microsoft.com/office/powerpoint/2010/main" val="1144296791"/>
+      </p:ext>
+    </p:extLst>
+  </p:cSld>
+  <p:clrMapOvr>
+    <a:masterClrMapping/>
+  </p:clrMapOvr>
+</p:sld>
+</file>
+
+<file path=ppt/slides/slide3.xml><?xml version="1.0" encoding="utf-8"?>
+<p:sld xmlns:a="http://schemas.openxmlformats.org/drawingml/2006/main" xmlns:r="http://schemas.openxmlformats.org/officeDocument/2006/relationships" xmlns:p="http://schemas.openxmlformats.org/presentationml/2006/main">
+  <p:cSld>
+    <p:spTree>
+      <p:nvGrpSpPr>
+        <p:cNvPr id="1" name=""/>
+        <p:cNvGrpSpPr/>
+        <p:nvPr/>
+      </p:nvGrpSpPr>
+      <p:grpSpPr>
+        <a:xfrm>
+          <a:off x="0" y="0"/>
+          <a:ext cx="0" cy="0"/>
+          <a:chOff x="0" y="0"/>
+          <a:chExt cx="0" cy="0"/>
+        </a:xfrm>
+      </p:grpSpPr>
+      <p:sp>
+        <p:nvSpPr>
+          <p:cNvPr id="2" name="Rectángulo 1">
+            <a:extLst>
+              <a:ext uri="{FF2B5EF4-FFF2-40B4-BE49-F238E27FC236}">
+                <a16:creationId xmlns:a16="http://schemas.microsoft.com/office/drawing/2014/main" id="{CB987A49-7DF5-428A-B777-56C37D97BCCB}"/>
+              </a:ext>
+            </a:extLst>
+          </p:cNvPr>
+          <p:cNvSpPr/>
+          <p:nvPr/>
+        </p:nvSpPr>
+        <p:spPr>
+          <a:xfrm>
+            <a:off x="508000" y="381000"/>
+            <a:ext cx="76200" cy="457200"/>
+          </a:xfrm>
+          <a:prstGeom prst="rect">
+            <a:avLst/>
+          </a:prstGeom>
+          <a:solidFill>
+            <a:srgbClr val="D62728"/>
+          </a:solidFill>
+          <a:ln w="25400" cap="flat" cmpd="sng" algn="ctr">
+            <a:noFill/>
+            <a:prstDash val="solid"/>
+          </a:ln>
+        </p:spPr>
+        <p:style>
+          <a:lnRef idx="2">
+            <a:schemeClr val="accent1">
+              <a:shade val="15000"/>
+            </a:schemeClr>
+          </a:lnRef>
+          <a:fillRef idx="1">
+            <a:schemeClr val="accent1"/>
+          </a:fillRef>
+          <a:effectRef idx="0">
+            <a:schemeClr val="accent1"/>
+          </a:effectRef>
+          <a:fontRef idx="minor">
+            <a:schemeClr val="lt1"/>
+          </a:fontRef>
+        </p:style>
+        <p:txBody>
+          <a:bodyPr vertOverflow="clip" horzOverflow="clip" rtlCol="0" anchor="t"/>
+          <a:lstStyle/>
+          <a:p>
+            <a:pPr algn="l"/>
+            <a:endParaRPr lang="es-MX"/>
+          </a:p>
+        </p:txBody>
+      </p:sp>
+      <p:sp>
+        <p:nvSpPr>
+          <p:cNvPr id="3" name="CuadroTexto 2">
+            <a:extLst>
+              <a:ext uri="{FF2B5EF4-FFF2-40B4-BE49-F238E27FC236}">
+                <a16:creationId xmlns:a16="http://schemas.microsoft.com/office/drawing/2014/main" id="{7D8B6E87-FEB3-4E4F-847E-6D513B2E90BC}"/>
+              </a:ext>
+            </a:extLst>
+          </p:cNvPr>
+          <p:cNvSpPr txBox="1"/>
+          <p:nvPr/>
+        </p:nvSpPr>
+        <p:spPr>
+          <a:xfrm>
+            <a:off x="698500" y="381000"/>
+            <a:ext cx="6350000" cy="457200"/>
+          </a:xfrm>
+          <a:prstGeom prst="rect">
+            <a:avLst/>
+          </a:prstGeom>
+          <a:noFill/>
+        </p:spPr>
+        <p:txBody>
+          <a:bodyPr vertOverflow="overflow" vert="horz" wrap="square" rtlCol="0" anchor="t">
+            <a:noAutofit/>
+          </a:bodyPr>
+          <a:lstStyle/>
+          <a:p>
+            <a:pPr algn="l"/>
+            <a:r>
+              <a:rPr lang="es-MX" sz="2800" b="1">
+                <a:solidFill>
+                  <a:srgbClr val="030920"/>
+                </a:solidFill>
+              </a:rPr>
+              <a:t>Hill Climbing (HC)</a:t>
+            </a:r>
+          </a:p>
+        </p:txBody>
+      </p:sp>
+      <p:sp>
+        <p:nvSpPr>
+          <p:cNvPr id="4" name="CuadroTexto 3">
+            <a:extLst>
+              <a:ext uri="{FF2B5EF4-FFF2-40B4-BE49-F238E27FC236}">
+                <a16:creationId xmlns:a16="http://schemas.microsoft.com/office/drawing/2014/main" id="{A9C17462-5EAC-4E2E-A199-845C7029CD00}"/>
+              </a:ext>
+            </a:extLst>
+          </p:cNvPr>
+          <p:cNvSpPr txBox="1"/>
+          <p:nvPr/>
+        </p:nvSpPr>
+        <p:spPr>
+          <a:xfrm>
+            <a:off x="698500" y="825500"/>
+            <a:ext cx="6350000" cy="279400"/>
+          </a:xfrm>
+          <a:prstGeom prst="rect">
+            <a:avLst/>
+          </a:prstGeom>
+          <a:noFill/>
+        </p:spPr>
+        <p:txBody>
+          <a:bodyPr vertOverflow="overflow" vert="horz" wrap="square" rtlCol="0" anchor="t">
+            <a:noAutofit/>
+          </a:bodyPr>
+          <a:lstStyle/>
+          <a:p>
+            <a:pPr algn="l"/>
+            <a:r>
+              <a:rPr lang="es-MX" i="1">
+                <a:solidFill>
+                  <a:srgbClr val="D62728"/>
+                </a:solidFill>
+              </a:rPr>
+              <a:t>Búsqueda local avara</a:t>
+            </a:r>
+          </a:p>
+        </p:txBody>
+      </p:sp>
+      <p:sp>
+        <p:nvSpPr>
+          <p:cNvPr id="5" name="Rectángulo 4">
+            <a:extLst>
+              <a:ext uri="{FF2B5EF4-FFF2-40B4-BE49-F238E27FC236}">
+                <a16:creationId xmlns:a16="http://schemas.microsoft.com/office/drawing/2014/main" id="{873EF27C-239D-4CD7-B40D-8672EEDAA766}"/>
+              </a:ext>
+            </a:extLst>
+          </p:cNvPr>
+          <p:cNvSpPr/>
+          <p:nvPr/>
+        </p:nvSpPr>
+        <p:spPr>
+          <a:xfrm>
+            <a:off x="508000" y="1333500"/>
+            <a:ext cx="4318000" cy="2286000"/>
+          </a:xfrm>
+          <a:prstGeom prst="rect">
+            <a:avLst/>
+          </a:prstGeom>
+          <a:solidFill>
+            <a:srgbClr val="1A2238"/>
+          </a:solidFill>
+          <a:ln w="6350" cap="flat" cmpd="sng" algn="ctr">
+            <a:solidFill>
+              <a:srgbClr val="526D82"/>
+            </a:solidFill>
+            <a:prstDash val="solid"/>
+          </a:ln>
+        </p:spPr>
+        <p:style>
+          <a:lnRef idx="2">
+            <a:schemeClr val="accent1">
+              <a:shade val="15000"/>
+            </a:schemeClr>
+          </a:lnRef>
+          <a:fillRef idx="1">
+            <a:schemeClr val="accent1"/>
+          </a:fillRef>
+          <a:effectRef idx="0">
+            <a:schemeClr val="accent1"/>
+          </a:effectRef>
+          <a:fontRef idx="minor">
+            <a:schemeClr val="lt1"/>
+          </a:fontRef>
+        </p:style>
+        <p:txBody>
+          <a:bodyPr vertOverflow="clip" horzOverflow="clip" rtlCol="0" anchor="t"/>
+          <a:lstStyle/>
+          <a:p>
+            <a:pPr algn="l"/>
+            <a:endParaRPr lang="es-MX"/>
+          </a:p>
+        </p:txBody>
+      </p:sp>
+      <p:sp>
+        <p:nvSpPr>
+          <p:cNvPr id="6" name="CuadroTexto 5">
+            <a:extLst>
+              <a:ext uri="{FF2B5EF4-FFF2-40B4-BE49-F238E27FC236}">
+                <a16:creationId xmlns:a16="http://schemas.microsoft.com/office/drawing/2014/main" id="{A3AD6E0B-189E-4693-99AE-64F6DD620999}"/>
+              </a:ext>
+            </a:extLst>
+          </p:cNvPr>
+          <p:cNvSpPr txBox="1"/>
+          <p:nvPr/>
+        </p:nvSpPr>
+        <p:spPr>
+          <a:xfrm>
+            <a:off x="635000" y="1397000"/>
+            <a:ext cx="2540000" cy="228600"/>
+          </a:xfrm>
+          <a:prstGeom prst="rect">
+            <a:avLst/>
+          </a:prstGeom>
+          <a:noFill/>
+        </p:spPr>
+        <p:txBody>
+          <a:bodyPr vertOverflow="overflow" vert="horz" wrap="square" rtlCol="0" anchor="t">
+            <a:noAutofit/>
+          </a:bodyPr>
+          <a:lstStyle/>
+          <a:p>
+            <a:pPr algn="l"/>
+            <a:r>
+              <a:rPr lang="es-MX" sz="1000" b="1">
+                <a:solidFill>
+                  <a:srgbClr val="FFFFFF"/>
+                </a:solidFill>
+              </a:rPr>
+              <a:t>Pseudocódigo</a:t>
+            </a:r>
+          </a:p>
+        </p:txBody>
+      </p:sp>
+      <p:sp>
+        <p:nvSpPr>
+          <p:cNvPr id="7" name="CuadroTexto 6">
+            <a:extLst>
+              <a:ext uri="{FF2B5EF4-FFF2-40B4-BE49-F238E27FC236}">
+                <a16:creationId xmlns:a16="http://schemas.microsoft.com/office/drawing/2014/main" id="{8E189048-6187-4692-BA4D-7C5CEA629A96}"/>
+              </a:ext>
+            </a:extLst>
+          </p:cNvPr>
+          <p:cNvSpPr txBox="1"/>
+          <p:nvPr/>
+        </p:nvSpPr>
+        <p:spPr>
+          <a:xfrm>
+            <a:off x="635000" y="1651000"/>
+            <a:ext cx="4064000" cy="1905000"/>
+          </a:xfrm>
+          <a:prstGeom prst="rect">
+            <a:avLst/>
+          </a:prstGeom>
+          <a:noFill/>
+        </p:spPr>
+        <p:txBody>
+          <a:bodyPr vertOverflow="overflow" vert="horz" wrap="square" rtlCol="0" anchor="t">
+            <a:noAutofit/>
+          </a:bodyPr>
+          <a:lstStyle/>
+          <a:p>
+            <a:pPr algn="l"/>
+            <a:r>
+              <a:rPr lang="es-MX" sz="1200">
+                <a:solidFill>
+                  <a:srgbClr val="FFFFFF"/>
+                </a:solidFill>
+                <a:latin typeface="Consolas"/>
+              </a:rPr>
+              <a:t>actual ← solución_inicial
+repetir:
+  vecino ← mejor_vecino(actual)
+  si f(vecino) mejora f(actual):
+    actual ← vecino
+  si no: terminar
+retornar actual</a:t>
+            </a:r>
+          </a:p>
+        </p:txBody>
+      </p:sp>
+      <p:sp>
+        <p:nvSpPr>
+          <p:cNvPr id="8" name="CuadroTexto 7">
+            <a:extLst>
+              <a:ext uri="{FF2B5EF4-FFF2-40B4-BE49-F238E27FC236}">
+                <a16:creationId xmlns:a16="http://schemas.microsoft.com/office/drawing/2014/main" id="{7597E5E5-5ECE-4D89-9471-D09FF6FBAE8B}"/>
+              </a:ext>
+            </a:extLst>
+          </p:cNvPr>
+          <p:cNvSpPr txBox="1"/>
+          <p:nvPr/>
+        </p:nvSpPr>
+        <p:spPr>
+          <a:xfrm>
+            <a:off x="5080000" y="1333500"/>
+            <a:ext cx="3556000" cy="228600"/>
+          </a:xfrm>
+          <a:prstGeom prst="rect">
+            <a:avLst/>
+          </a:prstGeom>
+          <a:noFill/>
+        </p:spPr>
+        <p:txBody>
+          <a:bodyPr vertOverflow="overflow" vert="horz" wrap="square" rtlCol="0" anchor="t">
+            <a:noAutofit/>
+          </a:bodyPr>
+          <a:lstStyle/>
+          <a:p>
+            <a:pPr algn="l"/>
+            <a:r>
+              <a:rPr lang="es-MX" sz="1200" b="1">
+                <a:solidFill>
+                  <a:srgbClr val="D62728"/>
+                </a:solidFill>
+              </a:rPr>
+              <a:t>Idea</a:t>
+            </a:r>
+          </a:p>
+        </p:txBody>
+      </p:sp>
+      <p:sp>
+        <p:nvSpPr>
+          <p:cNvPr id="9" name="CuadroTexto 8">
+            <a:extLst>
+              <a:ext uri="{FF2B5EF4-FFF2-40B4-BE49-F238E27FC236}">
+                <a16:creationId xmlns:a16="http://schemas.microsoft.com/office/drawing/2014/main" id="{AA5BA1CA-EC80-4C81-A8DA-87CA41A07890}"/>
+              </a:ext>
+            </a:extLst>
+          </p:cNvPr>
+          <p:cNvSpPr txBox="1"/>
+          <p:nvPr/>
+        </p:nvSpPr>
+        <p:spPr>
+          <a:xfrm>
+            <a:off x="5080000" y="1574800"/>
+            <a:ext cx="3556000" cy="457200"/>
+          </a:xfrm>
+          <a:prstGeom prst="rect">
+            <a:avLst/>
+          </a:prstGeom>
+          <a:noFill/>
+        </p:spPr>
+        <p:txBody>
+          <a:bodyPr vertOverflow="overflow" vert="horz" wrap="square" rtlCol="0" anchor="t">
+            <a:noAutofit/>
+          </a:bodyPr>
+          <a:lstStyle/>
+          <a:p>
+            <a:pPr algn="l"/>
+            <a:r>
+              <a:rPr lang="es-MX" sz="1300">
+                <a:solidFill>
+                  <a:srgbClr val="030920"/>
+                </a:solidFill>
+              </a:rPr>
+              <a:t>Solo aceptar vecinos que mejoran la solución actual.</a:t>
+            </a:r>
+          </a:p>
+        </p:txBody>
+      </p:sp>
+      <p:sp>
+        <p:nvSpPr>
+          <p:cNvPr id="10" name="Rectángulo 9">
+            <a:extLst>
+              <a:ext uri="{FF2B5EF4-FFF2-40B4-BE49-F238E27FC236}">
+                <a16:creationId xmlns:a16="http://schemas.microsoft.com/office/drawing/2014/main" id="{B8B479EC-5481-4DD1-AF7A-08B27EB77153}"/>
+              </a:ext>
+            </a:extLst>
+          </p:cNvPr>
+          <p:cNvSpPr/>
+          <p:nvPr/>
+        </p:nvSpPr>
+        <p:spPr>
+          <a:xfrm>
+            <a:off x="5080000" y="2222500"/>
+            <a:ext cx="3556000" cy="635000"/>
+          </a:xfrm>
+          <a:prstGeom prst="rect">
+            <a:avLst/>
+          </a:prstGeom>
+          <a:solidFill>
+            <a:srgbClr val="1A3A1A"/>
+          </a:solidFill>
+          <a:ln w="25400" cap="flat" cmpd="sng" algn="ctr">
+            <a:noFill/>
+            <a:prstDash val="solid"/>
+          </a:ln>
+        </p:spPr>
+        <p:style>
+          <a:lnRef idx="2">
+            <a:schemeClr val="accent1">
+              <a:shade val="15000"/>
+            </a:schemeClr>
+          </a:lnRef>
+          <a:fillRef idx="1">
+            <a:schemeClr val="accent1"/>
+          </a:fillRef>
+          <a:effectRef idx="0">
+            <a:schemeClr val="accent1"/>
+          </a:effectRef>
+          <a:fontRef idx="minor">
+            <a:schemeClr val="lt1"/>
+          </a:fontRef>
+        </p:style>
+        <p:txBody>
+          <a:bodyPr vertOverflow="clip" horzOverflow="clip" rtlCol="0" anchor="t"/>
+          <a:lstStyle/>
+          <a:p>
+            <a:pPr algn="l"/>
+            <a:endParaRPr lang="es-MX"/>
+          </a:p>
+        </p:txBody>
+      </p:sp>
+      <p:sp>
+        <p:nvSpPr>
+          <p:cNvPr id="11" name="CuadroTexto 10">
+            <a:extLst>
+              <a:ext uri="{FF2B5EF4-FFF2-40B4-BE49-F238E27FC236}">
+                <a16:creationId xmlns:a16="http://schemas.microsoft.com/office/drawing/2014/main" id="{C49202B5-8D8C-4C8F-B6E1-88E33095C040}"/>
+              </a:ext>
+            </a:extLst>
+          </p:cNvPr>
+          <p:cNvSpPr txBox="1"/>
+          <p:nvPr/>
+        </p:nvSpPr>
+        <p:spPr>
+          <a:xfrm>
+            <a:off x="5207000" y="2286000"/>
+            <a:ext cx="3302000" cy="228600"/>
+          </a:xfrm>
+          <a:prstGeom prst="rect">
+            <a:avLst/>
+          </a:prstGeom>
+          <a:noFill/>
+        </p:spPr>
+        <p:txBody>
+          <a:bodyPr vertOverflow="overflow" vert="horz" wrap="square" rtlCol="0" anchor="t">
+            <a:noAutofit/>
+          </a:bodyPr>
+          <a:lstStyle/>
+          <a:p>
+            <a:pPr algn="l"/>
+            <a:r>
+              <a:rPr lang="es-MX" sz="1100" b="1">
+                <a:solidFill>
+                  <a:srgbClr val="2CA02C"/>
+                </a:solidFill>
+              </a:rPr>
+              <a:t>✓ Ventaja</a:t>
+            </a:r>
+          </a:p>
+        </p:txBody>
+      </p:sp>
+      <p:sp>
+        <p:nvSpPr>
+          <p:cNvPr id="12" name="CuadroTexto 11">
+            <a:extLst>
+              <a:ext uri="{FF2B5EF4-FFF2-40B4-BE49-F238E27FC236}">
+                <a16:creationId xmlns:a16="http://schemas.microsoft.com/office/drawing/2014/main" id="{144B8BF7-9913-4E79-99BF-C5D6A04018C1}"/>
+              </a:ext>
+            </a:extLst>
+          </p:cNvPr>
+          <p:cNvSpPr txBox="1"/>
+          <p:nvPr/>
+        </p:nvSpPr>
+        <p:spPr>
+          <a:xfrm>
+            <a:off x="5207000" y="2514600"/>
+            <a:ext cx="3302000" cy="279400"/>
+          </a:xfrm>
+          <a:prstGeom prst="rect">
+            <a:avLst/>
+          </a:prstGeom>
+          <a:noFill/>
+        </p:spPr>
+        <p:txBody>
+          <a:bodyPr vertOverflow="overflow" vert="horz" wrap="square" rtlCol="0" anchor="t">
+            <a:noAutofit/>
+          </a:bodyPr>
+          <a:lstStyle/>
+          <a:p>
+            <a:pPr algn="l"/>
+            <a:r>
+              <a:rPr lang="es-MX" sz="1300">
+                <a:solidFill>
+                  <a:srgbClr val="FFFFFF"/>
+                </a:solidFill>
+              </a:rPr>
+              <a:t>Simple, rápido y fácil de implementar</a:t>
+            </a:r>
+          </a:p>
+        </p:txBody>
+      </p:sp>
+      <p:sp>
+        <p:nvSpPr>
+          <p:cNvPr id="13" name="Rectángulo 12">
+            <a:extLst>
+              <a:ext uri="{FF2B5EF4-FFF2-40B4-BE49-F238E27FC236}">
+                <a16:creationId xmlns:a16="http://schemas.microsoft.com/office/drawing/2014/main" id="{2CA8424E-3D4A-4DD8-AD08-A619BF68F60A}"/>
+              </a:ext>
+            </a:extLst>
+          </p:cNvPr>
+          <p:cNvSpPr/>
+          <p:nvPr/>
+        </p:nvSpPr>
+        <p:spPr>
+          <a:xfrm>
+            <a:off x="5080000" y="2984500"/>
+            <a:ext cx="3556000" cy="635000"/>
+          </a:xfrm>
+          <a:prstGeom prst="rect">
+            <a:avLst/>
+          </a:prstGeom>
+          <a:solidFill>
+            <a:srgbClr val="3A1A1A"/>
+          </a:solidFill>
+          <a:ln w="25400" cap="flat" cmpd="sng" algn="ctr">
+            <a:noFill/>
+            <a:prstDash val="solid"/>
+          </a:ln>
+        </p:spPr>
+        <p:style>
+          <a:lnRef idx="2">
+            <a:schemeClr val="accent1">
+              <a:shade val="15000"/>
+            </a:schemeClr>
+          </a:lnRef>
+          <a:fillRef idx="1">
+            <a:schemeClr val="accent1"/>
+          </a:fillRef>
+          <a:effectRef idx="0">
+            <a:schemeClr val="accent1"/>
+          </a:effectRef>
+          <a:fontRef idx="minor">
+            <a:schemeClr val="lt1"/>
+          </a:fontRef>
+        </p:style>
+        <p:txBody>
+          <a:bodyPr vertOverflow="clip" horzOverflow="clip" rtlCol="0" anchor="t"/>
+          <a:lstStyle/>
+          <a:p>
+            <a:pPr algn="l"/>
+            <a:endParaRPr lang="es-MX"/>
+          </a:p>
+        </p:txBody>
+      </p:sp>
+      <p:sp>
+        <p:nvSpPr>
+          <p:cNvPr id="14" name="CuadroTexto 13">
+            <a:extLst>
+              <a:ext uri="{FF2B5EF4-FFF2-40B4-BE49-F238E27FC236}">
+                <a16:creationId xmlns:a16="http://schemas.microsoft.com/office/drawing/2014/main" id="{E9CAC13B-3037-47D2-81C1-F5805779B807}"/>
+              </a:ext>
+            </a:extLst>
+          </p:cNvPr>
+          <p:cNvSpPr txBox="1"/>
+          <p:nvPr/>
+        </p:nvSpPr>
+        <p:spPr>
+          <a:xfrm>
+            <a:off x="5207000" y="3048000"/>
+            <a:ext cx="3302000" cy="228600"/>
+          </a:xfrm>
+          <a:prstGeom prst="rect">
+            <a:avLst/>
+          </a:prstGeom>
+          <a:noFill/>
+        </p:spPr>
+        <p:txBody>
+          <a:bodyPr vertOverflow="overflow" vert="horz" wrap="square" rtlCol="0" anchor="t">
+            <a:noAutofit/>
+          </a:bodyPr>
+          <a:lstStyle/>
+          <a:p>
+            <a:pPr algn="l"/>
+            <a:r>
+              <a:rPr lang="es-MX" sz="1100" b="1">
+                <a:solidFill>
+                  <a:srgbClr val="D62728"/>
+                </a:solidFill>
+              </a:rPr>
+              <a:t>✗ Desventaja</a:t>
+            </a:r>
+          </a:p>
+        </p:txBody>
+      </p:sp>
+      <p:sp>
+        <p:nvSpPr>
+          <p:cNvPr id="15" name="CuadroTexto 14">
+            <a:extLst>
+              <a:ext uri="{FF2B5EF4-FFF2-40B4-BE49-F238E27FC236}">
+                <a16:creationId xmlns:a16="http://schemas.microsoft.com/office/drawing/2014/main" id="{B5435F7D-8C4A-486D-AD9F-F90103143AA4}"/>
+              </a:ext>
+            </a:extLst>
+          </p:cNvPr>
+          <p:cNvSpPr txBox="1"/>
+          <p:nvPr/>
+        </p:nvSpPr>
+        <p:spPr>
+          <a:xfrm>
+            <a:off x="5207000" y="3276600"/>
+            <a:ext cx="3302000" cy="279400"/>
+          </a:xfrm>
+          <a:prstGeom prst="rect">
+            <a:avLst/>
+          </a:prstGeom>
+          <a:noFill/>
+        </p:spPr>
+        <p:txBody>
+          <a:bodyPr vertOverflow="overflow" vert="horz" wrap="square" rtlCol="0" anchor="t">
+            <a:noAutofit/>
+          </a:bodyPr>
+          <a:lstStyle/>
+          <a:p>
+            <a:pPr algn="l"/>
+            <a:r>
+              <a:rPr lang="es-MX" sz="1300">
+                <a:solidFill>
+                  <a:srgbClr val="FFFFFF"/>
+                </a:solidFill>
+              </a:rPr>
+              <a:t>Se atasca en óptimos locales</a:t>
+            </a:r>
+          </a:p>
+        </p:txBody>
+      </p:sp>
+      <p:sp>
+        <p:nvSpPr>
+          <p:cNvPr id="16" name="Rectángulo 15">
+            <a:extLst>
+              <a:ext uri="{FF2B5EF4-FFF2-40B4-BE49-F238E27FC236}">
+                <a16:creationId xmlns:a16="http://schemas.microsoft.com/office/drawing/2014/main" id="{BA72F7B3-CCFA-4E1F-BE2A-340D5DBD8A95}"/>
+              </a:ext>
+            </a:extLst>
+          </p:cNvPr>
+          <p:cNvSpPr/>
+          <p:nvPr/>
+        </p:nvSpPr>
+        <p:spPr>
+          <a:xfrm>
+            <a:off x="508000" y="3873500"/>
+            <a:ext cx="8128000" cy="355600"/>
+          </a:xfrm>
+          <a:prstGeom prst="rect">
+            <a:avLst/>
+          </a:prstGeom>
+          <a:solidFill>
+            <a:srgbClr val="2A3250"/>
+          </a:solidFill>
+          <a:ln w="25400" cap="flat" cmpd="sng" algn="ctr">
+            <a:noFill/>
+            <a:prstDash val="solid"/>
+          </a:ln>
+        </p:spPr>
+        <p:style>
+          <a:lnRef idx="2">
+            <a:schemeClr val="accent1">
+              <a:shade val="15000"/>
+            </a:schemeClr>
+          </a:lnRef>
+          <a:fillRef idx="1">
+            <a:schemeClr val="accent1"/>
+          </a:fillRef>
+          <a:effectRef idx="0">
+            <a:schemeClr val="accent1"/>
+          </a:effectRef>
+          <a:fontRef idx="minor">
+            <a:schemeClr val="lt1"/>
+          </a:fontRef>
+        </p:style>
+        <p:txBody>
+          <a:bodyPr vertOverflow="clip" horzOverflow="clip" rtlCol="0" anchor="ctr" anchorCtr="0">
+            <a:noAutofit/>
+          </a:bodyPr>
+          <a:lstStyle/>
+          <a:p>
+            <a:pPr algn="l"/>
+            <a:r>
+              <a:rPr lang="es-MX" sz="1200" i="1">
+                <a:solidFill>
+                  <a:srgbClr val="FFFFFF"/>
+                </a:solidFill>
+              </a:rPr>
+              <a:t>Si el vecino no mejora, HC se detiene — aunque haya algo mejor más adelante</a:t>
+            </a:r>
+          </a:p>
+        </p:txBody>
+      </p:sp>
+    </p:spTree>
+    <p:extLst>
+      <p:ext uri="{BB962C8B-B14F-4D97-AF65-F5344CB8AC3E}">
+        <p14:creationId xmlns:p14="http://schemas.microsoft.com/office/powerpoint/2010/main" val="1679697612"/>
+      </p:ext>
+    </p:extLst>
+  </p:cSld>
+  <p:clrMapOvr>
+    <a:masterClrMapping/>
+  </p:clrMapOvr>
+</p:sld>
+</file>
+
+<file path=ppt/slides/slide4.xml><?xml version="1.0" encoding="utf-8"?>
+<p:sld xmlns:a="http://schemas.openxmlformats.org/drawingml/2006/main" xmlns:r="http://schemas.openxmlformats.org/officeDocument/2006/relationships" xmlns:p="http://schemas.openxmlformats.org/presentationml/2006/main">
+  <p:cSld>
+    <p:spTree>
+      <p:nvGrpSpPr>
+        <p:cNvPr id="1" name=""/>
+        <p:cNvGrpSpPr/>
+        <p:nvPr/>
+      </p:nvGrpSpPr>
+      <p:grpSpPr>
+        <a:xfrm>
+          <a:off x="0" y="0"/>
+          <a:ext cx="0" cy="0"/>
+          <a:chOff x="0" y="0"/>
+          <a:chExt cx="0" cy="0"/>
+        </a:xfrm>
+      </p:grpSpPr>
+      <p:sp>
+        <p:nvSpPr>
+          <p:cNvPr id="2" name="Rectángulo 1">
+            <a:extLst>
+              <a:ext uri="{FF2B5EF4-FFF2-40B4-BE49-F238E27FC236}">
+                <a16:creationId xmlns:a16="http://schemas.microsoft.com/office/drawing/2014/main" id="{3C36495A-51E7-4B37-A125-E8F44E4C65D7}"/>
+              </a:ext>
+            </a:extLst>
+          </p:cNvPr>
+          <p:cNvSpPr/>
+          <p:nvPr/>
+        </p:nvSpPr>
+        <p:spPr>
+          <a:xfrm>
+            <a:off x="508000" y="381000"/>
+            <a:ext cx="76200" cy="457200"/>
+          </a:xfrm>
+          <a:prstGeom prst="rect">
+            <a:avLst/>
+          </a:prstGeom>
+          <a:solidFill>
+            <a:srgbClr val="1F77B4"/>
+          </a:solidFill>
+          <a:ln w="25400" cap="flat" cmpd="sng" algn="ctr">
+            <a:noFill/>
+            <a:prstDash val="solid"/>
+          </a:ln>
+        </p:spPr>
+        <p:style>
+          <a:lnRef idx="2">
+            <a:schemeClr val="accent1">
+              <a:shade val="15000"/>
+            </a:schemeClr>
+          </a:lnRef>
+          <a:fillRef idx="1">
+            <a:schemeClr val="accent1"/>
+          </a:fillRef>
+          <a:effectRef idx="0">
+            <a:schemeClr val="accent1"/>
+          </a:effectRef>
+          <a:fontRef idx="minor">
+            <a:schemeClr val="lt1"/>
+          </a:fontRef>
+        </p:style>
+        <p:txBody>
+          <a:bodyPr vertOverflow="clip" horzOverflow="clip" rtlCol="0" anchor="t"/>
+          <a:lstStyle/>
+          <a:p>
+            <a:pPr algn="l"/>
+            <a:endParaRPr lang="es-MX"/>
+          </a:p>
+        </p:txBody>
+      </p:sp>
+      <p:sp>
+        <p:nvSpPr>
+          <p:cNvPr id="3" name="CuadroTexto 2">
+            <a:extLst>
+              <a:ext uri="{FF2B5EF4-FFF2-40B4-BE49-F238E27FC236}">
+                <a16:creationId xmlns:a16="http://schemas.microsoft.com/office/drawing/2014/main" id="{1974578C-96E4-405E-AAF4-E76EC2483756}"/>
+              </a:ext>
+            </a:extLst>
+          </p:cNvPr>
+          <p:cNvSpPr txBox="1"/>
+          <p:nvPr/>
+        </p:nvSpPr>
+        <p:spPr>
+          <a:xfrm>
+            <a:off x="698500" y="381000"/>
+            <a:ext cx="6350000" cy="457200"/>
+          </a:xfrm>
+          <a:prstGeom prst="rect">
+            <a:avLst/>
+          </a:prstGeom>
+          <a:noFill/>
+        </p:spPr>
+        <p:txBody>
+          <a:bodyPr vertOverflow="overflow" vert="horz" wrap="square" rtlCol="0" anchor="t">
+            <a:noAutofit/>
+          </a:bodyPr>
+          <a:lstStyle/>
+          <a:p>
+            <a:pPr algn="l"/>
+            <a:r>
+              <a:rPr lang="es-MX" sz="2800" b="1" dirty="0" err="1">
+                <a:solidFill>
+                  <a:srgbClr val="030920"/>
+                </a:solidFill>
+              </a:rPr>
+              <a:t>Simulated</a:t>
+            </a:r>
+            <a:r>
+              <a:rPr lang="es-MX" sz="2800" b="1" dirty="0">
+                <a:solidFill>
+                  <a:srgbClr val="030920"/>
+                </a:solidFill>
+              </a:rPr>
+              <a:t> </a:t>
+            </a:r>
+            <a:r>
+              <a:rPr lang="es-MX" sz="2800" b="1" dirty="0" err="1">
+                <a:solidFill>
+                  <a:srgbClr val="030920"/>
+                </a:solidFill>
+              </a:rPr>
+              <a:t>Annealing</a:t>
+            </a:r>
+            <a:r>
+              <a:rPr lang="es-MX" sz="2800" b="1" dirty="0">
+                <a:solidFill>
+                  <a:srgbClr val="030920"/>
+                </a:solidFill>
+              </a:rPr>
+              <a:t> (SA)</a:t>
+            </a:r>
+          </a:p>
+        </p:txBody>
+      </p:sp>
+      <p:sp>
+        <p:nvSpPr>
+          <p:cNvPr id="4" name="CuadroTexto 3">
+            <a:extLst>
+              <a:ext uri="{FF2B5EF4-FFF2-40B4-BE49-F238E27FC236}">
+                <a16:creationId xmlns:a16="http://schemas.microsoft.com/office/drawing/2014/main" id="{A9A4FFFA-D153-415E-B711-CD3A696F872A}"/>
+              </a:ext>
+            </a:extLst>
+          </p:cNvPr>
+          <p:cNvSpPr txBox="1"/>
+          <p:nvPr/>
+        </p:nvSpPr>
+        <p:spPr>
+          <a:xfrm>
+            <a:off x="698500" y="825500"/>
+            <a:ext cx="6350000" cy="279400"/>
+          </a:xfrm>
+          <a:prstGeom prst="rect">
+            <a:avLst/>
+          </a:prstGeom>
+          <a:noFill/>
+        </p:spPr>
+        <p:txBody>
+          <a:bodyPr vertOverflow="overflow" vert="horz" wrap="square" rtlCol="0" anchor="t">
+            <a:noAutofit/>
+          </a:bodyPr>
+          <a:lstStyle/>
+          <a:p>
+            <a:pPr algn="l"/>
+            <a:r>
+              <a:rPr lang="es-MX" i="1">
+                <a:solidFill>
+                  <a:srgbClr val="1F77B4"/>
+                </a:solidFill>
+              </a:rPr>
+              <a:t>Inspirado en el enfriamiento de metales</a:t>
+            </a:r>
+          </a:p>
+        </p:txBody>
+      </p:sp>
+      <p:sp>
+        <p:nvSpPr>
+          <p:cNvPr id="5" name="Rectángulo 4">
+            <a:extLst>
+              <a:ext uri="{FF2B5EF4-FFF2-40B4-BE49-F238E27FC236}">
+                <a16:creationId xmlns:a16="http://schemas.microsoft.com/office/drawing/2014/main" id="{57F6AEC1-8384-420D-ABD3-A27E2D48FA85}"/>
+              </a:ext>
+            </a:extLst>
+          </p:cNvPr>
+          <p:cNvSpPr/>
+          <p:nvPr/>
+        </p:nvSpPr>
+        <p:spPr>
+          <a:xfrm>
+            <a:off x="508000" y="1270000"/>
+            <a:ext cx="4064000" cy="2222500"/>
+          </a:xfrm>
+          <a:prstGeom prst="rect">
+            <a:avLst/>
+          </a:prstGeom>
+          <a:solidFill>
+            <a:srgbClr val="1A2238"/>
+          </a:solidFill>
+          <a:ln w="6350" cap="flat" cmpd="sng" algn="ctr">
+            <a:solidFill>
+              <a:srgbClr val="526D82"/>
+            </a:solidFill>
+            <a:prstDash val="solid"/>
+          </a:ln>
+        </p:spPr>
+        <p:style>
+          <a:lnRef idx="2">
+            <a:schemeClr val="accent1">
+              <a:shade val="15000"/>
+            </a:schemeClr>
+          </a:lnRef>
+          <a:fillRef idx="1">
+            <a:schemeClr val="accent1"/>
+          </a:fillRef>
+          <a:effectRef idx="0">
+            <a:schemeClr val="accent1"/>
+          </a:effectRef>
+          <a:fontRef idx="minor">
+            <a:schemeClr val="lt1"/>
+          </a:fontRef>
+        </p:style>
+        <p:txBody>
+          <a:bodyPr vertOverflow="clip" horzOverflow="clip" rtlCol="0" anchor="t"/>
+          <a:lstStyle/>
+          <a:p>
+            <a:pPr algn="l"/>
+            <a:endParaRPr lang="es-MX"/>
+          </a:p>
+        </p:txBody>
+      </p:sp>
+      <p:sp>
+        <p:nvSpPr>
+          <p:cNvPr id="6" name="CuadroTexto 5">
+            <a:extLst>
+              <a:ext uri="{FF2B5EF4-FFF2-40B4-BE49-F238E27FC236}">
+                <a16:creationId xmlns:a16="http://schemas.microsoft.com/office/drawing/2014/main" id="{76FD659E-52A0-42AC-9B89-B23F665E511E}"/>
+              </a:ext>
+            </a:extLst>
+          </p:cNvPr>
+          <p:cNvSpPr txBox="1"/>
+          <p:nvPr/>
+        </p:nvSpPr>
+        <p:spPr>
+          <a:xfrm>
+            <a:off x="635000" y="1333500"/>
+            <a:ext cx="2540000" cy="203200"/>
+          </a:xfrm>
+          <a:prstGeom prst="rect">
+            <a:avLst/>
+          </a:prstGeom>
+          <a:noFill/>
+        </p:spPr>
+        <p:txBody>
+          <a:bodyPr vertOverflow="overflow" vert="horz" wrap="square" rtlCol="0" anchor="t">
+            <a:noAutofit/>
+          </a:bodyPr>
+          <a:lstStyle/>
+          <a:p>
+            <a:pPr algn="l"/>
+            <a:r>
+              <a:rPr lang="es-MX" sz="1000" b="1">
+                <a:solidFill>
+                  <a:srgbClr val="FFFFFF"/>
+                </a:solidFill>
+              </a:rPr>
+              <a:t>Pseudocódigo</a:t>
+            </a:r>
+          </a:p>
+        </p:txBody>
+      </p:sp>
+      <p:sp>
+        <p:nvSpPr>
+          <p:cNvPr id="7" name="CuadroTexto 6">
+            <a:extLst>
+              <a:ext uri="{FF2B5EF4-FFF2-40B4-BE49-F238E27FC236}">
+                <a16:creationId xmlns:a16="http://schemas.microsoft.com/office/drawing/2014/main" id="{2389B3DC-C059-4E3A-8A54-68078C84F370}"/>
+              </a:ext>
+            </a:extLst>
+          </p:cNvPr>
+          <p:cNvSpPr txBox="1"/>
+          <p:nvPr/>
+        </p:nvSpPr>
+        <p:spPr>
+          <a:xfrm>
+            <a:off x="635000" y="1549400"/>
+            <a:ext cx="3810000" cy="1841500"/>
+          </a:xfrm>
+          <a:prstGeom prst="rect">
+            <a:avLst/>
+          </a:prstGeom>
+          <a:noFill/>
+        </p:spPr>
+        <p:txBody>
+          <a:bodyPr vertOverflow="overflow" vert="horz" wrap="square" rtlCol="0" anchor="t">
+            <a:noAutofit/>
+          </a:bodyPr>
+          <a:lstStyle/>
+          <a:p>
+            <a:pPr algn="l"/>
+            <a:r>
+              <a:rPr lang="es-MX" sz="1100">
+                <a:solidFill>
+                  <a:srgbClr val="FFFFFF"/>
+                </a:solidFill>
+                <a:latin typeface="Consolas"/>
+              </a:rPr>
+              <a:t>T ← T₀;  actual ← inicial
+mientras T &gt; T_final:
+  vecino ← random_vecino(actual)
+  </a:t>
+            </a:r>
+            <a:r>
+              <a:rPr lang="el-GR" sz="1100">
+                <a:solidFill>
+                  <a:srgbClr val="FFFFFF"/>
+                </a:solidFill>
+                <a:latin typeface="Consolas"/>
+              </a:rPr>
+              <a:t>Δ ← </a:t>
+            </a:r>
+            <a:r>
+              <a:rPr lang="es-MX" sz="1100">
+                <a:solidFill>
+                  <a:srgbClr val="FFFFFF"/>
+                </a:solidFill>
+                <a:latin typeface="Consolas"/>
+              </a:rPr>
+              <a:t>f(vecino) − f(actual)
+  si </a:t>
+            </a:r>
+            <a:r>
+              <a:rPr lang="el-GR" sz="1100">
+                <a:solidFill>
+                  <a:srgbClr val="FFFFFF"/>
+                </a:solidFill>
+                <a:latin typeface="Consolas"/>
+              </a:rPr>
+              <a:t>Δ &lt; 0  </a:t>
+            </a:r>
+            <a:r>
+              <a:rPr lang="es-MX" sz="1100">
+                <a:solidFill>
+                  <a:srgbClr val="FFFFFF"/>
+                </a:solidFill>
+                <a:latin typeface="Consolas"/>
+              </a:rPr>
+              <a:t>o  rand() &lt; exp(−</a:t>
+            </a:r>
+            <a:r>
+              <a:rPr lang="el-GR" sz="1100">
+                <a:solidFill>
+                  <a:srgbClr val="FFFFFF"/>
+                </a:solidFill>
+                <a:latin typeface="Consolas"/>
+              </a:rPr>
+              <a:t>Δ/</a:t>
+            </a:r>
+            <a:r>
+              <a:rPr lang="es-MX" sz="1100">
+                <a:solidFill>
+                  <a:srgbClr val="FFFFFF"/>
+                </a:solidFill>
+                <a:latin typeface="Consolas"/>
+              </a:rPr>
+              <a:t>T):
+    actual ← vecino
+  T ← </a:t>
+            </a:r>
+            <a:r>
+              <a:rPr lang="el-GR" sz="1100">
+                <a:solidFill>
+                  <a:srgbClr val="FFFFFF"/>
+                </a:solidFill>
+                <a:latin typeface="Consolas"/>
+              </a:rPr>
+              <a:t>α · </a:t>
+            </a:r>
+            <a:r>
+              <a:rPr lang="es-MX" sz="1100">
+                <a:solidFill>
+                  <a:srgbClr val="FFFFFF"/>
+                </a:solidFill>
+                <a:latin typeface="Consolas"/>
+              </a:rPr>
+              <a:t>T</a:t>
+            </a:r>
+          </a:p>
+        </p:txBody>
+      </p:sp>
+      <p:sp>
+        <p:nvSpPr>
+          <p:cNvPr id="8" name="Rectángulo 7">
+            <a:extLst>
+              <a:ext uri="{FF2B5EF4-FFF2-40B4-BE49-F238E27FC236}">
+                <a16:creationId xmlns:a16="http://schemas.microsoft.com/office/drawing/2014/main" id="{90A1A944-C8E2-4AD7-BE94-82115C98F37F}"/>
+              </a:ext>
+            </a:extLst>
+          </p:cNvPr>
+          <p:cNvSpPr/>
+          <p:nvPr/>
+        </p:nvSpPr>
+        <p:spPr>
+          <a:xfrm>
+            <a:off x="4826000" y="1270000"/>
+            <a:ext cx="3810000" cy="762000"/>
+          </a:xfrm>
+          <a:prstGeom prst="rect">
+            <a:avLst/>
+          </a:prstGeom>
+          <a:solidFill>
+            <a:srgbClr val="1F77B4"/>
+          </a:solidFill>
+          <a:ln w="25400" cap="flat" cmpd="sng" algn="ctr">
+            <a:noFill/>
+            <a:prstDash val="solid"/>
+          </a:ln>
+        </p:spPr>
+        <p:style>
+          <a:lnRef idx="2">
+            <a:schemeClr val="accent1">
+              <a:shade val="15000"/>
+            </a:schemeClr>
+          </a:lnRef>
+          <a:fillRef idx="1">
+            <a:schemeClr val="accent1"/>
+          </a:fillRef>
+          <a:effectRef idx="0">
+            <a:schemeClr val="accent1"/>
+          </a:effectRef>
+          <a:fontRef idx="minor">
+            <a:schemeClr val="lt1"/>
+          </a:fontRef>
+        </p:style>
+        <p:txBody>
+          <a:bodyPr vertOverflow="clip" horzOverflow="clip" rtlCol="0" anchor="t"/>
+          <a:lstStyle/>
+          <a:p>
+            <a:pPr algn="l"/>
+            <a:endParaRPr lang="es-MX"/>
+          </a:p>
+        </p:txBody>
+      </p:sp>
+      <p:sp>
+        <p:nvSpPr>
+          <p:cNvPr id="9" name="CuadroTexto 8">
+            <a:extLst>
+              <a:ext uri="{FF2B5EF4-FFF2-40B4-BE49-F238E27FC236}">
+                <a16:creationId xmlns:a16="http://schemas.microsoft.com/office/drawing/2014/main" id="{47F32184-54EE-4F45-8531-5AE1DAD22A3C}"/>
+              </a:ext>
+            </a:extLst>
+          </p:cNvPr>
+          <p:cNvSpPr txBox="1"/>
+          <p:nvPr/>
+        </p:nvSpPr>
+        <p:spPr>
+          <a:xfrm>
+            <a:off x="4826000" y="1270000"/>
+            <a:ext cx="3810000" cy="762000"/>
+          </a:xfrm>
+          <a:prstGeom prst="rect">
+            <a:avLst/>
+          </a:prstGeom>
+          <a:noFill/>
+        </p:spPr>
+        <p:txBody>
+          <a:bodyPr vertOverflow="overflow" vert="horz" wrap="square" rtlCol="0" anchor="ctr" anchorCtr="0">
+            <a:noAutofit/>
+          </a:bodyPr>
+          <a:lstStyle/>
+          <a:p>
+            <a:pPr algn="l"/>
+            <a:r>
+              <a:rPr lang="es-MX" sz="1800" b="1">
+                <a:solidFill>
+                  <a:srgbClr val="FFFFFF"/>
+                </a:solidFill>
+              </a:rPr>
+              <a:t>P(aceptar peor) = exp(−Δ / T)</a:t>
+            </a:r>
+          </a:p>
+        </p:txBody>
+      </p:sp>
+      <p:sp>
+        <p:nvSpPr>
+          <p:cNvPr id="10" name="CuadroTexto 9">
+            <a:extLst>
+              <a:ext uri="{FF2B5EF4-FFF2-40B4-BE49-F238E27FC236}">
+                <a16:creationId xmlns:a16="http://schemas.microsoft.com/office/drawing/2014/main" id="{221D5A83-51E5-439D-855B-FBEABBBCE490}"/>
+              </a:ext>
+            </a:extLst>
+          </p:cNvPr>
+          <p:cNvSpPr txBox="1"/>
+          <p:nvPr/>
+        </p:nvSpPr>
+        <p:spPr>
+          <a:xfrm>
+            <a:off x="4826000" y="2159000"/>
+            <a:ext cx="3810000" cy="228600"/>
+          </a:xfrm>
+          <a:prstGeom prst="rect">
+            <a:avLst/>
+          </a:prstGeom>
+          <a:noFill/>
+        </p:spPr>
+        <p:txBody>
+          <a:bodyPr vertOverflow="overflow" vert="horz" wrap="square" rtlCol="0" anchor="t">
+            <a:noAutofit/>
+          </a:bodyPr>
+          <a:lstStyle/>
+          <a:p>
+            <a:pPr algn="l"/>
+            <a:r>
+              <a:rPr lang="es-MX" sz="1100" b="1">
+                <a:solidFill>
+                  <a:srgbClr val="030920"/>
+                </a:solidFill>
+              </a:rPr>
+              <a:t>Temperatura controla el comportamiento</a:t>
+            </a:r>
+          </a:p>
+        </p:txBody>
+      </p:sp>
+      <p:sp>
+        <p:nvSpPr>
+          <p:cNvPr id="11" name="Rectángulo 10">
+            <a:extLst>
+              <a:ext uri="{FF2B5EF4-FFF2-40B4-BE49-F238E27FC236}">
+                <a16:creationId xmlns:a16="http://schemas.microsoft.com/office/drawing/2014/main" id="{256C9506-14FD-4B37-9012-B695AB044DC7}"/>
+              </a:ext>
+            </a:extLst>
+          </p:cNvPr>
+          <p:cNvSpPr/>
+          <p:nvPr/>
+        </p:nvSpPr>
+        <p:spPr>
+          <a:xfrm>
+            <a:off x="4826000" y="2438400"/>
+            <a:ext cx="1841500" cy="1016000"/>
+          </a:xfrm>
+          <a:prstGeom prst="rect">
+            <a:avLst/>
+          </a:prstGeom>
+          <a:solidFill>
+            <a:srgbClr val="B0341E"/>
+          </a:solidFill>
+          <a:ln w="25400" cap="flat" cmpd="sng" algn="ctr">
+            <a:noFill/>
+            <a:prstDash val="solid"/>
+          </a:ln>
+        </p:spPr>
+        <p:style>
+          <a:lnRef idx="2">
+            <a:schemeClr val="accent1">
+              <a:shade val="15000"/>
+            </a:schemeClr>
+          </a:lnRef>
+          <a:fillRef idx="1">
+            <a:schemeClr val="accent1"/>
+          </a:fillRef>
+          <a:effectRef idx="0">
+            <a:schemeClr val="accent1"/>
+          </a:effectRef>
+          <a:fontRef idx="minor">
+            <a:schemeClr val="lt1"/>
+          </a:fontRef>
+        </p:style>
+        <p:txBody>
+          <a:bodyPr vertOverflow="clip" horzOverflow="clip" rtlCol="0" anchor="t"/>
+          <a:lstStyle/>
+          <a:p>
+            <a:pPr algn="l"/>
+            <a:endParaRPr lang="es-MX"/>
+          </a:p>
+        </p:txBody>
+      </p:sp>
+      <p:sp>
+        <p:nvSpPr>
+          <p:cNvPr id="12" name="CuadroTexto 11">
+            <a:extLst>
+              <a:ext uri="{FF2B5EF4-FFF2-40B4-BE49-F238E27FC236}">
+                <a16:creationId xmlns:a16="http://schemas.microsoft.com/office/drawing/2014/main" id="{829CC09A-9F67-4D13-B9E0-69353D1B804F}"/>
+              </a:ext>
+            </a:extLst>
+          </p:cNvPr>
+          <p:cNvSpPr txBox="1"/>
+          <p:nvPr/>
+        </p:nvSpPr>
+        <p:spPr>
+          <a:xfrm>
+            <a:off x="4826000" y="2438400"/>
+            <a:ext cx="1841500" cy="1016000"/>
+          </a:xfrm>
+          <a:prstGeom prst="rect">
+            <a:avLst/>
+          </a:prstGeom>
+          <a:noFill/>
+        </p:spPr>
+        <p:txBody>
+          <a:bodyPr vertOverflow="overflow" vert="horz" wrap="square" rtlCol="0" anchor="ctr" anchorCtr="0">
+            <a:noAutofit/>
+          </a:bodyPr>
+          <a:lstStyle/>
+          <a:p>
+            <a:pPr algn="l"/>
+            <a:r>
+              <a:rPr lang="es-MX" b="1">
+                <a:solidFill>
+                  <a:srgbClr val="FFFFFF"/>
+                </a:solidFill>
+              </a:rPr>
+              <a:t>T alta
+Exploración</a:t>
+            </a:r>
+          </a:p>
+        </p:txBody>
+      </p:sp>
+      <p:sp>
+        <p:nvSpPr>
+          <p:cNvPr id="13" name="Rectángulo 12">
+            <a:extLst>
+              <a:ext uri="{FF2B5EF4-FFF2-40B4-BE49-F238E27FC236}">
+                <a16:creationId xmlns:a16="http://schemas.microsoft.com/office/drawing/2014/main" id="{6FEB2532-FBD9-41A7-AF26-CAEE6418AB94}"/>
+              </a:ext>
+            </a:extLst>
+          </p:cNvPr>
+          <p:cNvSpPr/>
+          <p:nvPr/>
+        </p:nvSpPr>
+        <p:spPr>
+          <a:xfrm>
+            <a:off x="6794500" y="2438400"/>
+            <a:ext cx="1841500" cy="1016000"/>
+          </a:xfrm>
+          <a:prstGeom prst="rect">
+            <a:avLst/>
+          </a:prstGeom>
+          <a:solidFill>
+            <a:srgbClr val="1F77B4"/>
+          </a:solidFill>
+          <a:ln w="25400" cap="flat" cmpd="sng" algn="ctr">
+            <a:noFill/>
+            <a:prstDash val="solid"/>
+          </a:ln>
+        </p:spPr>
+        <p:style>
+          <a:lnRef idx="2">
+            <a:schemeClr val="accent1">
+              <a:shade val="15000"/>
+            </a:schemeClr>
+          </a:lnRef>
+          <a:fillRef idx="1">
+            <a:schemeClr val="accent1"/>
+          </a:fillRef>
+          <a:effectRef idx="0">
+            <a:schemeClr val="accent1"/>
+          </a:effectRef>
+          <a:fontRef idx="minor">
+            <a:schemeClr val="lt1"/>
+          </a:fontRef>
+        </p:style>
+        <p:txBody>
+          <a:bodyPr vertOverflow="clip" horzOverflow="clip" rtlCol="0" anchor="t"/>
+          <a:lstStyle/>
+          <a:p>
+            <a:pPr algn="l"/>
+            <a:endParaRPr lang="es-MX"/>
+          </a:p>
+        </p:txBody>
+      </p:sp>
+      <p:sp>
+        <p:nvSpPr>
+          <p:cNvPr id="14" name="CuadroTexto 13">
+            <a:extLst>
+              <a:ext uri="{FF2B5EF4-FFF2-40B4-BE49-F238E27FC236}">
+                <a16:creationId xmlns:a16="http://schemas.microsoft.com/office/drawing/2014/main" id="{27A84C09-1312-489A-93AA-FACBF04DEA77}"/>
+              </a:ext>
+            </a:extLst>
+          </p:cNvPr>
+          <p:cNvSpPr txBox="1"/>
+          <p:nvPr/>
+        </p:nvSpPr>
+        <p:spPr>
+          <a:xfrm>
+            <a:off x="6794500" y="2438400"/>
+            <a:ext cx="1841500" cy="1016000"/>
+          </a:xfrm>
+          <a:prstGeom prst="rect">
+            <a:avLst/>
+          </a:prstGeom>
+          <a:noFill/>
+        </p:spPr>
+        <p:txBody>
+          <a:bodyPr vertOverflow="overflow" vert="horz" wrap="square" rtlCol="0" anchor="ctr" anchorCtr="0">
+            <a:noAutofit/>
+          </a:bodyPr>
+          <a:lstStyle/>
+          <a:p>
+            <a:pPr algn="l"/>
+            <a:r>
+              <a:rPr lang="es-MX" b="1">
+                <a:solidFill>
+                  <a:srgbClr val="FFFFFF"/>
+                </a:solidFill>
+              </a:rPr>
+              <a:t>T baja
+Explotación</a:t>
+            </a:r>
+          </a:p>
+        </p:txBody>
+      </p:sp>
+      <p:sp>
+        <p:nvSpPr>
+          <p:cNvPr id="15" name="Rectángulo 14">
+            <a:extLst>
+              <a:ext uri="{FF2B5EF4-FFF2-40B4-BE49-F238E27FC236}">
+                <a16:creationId xmlns:a16="http://schemas.microsoft.com/office/drawing/2014/main" id="{E78FE730-0AA0-4EAD-B5FA-17EAA77E8363}"/>
+              </a:ext>
+            </a:extLst>
+          </p:cNvPr>
+          <p:cNvSpPr/>
+          <p:nvPr/>
+        </p:nvSpPr>
+        <p:spPr>
+          <a:xfrm>
+            <a:off x="508000" y="3683000"/>
+            <a:ext cx="8128000" cy="889000"/>
+          </a:xfrm>
+          <a:prstGeom prst="rect">
+            <a:avLst/>
+          </a:prstGeom>
+          <a:solidFill>
+            <a:srgbClr val="2A3250"/>
+          </a:solidFill>
+          <a:ln w="25400" cap="flat" cmpd="sng" algn="ctr">
+            <a:noFill/>
+            <a:prstDash val="solid"/>
+          </a:ln>
+        </p:spPr>
+        <p:style>
+          <a:lnRef idx="2">
+            <a:schemeClr val="accent1">
+              <a:shade val="15000"/>
+            </a:schemeClr>
+          </a:lnRef>
+          <a:fillRef idx="1">
+            <a:schemeClr val="accent1"/>
+          </a:fillRef>
+          <a:effectRef idx="0">
+            <a:schemeClr val="accent1"/>
+          </a:effectRef>
+          <a:fontRef idx="minor">
+            <a:schemeClr val="lt1"/>
+          </a:fontRef>
+        </p:style>
+        <p:txBody>
+          <a:bodyPr vertOverflow="clip" horzOverflow="clip" rtlCol="0" anchor="t"/>
+          <a:lstStyle/>
+          <a:p>
+            <a:pPr algn="l"/>
+            <a:endParaRPr lang="es-MX"/>
+          </a:p>
+        </p:txBody>
+      </p:sp>
+      <p:sp>
+        <p:nvSpPr>
+          <p:cNvPr id="16" name="CuadroTexto 15">
+            <a:extLst>
+              <a:ext uri="{FF2B5EF4-FFF2-40B4-BE49-F238E27FC236}">
+                <a16:creationId xmlns:a16="http://schemas.microsoft.com/office/drawing/2014/main" id="{8ABEDA8D-2616-43C6-94CD-038AF4F5CD72}"/>
+              </a:ext>
+            </a:extLst>
+          </p:cNvPr>
+          <p:cNvSpPr txBox="1"/>
+          <p:nvPr/>
+        </p:nvSpPr>
+        <p:spPr>
+          <a:xfrm>
+            <a:off x="635000" y="3746500"/>
+            <a:ext cx="2540000" cy="228600"/>
+          </a:xfrm>
+          <a:prstGeom prst="rect">
+            <a:avLst/>
+          </a:prstGeom>
+          <a:noFill/>
+        </p:spPr>
+        <p:txBody>
+          <a:bodyPr vertOverflow="overflow" vert="horz" wrap="square" rtlCol="0" anchor="t">
+            <a:noAutofit/>
+          </a:bodyPr>
+          <a:lstStyle/>
+          <a:p>
+            <a:pPr algn="l"/>
+            <a:r>
+              <a:rPr lang="es-MX" sz="1100" b="1">
+                <a:solidFill>
+                  <a:srgbClr val="FFFFFF"/>
+                </a:solidFill>
+              </a:rPr>
+              <a:t>Hiperparámetros clave</a:t>
+            </a:r>
+          </a:p>
+        </p:txBody>
+      </p:sp>
+      <p:sp>
+        <p:nvSpPr>
+          <p:cNvPr id="17" name="CuadroTexto 16">
+            <a:extLst>
+              <a:ext uri="{FF2B5EF4-FFF2-40B4-BE49-F238E27FC236}">
+                <a16:creationId xmlns:a16="http://schemas.microsoft.com/office/drawing/2014/main" id="{78AFA162-0F95-4CEF-BB78-20D6385218E9}"/>
+              </a:ext>
+            </a:extLst>
+          </p:cNvPr>
+          <p:cNvSpPr txBox="1"/>
+          <p:nvPr/>
+        </p:nvSpPr>
+        <p:spPr>
+          <a:xfrm>
+            <a:off x="635000" y="4038600"/>
+            <a:ext cx="7874000" cy="457200"/>
+          </a:xfrm>
+          <a:prstGeom prst="rect">
+            <a:avLst/>
+          </a:prstGeom>
+          <a:noFill/>
+        </p:spPr>
+        <p:txBody>
+          <a:bodyPr vertOverflow="overflow" vert="horz" wrap="square" rtlCol="0" anchor="t">
+            <a:noAutofit/>
+          </a:bodyPr>
+          <a:lstStyle/>
+          <a:p>
+            <a:pPr algn="l"/>
+            <a:r>
+              <a:rPr lang="es-MX" sz="1200">
+                <a:solidFill>
+                  <a:srgbClr val="FFFFFF"/>
+                </a:solidFill>
+              </a:rPr>
+              <a:t>T₀  temperatura inicial    ·    α  factor de enfriamiento    ·    iter_por_T  iteraciones por nivel    ·    T_final  criterio de parada</a:t>
+            </a:r>
+          </a:p>
+        </p:txBody>
+      </p:sp>
+    </p:spTree>
+    <p:extLst>
+      <p:ext uri="{BB962C8B-B14F-4D97-AF65-F5344CB8AC3E}">
+        <p14:creationId xmlns:p14="http://schemas.microsoft.com/office/powerpoint/2010/main" val="2143204055"/>
+      </p:ext>
+    </p:extLst>
+  </p:cSld>
+  <p:clrMapOvr>
+    <a:masterClrMapping/>
+  </p:clrMapOvr>
+</p:sld>
+</file>
+
+<file path=ppt/slides/slide5.xml><?xml version="1.0" encoding="utf-8"?>
+<p:sld xmlns:a="http://schemas.openxmlformats.org/drawingml/2006/main" xmlns:r="http://schemas.openxmlformats.org/officeDocument/2006/relationships" xmlns:p="http://schemas.openxmlformats.org/presentationml/2006/main">
+  <p:cSld>
+    <p:spTree>
+      <p:nvGrpSpPr>
+        <p:cNvPr id="1" name=""/>
+        <p:cNvGrpSpPr/>
+        <p:nvPr/>
+      </p:nvGrpSpPr>
+      <p:grpSpPr>
+        <a:xfrm>
+          <a:off x="0" y="0"/>
+          <a:ext cx="0" cy="0"/>
+          <a:chOff x="0" y="0"/>
+          <a:chExt cx="0" cy="0"/>
+        </a:xfrm>
+      </p:grpSpPr>
+      <p:sp>
+        <p:nvSpPr>
+          <p:cNvPr id="2" name="CuadroTexto 1">
+            <a:extLst>
+              <a:ext uri="{FF2B5EF4-FFF2-40B4-BE49-F238E27FC236}">
+                <a16:creationId xmlns:a16="http://schemas.microsoft.com/office/drawing/2014/main" id="{2EADE8EB-FF43-4E42-B472-E586E379D064}"/>
+              </a:ext>
+            </a:extLst>
+          </p:cNvPr>
+          <p:cNvSpPr txBox="1"/>
+          <p:nvPr/>
+        </p:nvSpPr>
+        <p:spPr>
+          <a:xfrm>
+            <a:off x="508000" y="381000"/>
+            <a:ext cx="8128000" cy="457200"/>
+          </a:xfrm>
+          <a:prstGeom prst="rect">
+            <a:avLst/>
+          </a:prstGeom>
+          <a:noFill/>
+        </p:spPr>
+        <p:txBody>
+          <a:bodyPr vertOverflow="overflow" vert="horz" wrap="square" rtlCol="0" anchor="t">
+            <a:noAutofit/>
+          </a:bodyPr>
+          <a:lstStyle/>
+          <a:p>
+            <a:pPr algn="l"/>
+            <a:r>
+              <a:rPr lang="es-MX" sz="2800" b="1">
+                <a:solidFill>
+                  <a:srgbClr val="030920"/>
+                </a:solidFill>
+              </a:rPr>
+              <a:t>Problemas usados</a:t>
+            </a:r>
+          </a:p>
+        </p:txBody>
+      </p:sp>
+      <p:sp>
+        <p:nvSpPr>
+          <p:cNvPr id="3" name="CuadroTexto 2">
+            <a:extLst>
+              <a:ext uri="{FF2B5EF4-FFF2-40B4-BE49-F238E27FC236}">
+                <a16:creationId xmlns:a16="http://schemas.microsoft.com/office/drawing/2014/main" id="{44B41046-623E-4CF0-BAEE-D64F10DD2A7E}"/>
+              </a:ext>
+            </a:extLst>
+          </p:cNvPr>
+          <p:cNvSpPr txBox="1"/>
+          <p:nvPr/>
+        </p:nvSpPr>
+        <p:spPr>
+          <a:xfrm>
+            <a:off x="508000" y="825500"/>
+            <a:ext cx="8128000" cy="279400"/>
+          </a:xfrm>
+          <a:prstGeom prst="rect">
+            <a:avLst/>
+          </a:prstGeom>
+          <a:noFill/>
+        </p:spPr>
+        <p:txBody>
+          <a:bodyPr vertOverflow="overflow" vert="horz" wrap="square" rtlCol="0" anchor="t">
+            <a:noAutofit/>
+          </a:bodyPr>
+          <a:lstStyle/>
+          <a:p>
+            <a:pPr algn="l"/>
+            <a:r>
+              <a:rPr lang="es-MX" sz="1300" i="1">
+                <a:solidFill>
+                  <a:srgbClr val="030920"/>
+                </a:solidFill>
+              </a:rPr>
+              <a:t>Un caso continuo y uno combinatorio</a:t>
+            </a:r>
+          </a:p>
+        </p:txBody>
+      </p:sp>
+      <p:sp>
+        <p:nvSpPr>
+          <p:cNvPr id="4" name="Rectángulo 3">
+            <a:extLst>
+              <a:ext uri="{FF2B5EF4-FFF2-40B4-BE49-F238E27FC236}">
+                <a16:creationId xmlns:a16="http://schemas.microsoft.com/office/drawing/2014/main" id="{C1B0093B-6B85-4D35-92B5-9E8237CECC54}"/>
+              </a:ext>
+            </a:extLst>
+          </p:cNvPr>
+          <p:cNvSpPr/>
+          <p:nvPr/>
+        </p:nvSpPr>
+        <p:spPr>
+          <a:xfrm>
+            <a:off x="508000" y="1270000"/>
+            <a:ext cx="3937000" cy="3429000"/>
+          </a:xfrm>
+          <a:prstGeom prst="rect">
+            <a:avLst/>
+          </a:prstGeom>
+          <a:solidFill>
+            <a:srgbClr val="1A2238"/>
+          </a:solidFill>
+          <a:ln w="19050" cap="flat" cmpd="sng" algn="ctr">
+            <a:solidFill>
+              <a:srgbClr val="1F77B4"/>
+            </a:solidFill>
+            <a:prstDash val="solid"/>
+          </a:ln>
+        </p:spPr>
+        <p:style>
+          <a:lnRef idx="2">
+            <a:schemeClr val="accent1">
+              <a:shade val="15000"/>
+            </a:schemeClr>
+          </a:lnRef>
+          <a:fillRef idx="1">
+            <a:schemeClr val="accent1"/>
+          </a:fillRef>
+          <a:effectRef idx="0">
+            <a:schemeClr val="accent1"/>
+          </a:effectRef>
+          <a:fontRef idx="minor">
+            <a:schemeClr val="lt1"/>
+          </a:fontRef>
+        </p:style>
+        <p:txBody>
+          <a:bodyPr vertOverflow="clip" horzOverflow="clip" rtlCol="0" anchor="t"/>
+          <a:lstStyle/>
+          <a:p>
+            <a:pPr algn="l"/>
+            <a:endParaRPr lang="es-MX"/>
+          </a:p>
+        </p:txBody>
+      </p:sp>
+      <p:sp>
+        <p:nvSpPr>
+          <p:cNvPr id="5" name="Rectángulo 4">
+            <a:extLst>
+              <a:ext uri="{FF2B5EF4-FFF2-40B4-BE49-F238E27FC236}">
+                <a16:creationId xmlns:a16="http://schemas.microsoft.com/office/drawing/2014/main" id="{E91C4036-CD61-4401-B0D0-6C5AAF471BE4}"/>
+              </a:ext>
+            </a:extLst>
+          </p:cNvPr>
+          <p:cNvSpPr/>
+          <p:nvPr/>
+        </p:nvSpPr>
+        <p:spPr>
+          <a:xfrm>
+            <a:off x="508000" y="1270000"/>
+            <a:ext cx="3937000" cy="457200"/>
+          </a:xfrm>
+          <a:prstGeom prst="rect">
+            <a:avLst/>
+          </a:prstGeom>
+          <a:solidFill>
+            <a:srgbClr val="1F77B4"/>
+          </a:solidFill>
+          <a:ln w="25400" cap="flat" cmpd="sng" algn="ctr">
+            <a:noFill/>
+            <a:prstDash val="solid"/>
+          </a:ln>
+        </p:spPr>
+        <p:style>
+          <a:lnRef idx="2">
+            <a:schemeClr val="accent1">
+              <a:shade val="15000"/>
+            </a:schemeClr>
+          </a:lnRef>
+          <a:fillRef idx="1">
+            <a:schemeClr val="accent1"/>
+          </a:fillRef>
+          <a:effectRef idx="0">
+            <a:schemeClr val="accent1"/>
+          </a:effectRef>
+          <a:fontRef idx="minor">
+            <a:schemeClr val="lt1"/>
+          </a:fontRef>
+        </p:style>
+        <p:txBody>
+          <a:bodyPr vertOverflow="clip" horzOverflow="clip" rtlCol="0" anchor="t"/>
+          <a:lstStyle/>
+          <a:p>
+            <a:pPr algn="l"/>
+            <a:endParaRPr lang="es-MX"/>
+          </a:p>
+        </p:txBody>
+      </p:sp>
+      <p:sp>
+        <p:nvSpPr>
+          <p:cNvPr id="6" name="CuadroTexto 5">
+            <a:extLst>
+              <a:ext uri="{FF2B5EF4-FFF2-40B4-BE49-F238E27FC236}">
+                <a16:creationId xmlns:a16="http://schemas.microsoft.com/office/drawing/2014/main" id="{14FA25D9-DDAA-47D5-BD25-AAFCED0687B3}"/>
+              </a:ext>
+            </a:extLst>
+          </p:cNvPr>
+          <p:cNvSpPr txBox="1"/>
+          <p:nvPr/>
+        </p:nvSpPr>
+        <p:spPr>
+          <a:xfrm>
+            <a:off x="508000" y="1270000"/>
+            <a:ext cx="3937000" cy="457200"/>
+          </a:xfrm>
+          <a:prstGeom prst="rect">
+            <a:avLst/>
+          </a:prstGeom>
+          <a:noFill/>
+        </p:spPr>
+        <p:txBody>
+          <a:bodyPr vertOverflow="overflow" vert="horz" wrap="square" rtlCol="0" anchor="ctr" anchorCtr="0">
+            <a:noAutofit/>
+          </a:bodyPr>
+          <a:lstStyle/>
+          <a:p>
+            <a:pPr algn="l"/>
+            <a:r>
+              <a:rPr lang="es-MX" sz="1600" b="1">
+                <a:solidFill>
+                  <a:srgbClr val="FFFFFF"/>
+                </a:solidFill>
+              </a:rPr>
+              <a:t>Rastrigin · continuo</a:t>
+            </a:r>
+          </a:p>
+        </p:txBody>
+      </p:sp>
+      <p:sp>
+        <p:nvSpPr>
+          <p:cNvPr id="7" name="CuadroTexto 6">
+            <a:extLst>
+              <a:ext uri="{FF2B5EF4-FFF2-40B4-BE49-F238E27FC236}">
+                <a16:creationId xmlns:a16="http://schemas.microsoft.com/office/drawing/2014/main" id="{52FEB1A5-AB68-402B-8997-19C4DEF39C44}"/>
+              </a:ext>
+            </a:extLst>
+          </p:cNvPr>
+          <p:cNvSpPr txBox="1"/>
+          <p:nvPr/>
+        </p:nvSpPr>
+        <p:spPr>
+          <a:xfrm>
+            <a:off x="698500" y="1905000"/>
+            <a:ext cx="3556000" cy="2667000"/>
+          </a:xfrm>
+          <a:prstGeom prst="rect">
+            <a:avLst/>
+          </a:prstGeom>
+          <a:noFill/>
+        </p:spPr>
+        <p:txBody>
+          <a:bodyPr vertOverflow="overflow" vert="horz" wrap="square" rtlCol="0" anchor="t">
+            <a:noAutofit/>
+          </a:bodyPr>
+          <a:lstStyle/>
+          <a:p>
+            <a:pPr algn="l"/>
+            <a:r>
+              <a:rPr lang="es-MX" sz="1300">
+                <a:solidFill>
+                  <a:srgbClr val="FFFFFF"/>
+                </a:solidFill>
+              </a:rPr>
+              <a:t>Función con muchos mínimos locales
+distribuidos en una rejilla.
+• Mínimo global en (0, 0, ..., 0)
+• Dominio: [−5.12, 5.12]ⁿ
+• Vecino: perturbación gaussiana
+Ideal para mostrar cómo SA escapa
+de valles locales.</a:t>
+            </a:r>
+          </a:p>
+        </p:txBody>
+      </p:sp>
+      <p:sp>
+        <p:nvSpPr>
+          <p:cNvPr id="8" name="Rectángulo 7">
+            <a:extLst>
+              <a:ext uri="{FF2B5EF4-FFF2-40B4-BE49-F238E27FC236}">
+                <a16:creationId xmlns:a16="http://schemas.microsoft.com/office/drawing/2014/main" id="{8E77150B-5B1B-4D85-90EB-BF7335248A3B}"/>
+              </a:ext>
+            </a:extLst>
+          </p:cNvPr>
+          <p:cNvSpPr/>
+          <p:nvPr/>
+        </p:nvSpPr>
+        <p:spPr>
+          <a:xfrm>
+            <a:off x="4699000" y="1270000"/>
+            <a:ext cx="3937000" cy="3429000"/>
+          </a:xfrm>
+          <a:prstGeom prst="rect">
+            <a:avLst/>
+          </a:prstGeom>
+          <a:solidFill>
+            <a:srgbClr val="1A2238"/>
+          </a:solidFill>
+          <a:ln w="19050" cap="flat" cmpd="sng" algn="ctr">
+            <a:solidFill>
+              <a:srgbClr val="9DB2BF"/>
+            </a:solidFill>
+            <a:prstDash val="solid"/>
+          </a:ln>
+        </p:spPr>
+        <p:style>
+          <a:lnRef idx="2">
+            <a:schemeClr val="accent1">
+              <a:shade val="15000"/>
+            </a:schemeClr>
+          </a:lnRef>
+          <a:fillRef idx="1">
+            <a:schemeClr val="accent1"/>
+          </a:fillRef>
+          <a:effectRef idx="0">
+            <a:schemeClr val="accent1"/>
+          </a:effectRef>
+          <a:fontRef idx="minor">
+            <a:schemeClr val="lt1"/>
+          </a:fontRef>
+        </p:style>
+        <p:txBody>
+          <a:bodyPr vertOverflow="clip" horzOverflow="clip" rtlCol="0" anchor="t"/>
+          <a:lstStyle/>
+          <a:p>
+            <a:pPr algn="l"/>
+            <a:endParaRPr lang="es-MX"/>
+          </a:p>
+        </p:txBody>
+      </p:sp>
+      <p:sp>
+        <p:nvSpPr>
+          <p:cNvPr id="9" name="Rectángulo 8">
+            <a:extLst>
+              <a:ext uri="{FF2B5EF4-FFF2-40B4-BE49-F238E27FC236}">
+                <a16:creationId xmlns:a16="http://schemas.microsoft.com/office/drawing/2014/main" id="{1C0FB7F5-F429-474D-9711-DD8167A6FE8E}"/>
+              </a:ext>
+            </a:extLst>
+          </p:cNvPr>
+          <p:cNvSpPr/>
+          <p:nvPr/>
+        </p:nvSpPr>
+        <p:spPr>
+          <a:xfrm>
+            <a:off x="4699000" y="1270000"/>
+            <a:ext cx="3937000" cy="457200"/>
+          </a:xfrm>
+          <a:prstGeom prst="rect">
+            <a:avLst/>
+          </a:prstGeom>
+          <a:solidFill>
+            <a:srgbClr val="526D82"/>
+          </a:solidFill>
+          <a:ln w="25400" cap="flat" cmpd="sng" algn="ctr">
+            <a:noFill/>
+            <a:prstDash val="solid"/>
+          </a:ln>
+        </p:spPr>
+        <p:style>
+          <a:lnRef idx="2">
+            <a:schemeClr val="accent1">
+              <a:shade val="15000"/>
+            </a:schemeClr>
+          </a:lnRef>
+          <a:fillRef idx="1">
+            <a:schemeClr val="accent1"/>
+          </a:fillRef>
+          <a:effectRef idx="0">
+            <a:schemeClr val="accent1"/>
+          </a:effectRef>
+          <a:fontRef idx="minor">
+            <a:schemeClr val="lt1"/>
+          </a:fontRef>
+        </p:style>
+        <p:txBody>
+          <a:bodyPr vertOverflow="clip" horzOverflow="clip" rtlCol="0" anchor="t"/>
+          <a:lstStyle/>
+          <a:p>
+            <a:pPr algn="l"/>
+            <a:endParaRPr lang="es-MX"/>
+          </a:p>
+        </p:txBody>
+      </p:sp>
+      <p:sp>
+        <p:nvSpPr>
+          <p:cNvPr id="10" name="CuadroTexto 9">
+            <a:extLst>
+              <a:ext uri="{FF2B5EF4-FFF2-40B4-BE49-F238E27FC236}">
+                <a16:creationId xmlns:a16="http://schemas.microsoft.com/office/drawing/2014/main" id="{AE3F8C5F-741E-403D-9D16-4EC7CD8A482A}"/>
+              </a:ext>
+            </a:extLst>
+          </p:cNvPr>
+          <p:cNvSpPr txBox="1"/>
+          <p:nvPr/>
+        </p:nvSpPr>
+        <p:spPr>
+          <a:xfrm>
+            <a:off x="4699000" y="1270000"/>
+            <a:ext cx="3937000" cy="457200"/>
+          </a:xfrm>
+          <a:prstGeom prst="rect">
+            <a:avLst/>
+          </a:prstGeom>
+          <a:noFill/>
+        </p:spPr>
+        <p:txBody>
+          <a:bodyPr vertOverflow="overflow" vert="horz" wrap="square" rtlCol="0" anchor="ctr" anchorCtr="0">
+            <a:noAutofit/>
+          </a:bodyPr>
+          <a:lstStyle/>
+          <a:p>
+            <a:pPr algn="l"/>
+            <a:r>
+              <a:rPr lang="es-MX" sz="1600" b="1">
+                <a:solidFill>
+                  <a:srgbClr val="FFFFFF"/>
+                </a:solidFill>
+              </a:rPr>
+              <a:t>TSP · combinatorio</a:t>
+            </a:r>
+          </a:p>
+        </p:txBody>
+      </p:sp>
+      <p:sp>
+        <p:nvSpPr>
+          <p:cNvPr id="11" name="CuadroTexto 10">
+            <a:extLst>
+              <a:ext uri="{FF2B5EF4-FFF2-40B4-BE49-F238E27FC236}">
+                <a16:creationId xmlns:a16="http://schemas.microsoft.com/office/drawing/2014/main" id="{067F2FDE-168C-4FD0-9DC8-E0FDCB9CA0D3}"/>
+              </a:ext>
+            </a:extLst>
+          </p:cNvPr>
+          <p:cNvSpPr txBox="1"/>
+          <p:nvPr/>
+        </p:nvSpPr>
+        <p:spPr>
+          <a:xfrm>
+            <a:off x="4889500" y="1905000"/>
+            <a:ext cx="3556000" cy="2667000"/>
+          </a:xfrm>
+          <a:prstGeom prst="rect">
+            <a:avLst/>
+          </a:prstGeom>
+          <a:noFill/>
+        </p:spPr>
+        <p:txBody>
+          <a:bodyPr vertOverflow="overflow" vert="horz" wrap="square" rtlCol="0" anchor="t">
+            <a:noAutofit/>
+          </a:bodyPr>
+          <a:lstStyle/>
+          <a:p>
+            <a:pPr algn="l"/>
+            <a:r>
+              <a:rPr lang="es-MX" sz="1300">
+                <a:solidFill>
+                  <a:srgbClr val="FFFFFF"/>
+                </a:solidFill>
+              </a:rPr>
+              <a:t>Encontrar la ruta más corta que
+visita todas las ciudades una vez.
+• Espacio de soluciones: n!/2
+• Operador 2-opt: invertir un
+  segmento de la ruta
+• NP-difícil
+Clásico para algoritmos
+metaheurísticos.</a:t>
+            </a:r>
+          </a:p>
+        </p:txBody>
+      </p:sp>
+    </p:spTree>
+    <p:extLst>
+      <p:ext uri="{BB962C8B-B14F-4D97-AF65-F5344CB8AC3E}">
+        <p14:creationId xmlns:p14="http://schemas.microsoft.com/office/powerpoint/2010/main" val="582417981"/>
+      </p:ext>
+    </p:extLst>
+  </p:cSld>
+  <p:clrMapOvr>
+    <a:masterClrMapping/>
+  </p:clrMapOvr>
+</p:sld>
+</file>
+
+<file path=ppt/slides/slide6.xml><?xml version="1.0" encoding="utf-8"?>
+<p:sld xmlns:a="http://schemas.openxmlformats.org/drawingml/2006/main" xmlns:r="http://schemas.openxmlformats.org/officeDocument/2006/relationships" xmlns:p="http://schemas.openxmlformats.org/presentationml/2006/main">
+  <p:cSld>
+    <p:spTree>
+      <p:nvGrpSpPr>
+        <p:cNvPr id="1" name=""/>
+        <p:cNvGrpSpPr/>
+        <p:nvPr/>
+      </p:nvGrpSpPr>
+      <p:grpSpPr>
+        <a:xfrm>
+          <a:off x="0" y="0"/>
+          <a:ext cx="0" cy="0"/>
+          <a:chOff x="0" y="0"/>
+          <a:chExt cx="0" cy="0"/>
+        </a:xfrm>
+      </p:grpSpPr>
+      <p:sp>
+        <p:nvSpPr>
+          <p:cNvPr id="2" name="CuadroTexto 1">
+            <a:extLst>
+              <a:ext uri="{FF2B5EF4-FFF2-40B4-BE49-F238E27FC236}">
+                <a16:creationId xmlns:a16="http://schemas.microsoft.com/office/drawing/2014/main" id="{92E97F6B-67B4-4D2B-89D4-5885EC367EE1}"/>
+              </a:ext>
+            </a:extLst>
+          </p:cNvPr>
+          <p:cNvSpPr txBox="1"/>
+          <p:nvPr/>
+        </p:nvSpPr>
+        <p:spPr>
+          <a:xfrm>
+            <a:off x="508000" y="317500"/>
+            <a:ext cx="8128000" cy="406400"/>
+          </a:xfrm>
+          <a:prstGeom prst="rect">
+            <a:avLst/>
+          </a:prstGeom>
+          <a:noFill/>
+        </p:spPr>
+        <p:txBody>
+          <a:bodyPr vertOverflow="overflow" vert="horz" wrap="square" rtlCol="0" anchor="t">
+            <a:noAutofit/>
+          </a:bodyPr>
+          <a:lstStyle/>
+          <a:p>
+            <a:pPr algn="l"/>
+            <a:r>
+              <a:rPr lang="es-MX" sz="2400" b="1">
+                <a:solidFill>
+                  <a:srgbClr val="030920"/>
+                </a:solidFill>
+              </a:rPr>
+              <a:t>Visualización · Rastrigin</a:t>
+            </a:r>
+          </a:p>
+        </p:txBody>
+      </p:sp>
+      <p:sp>
+        <p:nvSpPr>
+          <p:cNvPr id="3" name="Rectángulo 2">
+            <a:extLst>
+              <a:ext uri="{FF2B5EF4-FFF2-40B4-BE49-F238E27FC236}">
+                <a16:creationId xmlns:a16="http://schemas.microsoft.com/office/drawing/2014/main" id="{50B0D8FA-B50E-4319-A4BB-223DB8B83FAE}"/>
+              </a:ext>
+            </a:extLst>
+          </p:cNvPr>
+          <p:cNvSpPr/>
+          <p:nvPr/>
+        </p:nvSpPr>
+        <p:spPr>
+          <a:xfrm>
+            <a:off x="508000" y="4508500"/>
+            <a:ext cx="8128000" cy="406400"/>
+          </a:xfrm>
+          <a:prstGeom prst="rect">
+            <a:avLst/>
+          </a:prstGeom>
+          <a:solidFill>
+            <a:srgbClr val="2A3250"/>
+          </a:solidFill>
+          <a:ln w="25400" cap="flat" cmpd="sng" algn="ctr">
+            <a:noFill/>
+            <a:prstDash val="solid"/>
+          </a:ln>
+        </p:spPr>
+        <p:style>
+          <a:lnRef idx="2">
+            <a:schemeClr val="accent1">
+              <a:shade val="15000"/>
+            </a:schemeClr>
+          </a:lnRef>
+          <a:fillRef idx="1">
+            <a:schemeClr val="accent1"/>
+          </a:fillRef>
+          <a:effectRef idx="0">
+            <a:schemeClr val="accent1"/>
+          </a:effectRef>
+          <a:fontRef idx="minor">
+            <a:schemeClr val="lt1"/>
+          </a:fontRef>
+        </p:style>
+        <p:txBody>
+          <a:bodyPr vertOverflow="clip" horzOverflow="clip" rtlCol="0" anchor="ctr" anchorCtr="0">
+            <a:noAutofit/>
+          </a:bodyPr>
+          <a:lstStyle/>
+          <a:p>
+            <a:pPr algn="l"/>
+            <a:r>
+              <a:rPr lang="es-MX" sz="1300" i="1">
+                <a:solidFill>
+                  <a:srgbClr val="FFFFFF"/>
+                </a:solidFill>
+              </a:rPr>
+              <a:t>HC se queda en el primer valle  ·  SA salta entre valles y converge mejor</a:t>
+            </a:r>
+          </a:p>
+        </p:txBody>
+      </p:sp>
+      <p:sp>
+        <p:nvSpPr>
+          <p:cNvPr id="4" name="Rectángulo 3">
+            <a:extLst>
+              <a:ext uri="{FF2B5EF4-FFF2-40B4-BE49-F238E27FC236}">
+                <a16:creationId xmlns:a16="http://schemas.microsoft.com/office/drawing/2014/main" id="{46BA7990-2A8E-4C6A-9A4A-071920A7CC6D}"/>
+              </a:ext>
+            </a:extLst>
+          </p:cNvPr>
+          <p:cNvSpPr/>
+          <p:nvPr/>
+        </p:nvSpPr>
+        <p:spPr>
+          <a:xfrm>
+            <a:off x="508000" y="825500"/>
+            <a:ext cx="3937000" cy="279400"/>
+          </a:xfrm>
+          <a:prstGeom prst="rect">
+            <a:avLst/>
+          </a:prstGeom>
+          <a:solidFill>
+            <a:srgbClr val="D62728"/>
+          </a:solidFill>
+          <a:ln w="25400" cap="flat" cmpd="sng" algn="ctr">
+            <a:noFill/>
+            <a:prstDash val="solid"/>
+          </a:ln>
+        </p:spPr>
+        <p:style>
+          <a:lnRef idx="2">
+            <a:schemeClr val="accent1">
+              <a:shade val="15000"/>
+            </a:schemeClr>
+          </a:lnRef>
+          <a:fillRef idx="1">
+            <a:schemeClr val="accent1"/>
+          </a:fillRef>
+          <a:effectRef idx="0">
+            <a:schemeClr val="accent1"/>
+          </a:effectRef>
+          <a:fontRef idx="minor">
+            <a:schemeClr val="lt1"/>
+          </a:fontRef>
+        </p:style>
+        <p:txBody>
+          <a:bodyPr vertOverflow="clip" horzOverflow="clip" rtlCol="0" anchor="ctr" anchorCtr="0">
+            <a:noAutofit/>
+          </a:bodyPr>
+          <a:lstStyle/>
+          <a:p>
+            <a:pPr algn="l"/>
+            <a:r>
+              <a:rPr lang="es-MX" sz="1200" b="1">
+                <a:solidFill>
+                  <a:srgbClr val="FFFFFF"/>
+                </a:solidFill>
+              </a:rPr>
+              <a:t>Hill Climbing</a:t>
+            </a:r>
+          </a:p>
+        </p:txBody>
+      </p:sp>
+      <p:sp>
+        <p:nvSpPr>
+          <p:cNvPr id="5" name="Rectángulo 4">
+            <a:extLst>
+              <a:ext uri="{FF2B5EF4-FFF2-40B4-BE49-F238E27FC236}">
+                <a16:creationId xmlns:a16="http://schemas.microsoft.com/office/drawing/2014/main" id="{C971D16D-2132-4EB0-A6CE-F6292EB663CD}"/>
+              </a:ext>
+            </a:extLst>
+          </p:cNvPr>
+          <p:cNvSpPr/>
+          <p:nvPr/>
+        </p:nvSpPr>
+        <p:spPr>
+          <a:xfrm>
+            <a:off x="4699000" y="825500"/>
+            <a:ext cx="3937000" cy="279400"/>
+          </a:xfrm>
+          <a:prstGeom prst="rect">
+            <a:avLst/>
+          </a:prstGeom>
+          <a:solidFill>
+            <a:srgbClr val="1F77B4"/>
+          </a:solidFill>
+          <a:ln w="25400" cap="flat" cmpd="sng" algn="ctr">
+            <a:noFill/>
+            <a:prstDash val="solid"/>
+          </a:ln>
+        </p:spPr>
+        <p:style>
+          <a:lnRef idx="2">
+            <a:schemeClr val="accent1">
+              <a:shade val="15000"/>
+            </a:schemeClr>
+          </a:lnRef>
+          <a:fillRef idx="1">
+            <a:schemeClr val="accent1"/>
+          </a:fillRef>
+          <a:effectRef idx="0">
+            <a:schemeClr val="accent1"/>
+          </a:effectRef>
+          <a:fontRef idx="minor">
+            <a:schemeClr val="lt1"/>
+          </a:fontRef>
+        </p:style>
+        <p:txBody>
+          <a:bodyPr vertOverflow="clip" horzOverflow="clip" rtlCol="0" anchor="ctr" anchorCtr="0">
+            <a:noAutofit/>
+          </a:bodyPr>
+          <a:lstStyle/>
+          <a:p>
+            <a:pPr algn="l"/>
+            <a:r>
+              <a:rPr lang="es-MX" sz="1200" b="1">
+                <a:solidFill>
+                  <a:srgbClr val="FFFFFF"/>
+                </a:solidFill>
+              </a:rPr>
+              <a:t>Simulated Annealing</a:t>
+            </a:r>
+          </a:p>
+        </p:txBody>
+      </p:sp>
+      <p:pic>
+        <p:nvPicPr>
+          <p:cNvPr id="6" name="Imagen 5">
+            <a:extLst>
+              <a:ext uri="{FF2B5EF4-FFF2-40B4-BE49-F238E27FC236}">
+                <a16:creationId xmlns:a16="http://schemas.microsoft.com/office/drawing/2014/main" id="{75AE6DBC-E382-E219-05C8-03C263AA936E}"/>
+              </a:ext>
+            </a:extLst>
+          </p:cNvPr>
+          <p:cNvPicPr>
+            <a:picLocks noChangeAspect="1"/>
+          </p:cNvPicPr>
+          <p:nvPr/>
+        </p:nvPicPr>
+        <p:blipFill>
+          <a:blip r:embed="rId2"/>
+          <a:stretch>
+            <a:fillRect/>
+          </a:stretch>
+        </p:blipFill>
+        <p:spPr>
+          <a:xfrm>
+            <a:off x="723900" y="1168400"/>
+            <a:ext cx="7683500" cy="3302000"/>
+          </a:xfrm>
+          <a:prstGeom prst="rect">
+            <a:avLst/>
+          </a:prstGeom>
+        </p:spPr>
+      </p:pic>
+    </p:spTree>
+    <p:extLst>
+      <p:ext uri="{BB962C8B-B14F-4D97-AF65-F5344CB8AC3E}">
+        <p14:creationId xmlns:p14="http://schemas.microsoft.com/office/powerpoint/2010/main" val="2348311992"/>
+      </p:ext>
+    </p:extLst>
+  </p:cSld>
+  <p:clrMapOvr>
+    <a:masterClrMapping/>
+  </p:clrMapOvr>
+</p:sld>
+</file>
+
+<file path=ppt/slides/slide7.xml><?xml version="1.0" encoding="utf-8"?>
+<p:sld xmlns:a="http://schemas.openxmlformats.org/drawingml/2006/main" xmlns:r="http://schemas.openxmlformats.org/officeDocument/2006/relationships" xmlns:p="http://schemas.openxmlformats.org/presentationml/2006/main">
+  <p:cSld>
+    <p:spTree>
+      <p:nvGrpSpPr>
+        <p:cNvPr id="1" name=""/>
+        <p:cNvGrpSpPr/>
+        <p:nvPr/>
+      </p:nvGrpSpPr>
+      <p:grpSpPr>
+        <a:xfrm>
+          <a:off x="0" y="0"/>
+          <a:ext cx="0" cy="0"/>
+          <a:chOff x="0" y="0"/>
+          <a:chExt cx="0" cy="0"/>
+        </a:xfrm>
+      </p:grpSpPr>
+      <p:sp>
+        <p:nvSpPr>
+          <p:cNvPr id="2" name="CuadroTexto 1">
+            <a:extLst>
+              <a:ext uri="{FF2B5EF4-FFF2-40B4-BE49-F238E27FC236}">
+                <a16:creationId xmlns:a16="http://schemas.microsoft.com/office/drawing/2014/main" id="{4149B518-1D78-464A-AB46-BC0D4C77C121}"/>
+              </a:ext>
+            </a:extLst>
+          </p:cNvPr>
+          <p:cNvSpPr txBox="1"/>
+          <p:nvPr/>
+        </p:nvSpPr>
+        <p:spPr>
+          <a:xfrm>
+            <a:off x="508000" y="317500"/>
+            <a:ext cx="8128000" cy="406400"/>
+          </a:xfrm>
+          <a:prstGeom prst="rect">
+            <a:avLst/>
+          </a:prstGeom>
+          <a:noFill/>
+        </p:spPr>
+        <p:txBody>
+          <a:bodyPr vertOverflow="overflow" vert="horz" wrap="square" rtlCol="0" anchor="t">
+            <a:noAutofit/>
+          </a:bodyPr>
+          <a:lstStyle/>
+          <a:p>
+            <a:pPr algn="l"/>
+            <a:r>
+              <a:rPr lang="es-MX" sz="2400" b="1">
+                <a:solidFill>
+                  <a:srgbClr val="030920"/>
+                </a:solidFill>
+              </a:rPr>
+              <a:t>Visualización · TSP</a:t>
+            </a:r>
+          </a:p>
+        </p:txBody>
+      </p:sp>
+      <p:sp>
+        <p:nvSpPr>
+          <p:cNvPr id="3" name="Rectángulo 2">
+            <a:extLst>
+              <a:ext uri="{FF2B5EF4-FFF2-40B4-BE49-F238E27FC236}">
+                <a16:creationId xmlns:a16="http://schemas.microsoft.com/office/drawing/2014/main" id="{6DABB8BD-13FF-4163-B230-9B6E03FD9C7C}"/>
+              </a:ext>
+            </a:extLst>
+          </p:cNvPr>
+          <p:cNvSpPr/>
+          <p:nvPr/>
+        </p:nvSpPr>
+        <p:spPr>
+          <a:xfrm>
+            <a:off x="508000" y="825500"/>
+            <a:ext cx="3937000" cy="279400"/>
+          </a:xfrm>
+          <a:prstGeom prst="rect">
+            <a:avLst/>
+          </a:prstGeom>
+          <a:solidFill>
+            <a:srgbClr val="D62728"/>
+          </a:solidFill>
+          <a:ln w="25400" cap="flat" cmpd="sng" algn="ctr">
+            <a:noFill/>
+            <a:prstDash val="solid"/>
+          </a:ln>
+        </p:spPr>
+        <p:style>
+          <a:lnRef idx="2">
+            <a:schemeClr val="accent1">
+              <a:shade val="15000"/>
+            </a:schemeClr>
+          </a:lnRef>
+          <a:fillRef idx="1">
+            <a:schemeClr val="accent1"/>
+          </a:fillRef>
+          <a:effectRef idx="0">
+            <a:schemeClr val="accent1"/>
+          </a:effectRef>
+          <a:fontRef idx="minor">
+            <a:schemeClr val="lt1"/>
+          </a:fontRef>
+        </p:style>
+        <p:txBody>
+          <a:bodyPr vertOverflow="clip" horzOverflow="clip" rtlCol="0" anchor="ctr" anchorCtr="0">
+            <a:noAutofit/>
+          </a:bodyPr>
+          <a:lstStyle/>
+          <a:p>
+            <a:pPr algn="l"/>
+            <a:r>
+              <a:rPr lang="es-MX" sz="1200" b="1">
+                <a:solidFill>
+                  <a:srgbClr val="FFFFFF"/>
+                </a:solidFill>
+              </a:rPr>
+              <a:t>Hill Climbing</a:t>
+            </a:r>
+          </a:p>
+        </p:txBody>
+      </p:sp>
+      <p:sp>
+        <p:nvSpPr>
+          <p:cNvPr id="4" name="Rectángulo 3">
+            <a:extLst>
+              <a:ext uri="{FF2B5EF4-FFF2-40B4-BE49-F238E27FC236}">
+                <a16:creationId xmlns:a16="http://schemas.microsoft.com/office/drawing/2014/main" id="{33002ECF-5325-403C-B919-F11A0F9DFC8C}"/>
+              </a:ext>
+            </a:extLst>
+          </p:cNvPr>
+          <p:cNvSpPr/>
+          <p:nvPr/>
+        </p:nvSpPr>
+        <p:spPr>
+          <a:xfrm>
+            <a:off x="4699000" y="825500"/>
+            <a:ext cx="3937000" cy="279400"/>
+          </a:xfrm>
+          <a:prstGeom prst="rect">
+            <a:avLst/>
+          </a:prstGeom>
+          <a:solidFill>
+            <a:srgbClr val="1F77B4"/>
+          </a:solidFill>
+          <a:ln w="25400" cap="flat" cmpd="sng" algn="ctr">
+            <a:noFill/>
+            <a:prstDash val="solid"/>
+          </a:ln>
+        </p:spPr>
+        <p:style>
+          <a:lnRef idx="2">
+            <a:schemeClr val="accent1">
+              <a:shade val="15000"/>
+            </a:schemeClr>
+          </a:lnRef>
+          <a:fillRef idx="1">
+            <a:schemeClr val="accent1"/>
+          </a:fillRef>
+          <a:effectRef idx="0">
+            <a:schemeClr val="accent1"/>
+          </a:effectRef>
+          <a:fontRef idx="minor">
+            <a:schemeClr val="lt1"/>
+          </a:fontRef>
+        </p:style>
+        <p:txBody>
+          <a:bodyPr vertOverflow="clip" horzOverflow="clip" rtlCol="0" anchor="ctr" anchorCtr="0">
+            <a:noAutofit/>
+          </a:bodyPr>
+          <a:lstStyle/>
+          <a:p>
+            <a:pPr algn="l"/>
+            <a:r>
+              <a:rPr lang="es-MX" sz="1200" b="1">
+                <a:solidFill>
+                  <a:srgbClr val="FFFFFF"/>
+                </a:solidFill>
+              </a:rPr>
+              <a:t>Simulated Annealing</a:t>
+            </a:r>
+          </a:p>
+        </p:txBody>
+      </p:sp>
+      <p:sp>
+        <p:nvSpPr>
+          <p:cNvPr id="5" name="Rectángulo 4">
+            <a:extLst>
+              <a:ext uri="{FF2B5EF4-FFF2-40B4-BE49-F238E27FC236}">
+                <a16:creationId xmlns:a16="http://schemas.microsoft.com/office/drawing/2014/main" id="{DC7642A0-5FED-44CA-BA56-446D5896CE84}"/>
+              </a:ext>
+            </a:extLst>
+          </p:cNvPr>
+          <p:cNvSpPr/>
+          <p:nvPr/>
+        </p:nvSpPr>
+        <p:spPr>
+          <a:xfrm>
+            <a:off x="508000" y="4508500"/>
+            <a:ext cx="8128000" cy="406400"/>
+          </a:xfrm>
+          <a:prstGeom prst="rect">
+            <a:avLst/>
+          </a:prstGeom>
+          <a:solidFill>
+            <a:srgbClr val="2A3250"/>
+          </a:solidFill>
+          <a:ln w="25400" cap="flat" cmpd="sng" algn="ctr">
+            <a:noFill/>
+            <a:prstDash val="solid"/>
+          </a:ln>
+        </p:spPr>
+        <p:style>
+          <a:lnRef idx="2">
+            <a:schemeClr val="accent1">
+              <a:shade val="15000"/>
+            </a:schemeClr>
+          </a:lnRef>
+          <a:fillRef idx="1">
+            <a:schemeClr val="accent1"/>
+          </a:fillRef>
+          <a:effectRef idx="0">
+            <a:schemeClr val="accent1"/>
+          </a:effectRef>
+          <a:fontRef idx="minor">
+            <a:schemeClr val="lt1"/>
+          </a:fontRef>
+        </p:style>
+        <p:txBody>
+          <a:bodyPr vertOverflow="clip" horzOverflow="clip" rtlCol="0" anchor="ctr" anchorCtr="0">
+            <a:noAutofit/>
+          </a:bodyPr>
+          <a:lstStyle/>
+          <a:p>
+            <a:pPr algn="l"/>
+            <a:r>
+              <a:rPr lang="es-MX" sz="1300" i="1">
+                <a:solidFill>
+                  <a:srgbClr val="FFFFFF"/>
+                </a:solidFill>
+              </a:rPr>
+              <a:t>Ambos mejoran la ruta, pero SA encuentra rutas más cortas — especialmente con n grande</a:t>
+            </a:r>
+          </a:p>
+        </p:txBody>
+      </p:sp>
+      <p:pic>
+        <p:nvPicPr>
+          <p:cNvPr id="6" name="Imagen 5">
+            <a:extLst>
+              <a:ext uri="{FF2B5EF4-FFF2-40B4-BE49-F238E27FC236}">
+                <a16:creationId xmlns:a16="http://schemas.microsoft.com/office/drawing/2014/main" id="{7B258F03-9804-1DD0-ACE5-7A3A7D4B9DD4}"/>
+              </a:ext>
+            </a:extLst>
+          </p:cNvPr>
+          <p:cNvPicPr>
+            <a:picLocks noChangeAspect="1"/>
+          </p:cNvPicPr>
+          <p:nvPr/>
+        </p:nvPicPr>
+        <p:blipFill>
+          <a:blip r:embed="rId2"/>
+          <a:stretch>
+            <a:fillRect/>
+          </a:stretch>
+        </p:blipFill>
+        <p:spPr>
+          <a:xfrm>
+            <a:off x="723900" y="1168400"/>
+            <a:ext cx="7683500" cy="3302000"/>
+          </a:xfrm>
+          <a:prstGeom prst="rect">
+            <a:avLst/>
+          </a:prstGeom>
+        </p:spPr>
+      </p:pic>
+    </p:spTree>
+    <p:extLst>
+      <p:ext uri="{BB962C8B-B14F-4D97-AF65-F5344CB8AC3E}">
+        <p14:creationId xmlns:p14="http://schemas.microsoft.com/office/powerpoint/2010/main" val="181236962"/>
+      </p:ext>
+    </p:extLst>
+  </p:cSld>
+  <p:clrMapOvr>
+    <a:masterClrMapping/>
+  </p:clrMapOvr>
+</p:sld>
+</file>
+
+<file path=ppt/slides/slide8.xml><?xml version="1.0" encoding="utf-8"?>
+<p:sld xmlns:a="http://schemas.openxmlformats.org/drawingml/2006/main" xmlns:r="http://schemas.openxmlformats.org/officeDocument/2006/relationships" xmlns:p="http://schemas.openxmlformats.org/presentationml/2006/main">
+  <p:cSld>
+    <p:spTree>
+      <p:nvGrpSpPr>
+        <p:cNvPr id="1" name=""/>
+        <p:cNvGrpSpPr/>
+        <p:nvPr/>
+      </p:nvGrpSpPr>
+      <p:grpSpPr>
+        <a:xfrm>
+          <a:off x="0" y="0"/>
+          <a:ext cx="0" cy="0"/>
+          <a:chOff x="0" y="0"/>
+          <a:chExt cx="0" cy="0"/>
+        </a:xfrm>
+      </p:grpSpPr>
+      <p:sp>
+        <p:nvSpPr>
+          <p:cNvPr id="2" name="CuadroTexto 1">
+            <a:extLst>
+              <a:ext uri="{FF2B5EF4-FFF2-40B4-BE49-F238E27FC236}">
+                <a16:creationId xmlns:a16="http://schemas.microsoft.com/office/drawing/2014/main" id="{FF653903-2EF0-4801-A5F8-70BD04F6F9CF}"/>
+              </a:ext>
+            </a:extLst>
+          </p:cNvPr>
+          <p:cNvSpPr txBox="1"/>
+          <p:nvPr/>
+        </p:nvSpPr>
+        <p:spPr>
+          <a:xfrm>
+            <a:off x="508000" y="279400"/>
+            <a:ext cx="8128000" cy="381000"/>
+          </a:xfrm>
+          <a:prstGeom prst="rect">
+            <a:avLst/>
+          </a:prstGeom>
+          <a:noFill/>
+        </p:spPr>
+        <p:txBody>
+          <a:bodyPr vertOverflow="overflow" vert="horz" wrap="square" rtlCol="0" anchor="t">
+            <a:noAutofit/>
+          </a:bodyPr>
+          <a:lstStyle/>
+          <a:p>
+            <a:pPr algn="l"/>
+            <a:r>
+              <a:rPr lang="es-MX" sz="2200" b="1">
+                <a:solidFill>
+                  <a:srgbClr val="030920"/>
+                </a:solidFill>
+              </a:rPr>
+              <a:t>Comparativa cuantitativa</a:t>
+            </a:r>
+          </a:p>
+        </p:txBody>
+      </p:sp>
+      <p:sp>
+        <p:nvSpPr>
+          <p:cNvPr id="3" name="Rectángulo 2">
+            <a:extLst>
+              <a:ext uri="{FF2B5EF4-FFF2-40B4-BE49-F238E27FC236}">
+                <a16:creationId xmlns:a16="http://schemas.microsoft.com/office/drawing/2014/main" id="{08666A47-FD62-4CAD-8AA7-858DB4CD51C4}"/>
+              </a:ext>
+            </a:extLst>
+          </p:cNvPr>
+          <p:cNvSpPr/>
+          <p:nvPr/>
+        </p:nvSpPr>
+        <p:spPr>
+          <a:xfrm>
+            <a:off x="508000" y="3746500"/>
+            <a:ext cx="8128000" cy="1206500"/>
+          </a:xfrm>
+          <a:prstGeom prst="rect">
+            <a:avLst/>
+          </a:prstGeom>
+          <a:solidFill>
+            <a:srgbClr val="1A2238"/>
+          </a:solidFill>
+          <a:ln w="25400" cap="flat" cmpd="sng" algn="ctr">
+            <a:noFill/>
+            <a:prstDash val="solid"/>
+          </a:ln>
+        </p:spPr>
+        <p:style>
+          <a:lnRef idx="2">
+            <a:schemeClr val="accent1">
+              <a:shade val="15000"/>
+            </a:schemeClr>
+          </a:lnRef>
+          <a:fillRef idx="1">
+            <a:schemeClr val="accent1"/>
+          </a:fillRef>
+          <a:effectRef idx="0">
+            <a:schemeClr val="accent1"/>
+          </a:effectRef>
+          <a:fontRef idx="minor">
+            <a:schemeClr val="lt1"/>
+          </a:fontRef>
+        </p:style>
+        <p:txBody>
+          <a:bodyPr vertOverflow="clip" horzOverflow="clip" rtlCol="0" anchor="t"/>
+          <a:lstStyle/>
+          <a:p>
+            <a:pPr algn="l"/>
+            <a:endParaRPr lang="es-MX"/>
+          </a:p>
+        </p:txBody>
+      </p:sp>
+      <p:sp>
+        <p:nvSpPr>
+          <p:cNvPr id="4" name="CuadroTexto 3">
+            <a:extLst>
+              <a:ext uri="{FF2B5EF4-FFF2-40B4-BE49-F238E27FC236}">
+                <a16:creationId xmlns:a16="http://schemas.microsoft.com/office/drawing/2014/main" id="{90508A10-5498-4ABB-BE6E-D165CF9502FA}"/>
+              </a:ext>
+            </a:extLst>
+          </p:cNvPr>
+          <p:cNvSpPr txBox="1"/>
+          <p:nvPr/>
+        </p:nvSpPr>
+        <p:spPr>
+          <a:xfrm>
+            <a:off x="635000" y="3835400"/>
+            <a:ext cx="7874000" cy="279400"/>
+          </a:xfrm>
+          <a:prstGeom prst="rect">
+            <a:avLst/>
+          </a:prstGeom>
+          <a:noFill/>
+        </p:spPr>
+        <p:txBody>
+          <a:bodyPr vertOverflow="overflow" vert="horz" wrap="square" rtlCol="0" anchor="t">
+            <a:noAutofit/>
+          </a:bodyPr>
+          <a:lstStyle/>
+          <a:p>
+            <a:pPr algn="l"/>
+            <a:r>
+              <a:rPr lang="es-MX" sz="1200" b="1">
+                <a:solidFill>
+                  <a:srgbClr val="1F77B4"/>
+                </a:solidFill>
+              </a:rPr>
+              <a:t>● TSP n=80: SA ≈ 794 vs HC ≈ 1056  (~25% mejor)</a:t>
+            </a:r>
+          </a:p>
+        </p:txBody>
+      </p:sp>
+      <p:sp>
+        <p:nvSpPr>
+          <p:cNvPr id="5" name="CuadroTexto 4">
+            <a:extLst>
+              <a:ext uri="{FF2B5EF4-FFF2-40B4-BE49-F238E27FC236}">
+                <a16:creationId xmlns:a16="http://schemas.microsoft.com/office/drawing/2014/main" id="{EC12C3B0-221B-445A-B401-644629DA8ED9}"/>
+              </a:ext>
+            </a:extLst>
+          </p:cNvPr>
+          <p:cNvSpPr txBox="1"/>
+          <p:nvPr/>
+        </p:nvSpPr>
+        <p:spPr>
+          <a:xfrm>
+            <a:off x="635000" y="4140200"/>
+            <a:ext cx="7874000" cy="279400"/>
+          </a:xfrm>
+          <a:prstGeom prst="rect">
+            <a:avLst/>
+          </a:prstGeom>
+          <a:noFill/>
+        </p:spPr>
+        <p:txBody>
+          <a:bodyPr vertOverflow="overflow" vert="horz" wrap="square" rtlCol="0" anchor="t">
+            <a:noAutofit/>
+          </a:bodyPr>
+          <a:lstStyle/>
+          <a:p>
+            <a:pPr algn="l"/>
+            <a:r>
+              <a:rPr lang="es-MX" sz="1200" b="1">
+                <a:solidFill>
+                  <a:srgbClr val="D62728"/>
+                </a:solidFill>
+              </a:rPr>
+              <a:t>● HC es 5–10× más rápido, pero la calidad cae con n grande</a:t>
+            </a:r>
+          </a:p>
+        </p:txBody>
+      </p:sp>
+      <p:sp>
+        <p:nvSpPr>
+          <p:cNvPr id="6" name="CuadroTexto 5">
+            <a:extLst>
+              <a:ext uri="{FF2B5EF4-FFF2-40B4-BE49-F238E27FC236}">
+                <a16:creationId xmlns:a16="http://schemas.microsoft.com/office/drawing/2014/main" id="{3C50034F-09F5-44EA-9F8E-1F68D30B4471}"/>
+              </a:ext>
+            </a:extLst>
+          </p:cNvPr>
+          <p:cNvSpPr txBox="1"/>
+          <p:nvPr/>
+        </p:nvSpPr>
+        <p:spPr>
+          <a:xfrm>
+            <a:off x="635000" y="4445000"/>
+            <a:ext cx="7874000" cy="279400"/>
+          </a:xfrm>
+          <a:prstGeom prst="rect">
+            <a:avLst/>
+          </a:prstGeom>
+          <a:noFill/>
+        </p:spPr>
+        <p:txBody>
+          <a:bodyPr vertOverflow="overflow" vert="horz" wrap="square" rtlCol="0" anchor="t">
+            <a:noAutofit/>
+          </a:bodyPr>
+          <a:lstStyle/>
+          <a:p>
+            <a:pPr algn="l"/>
+            <a:r>
+              <a:rPr lang="es-MX" sz="1200" b="1">
+                <a:solidFill>
+                  <a:srgbClr val="FFFFFF"/>
+                </a:solidFill>
+              </a:rPr>
+              <a:t>● SA paga tiempo extra a cambio de calidad</a:t>
+            </a:r>
+          </a:p>
+        </p:txBody>
+      </p:sp>
+      <p:pic>
+        <p:nvPicPr>
+          <p:cNvPr id="7" name="Imagen 6">
+            <a:extLst>
+              <a:ext uri="{FF2B5EF4-FFF2-40B4-BE49-F238E27FC236}">
+                <a16:creationId xmlns:a16="http://schemas.microsoft.com/office/drawing/2014/main" id="{8331E8A4-397D-0079-95D0-50BD9BB5E515}"/>
+              </a:ext>
+            </a:extLst>
+          </p:cNvPr>
+          <p:cNvPicPr>
+            <a:picLocks noChangeAspect="1"/>
+          </p:cNvPicPr>
+          <p:nvPr/>
+        </p:nvPicPr>
+        <p:blipFill>
+          <a:blip r:embed="rId2"/>
+          <a:stretch>
+            <a:fillRect/>
+          </a:stretch>
+        </p:blipFill>
+        <p:spPr>
+          <a:xfrm>
+            <a:off x="254000" y="698500"/>
+            <a:ext cx="4318000" cy="2921000"/>
+          </a:xfrm>
+          <a:prstGeom prst="rect">
+            <a:avLst/>
+          </a:prstGeom>
+        </p:spPr>
+      </p:pic>
+      <p:pic>
+        <p:nvPicPr>
+          <p:cNvPr id="8" name="Imagen 7">
+            <a:extLst>
+              <a:ext uri="{FF2B5EF4-FFF2-40B4-BE49-F238E27FC236}">
+                <a16:creationId xmlns:a16="http://schemas.microsoft.com/office/drawing/2014/main" id="{1E13D1BC-3766-BAC1-EA2E-94B5FB295741}"/>
+              </a:ext>
+            </a:extLst>
+          </p:cNvPr>
+          <p:cNvPicPr>
+            <a:picLocks noChangeAspect="1"/>
+          </p:cNvPicPr>
+          <p:nvPr/>
+        </p:nvPicPr>
+        <p:blipFill>
+          <a:blip r:embed="rId3"/>
+          <a:stretch>
+            <a:fillRect/>
+          </a:stretch>
+        </p:blipFill>
+        <p:spPr>
+          <a:xfrm>
+            <a:off x="4572000" y="698500"/>
+            <a:ext cx="4318000" cy="2921000"/>
+          </a:xfrm>
+          <a:prstGeom prst="rect">
+            <a:avLst/>
+          </a:prstGeom>
+        </p:spPr>
+      </p:pic>
+    </p:spTree>
+    <p:extLst>
+      <p:ext uri="{BB962C8B-B14F-4D97-AF65-F5344CB8AC3E}">
+        <p14:creationId xmlns:p14="http://schemas.microsoft.com/office/powerpoint/2010/main" val="973222776"/>
+      </p:ext>
+    </p:extLst>
+  </p:cSld>
+  <p:clrMapOvr>
+    <a:masterClrMapping/>
+  </p:clrMapOvr>
+</p:sld>
+</file>
+
+<file path=ppt/slides/slide9.xml><?xml version="1.0" encoding="utf-8"?>
+<p:sld xmlns:a="http://schemas.openxmlformats.org/drawingml/2006/main" xmlns:r="http://schemas.openxmlformats.org/officeDocument/2006/relationships" xmlns:p="http://schemas.openxmlformats.org/presentationml/2006/main">
+  <p:cSld>
+    <p:spTree>
+      <p:nvGrpSpPr>
+        <p:cNvPr id="1" name=""/>
+        <p:cNvGrpSpPr/>
+        <p:nvPr/>
+      </p:nvGrpSpPr>
+      <p:grpSpPr>
+        <a:xfrm>
+          <a:off x="0" y="0"/>
+          <a:ext cx="0" cy="0"/>
+          <a:chOff x="0" y="0"/>
+          <a:chExt cx="0" cy="0"/>
+        </a:xfrm>
+      </p:grpSpPr>
+      <p:sp>
+        <p:nvSpPr>
+          <p:cNvPr id="2" name="CuadroTexto 1">
+            <a:extLst>
+              <a:ext uri="{FF2B5EF4-FFF2-40B4-BE49-F238E27FC236}">
+                <a16:creationId xmlns:a16="http://schemas.microsoft.com/office/drawing/2014/main" id="{11EFE568-701B-4E4E-A9FA-A9F3FB7D2101}"/>
+              </a:ext>
+            </a:extLst>
+          </p:cNvPr>
+          <p:cNvSpPr txBox="1"/>
+          <p:nvPr/>
+        </p:nvSpPr>
+        <p:spPr>
+          <a:xfrm>
+            <a:off x="508000" y="228600"/>
+            <a:ext cx="8128000" cy="355600"/>
+          </a:xfrm>
+          <a:prstGeom prst="rect">
+            <a:avLst/>
+          </a:prstGeom>
+          <a:noFill/>
+        </p:spPr>
+        <p:txBody>
+          <a:bodyPr vertOverflow="overflow" vert="horz" wrap="square" rtlCol="0" anchor="t">
+            <a:noAutofit/>
+          </a:bodyPr>
+          <a:lstStyle/>
+          <a:p>
+            <a:pPr algn="l"/>
+            <a:r>
+              <a:rPr lang="es-MX" sz="2200" b="1">
+                <a:solidFill>
+                  <a:srgbClr val="030920"/>
+                </a:solidFill>
+              </a:rPr>
+              <a:t>Análisis de hiperparámetros</a:t>
+            </a:r>
+          </a:p>
+        </p:txBody>
+      </p:sp>
+      <p:sp>
+        <p:nvSpPr>
+          <p:cNvPr id="3" name="Rectángulo 2">
+            <a:extLst>
+              <a:ext uri="{FF2B5EF4-FFF2-40B4-BE49-F238E27FC236}">
+                <a16:creationId xmlns:a16="http://schemas.microsoft.com/office/drawing/2014/main" id="{7B209943-16E2-4A49-B3BB-A3B7972D1202}"/>
+              </a:ext>
+            </a:extLst>
+          </p:cNvPr>
+          <p:cNvSpPr/>
+          <p:nvPr/>
+        </p:nvSpPr>
+        <p:spPr>
+          <a:xfrm>
+            <a:off x="317500" y="3873500"/>
+            <a:ext cx="2794000" cy="1016000"/>
+          </a:xfrm>
+          <a:prstGeom prst="rect">
+            <a:avLst/>
+          </a:prstGeom>
+          <a:solidFill>
+            <a:srgbClr val="1A2238"/>
+          </a:solidFill>
+          <a:ln w="12700" cap="flat" cmpd="sng" algn="ctr">
+            <a:solidFill>
+              <a:srgbClr val="1F77B4"/>
+            </a:solidFill>
+            <a:prstDash val="solid"/>
+          </a:ln>
+        </p:spPr>
+        <p:style>
+          <a:lnRef idx="2">
+            <a:schemeClr val="accent1">
+              <a:shade val="15000"/>
+            </a:schemeClr>
+          </a:lnRef>
+          <a:fillRef idx="1">
+            <a:schemeClr val="accent1"/>
+          </a:fillRef>
+          <a:effectRef idx="0">
+            <a:schemeClr val="accent1"/>
+          </a:effectRef>
+          <a:fontRef idx="minor">
+            <a:schemeClr val="lt1"/>
+          </a:fontRef>
+        </p:style>
+        <p:txBody>
+          <a:bodyPr vertOverflow="clip" horzOverflow="clip" rtlCol="0" anchor="t"/>
+          <a:lstStyle/>
+          <a:p>
+            <a:pPr algn="l"/>
+            <a:endParaRPr lang="es-MX"/>
+          </a:p>
+        </p:txBody>
+      </p:sp>
+      <p:sp>
+        <p:nvSpPr>
+          <p:cNvPr id="4" name="CuadroTexto 3">
+            <a:extLst>
+              <a:ext uri="{FF2B5EF4-FFF2-40B4-BE49-F238E27FC236}">
+                <a16:creationId xmlns:a16="http://schemas.microsoft.com/office/drawing/2014/main" id="{B55DCD32-965F-4AE0-8367-5A1E572F1621}"/>
+              </a:ext>
+            </a:extLst>
+          </p:cNvPr>
+          <p:cNvSpPr txBox="1"/>
+          <p:nvPr/>
+        </p:nvSpPr>
+        <p:spPr>
+          <a:xfrm>
+            <a:off x="381000" y="3937000"/>
+            <a:ext cx="2667000" cy="228600"/>
+          </a:xfrm>
+          <a:prstGeom prst="rect">
+            <a:avLst/>
+          </a:prstGeom>
+          <a:noFill/>
+        </p:spPr>
+        <p:txBody>
+          <a:bodyPr vertOverflow="overflow" vert="horz" wrap="square" rtlCol="0" anchor="t">
+            <a:noAutofit/>
+          </a:bodyPr>
+          <a:lstStyle/>
+          <a:p>
+            <a:pPr algn="l"/>
+            <a:r>
+              <a:rPr lang="es-MX" sz="1100" b="1">
+                <a:solidFill>
+                  <a:srgbClr val="1F77B4"/>
+                </a:solidFill>
+              </a:rPr>
+              <a:t>T₀ — Temperatura inicial</a:t>
+            </a:r>
+          </a:p>
+        </p:txBody>
+      </p:sp>
+      <p:sp>
+        <p:nvSpPr>
+          <p:cNvPr id="5" name="CuadroTexto 4">
+            <a:extLst>
+              <a:ext uri="{FF2B5EF4-FFF2-40B4-BE49-F238E27FC236}">
+                <a16:creationId xmlns:a16="http://schemas.microsoft.com/office/drawing/2014/main" id="{67C3E3A2-1717-4D2B-BFC0-F059B8E840AD}"/>
+              </a:ext>
+            </a:extLst>
+          </p:cNvPr>
+          <p:cNvSpPr txBox="1"/>
+          <p:nvPr/>
+        </p:nvSpPr>
+        <p:spPr>
+          <a:xfrm>
+            <a:off x="381000" y="4165600"/>
+            <a:ext cx="2667000" cy="698500"/>
+          </a:xfrm>
+          <a:prstGeom prst="rect">
+            <a:avLst/>
+          </a:prstGeom>
+          <a:noFill/>
+        </p:spPr>
+        <p:txBody>
+          <a:bodyPr vertOverflow="overflow" vert="horz" wrap="square" rtlCol="0" anchor="t">
+            <a:noAutofit/>
+          </a:bodyPr>
+          <a:lstStyle/>
+          <a:p>
+            <a:pPr algn="l"/>
+            <a:r>
+              <a:rPr lang="es-MX" sz="1100">
+                <a:solidFill>
+                  <a:srgbClr val="FFFFFF"/>
+                </a:solidFill>
+              </a:rPr>
+              <a:t>T₀ muy baja = no explora.
+Encima de ~20 la calidad
+es estable.</a:t>
+            </a:r>
+          </a:p>
+        </p:txBody>
+      </p:sp>
+      <p:sp>
+        <p:nvSpPr>
+          <p:cNvPr id="6" name="Rectángulo 5">
+            <a:extLst>
+              <a:ext uri="{FF2B5EF4-FFF2-40B4-BE49-F238E27FC236}">
+                <a16:creationId xmlns:a16="http://schemas.microsoft.com/office/drawing/2014/main" id="{AE6F5A26-A3F6-4296-B1F6-71F054F35420}"/>
+              </a:ext>
+            </a:extLst>
+          </p:cNvPr>
+          <p:cNvSpPr/>
+          <p:nvPr/>
+        </p:nvSpPr>
+        <p:spPr>
+          <a:xfrm>
+            <a:off x="3175000" y="3873500"/>
+            <a:ext cx="2794000" cy="1016000"/>
+          </a:xfrm>
+          <a:prstGeom prst="rect">
+            <a:avLst/>
+          </a:prstGeom>
+          <a:solidFill>
+            <a:srgbClr val="1A2238"/>
+          </a:solidFill>
+          <a:ln w="12700" cap="flat" cmpd="sng" algn="ctr">
+            <a:solidFill>
+              <a:srgbClr val="1F77B4"/>
+            </a:solidFill>
+            <a:prstDash val="solid"/>
+          </a:ln>
+        </p:spPr>
+        <p:style>
+          <a:lnRef idx="2">
+            <a:schemeClr val="accent1">
+              <a:shade val="15000"/>
+            </a:schemeClr>
+          </a:lnRef>
+          <a:fillRef idx="1">
+            <a:schemeClr val="accent1"/>
+          </a:fillRef>
+          <a:effectRef idx="0">
+            <a:schemeClr val="accent1"/>
+          </a:effectRef>
+          <a:fontRef idx="minor">
+            <a:schemeClr val="lt1"/>
+          </a:fontRef>
+        </p:style>
+        <p:txBody>
+          <a:bodyPr vertOverflow="clip" horzOverflow="clip" rtlCol="0" anchor="t"/>
+          <a:lstStyle/>
+          <a:p>
+            <a:pPr algn="l"/>
+            <a:endParaRPr lang="es-MX"/>
+          </a:p>
+        </p:txBody>
+      </p:sp>
+      <p:sp>
+        <p:nvSpPr>
+          <p:cNvPr id="7" name="CuadroTexto 6">
+            <a:extLst>
+              <a:ext uri="{FF2B5EF4-FFF2-40B4-BE49-F238E27FC236}">
+                <a16:creationId xmlns:a16="http://schemas.microsoft.com/office/drawing/2014/main" id="{B0553B24-3061-452F-9455-8B8B13A7A8E8}"/>
+              </a:ext>
+            </a:extLst>
+          </p:cNvPr>
+          <p:cNvSpPr txBox="1"/>
+          <p:nvPr/>
+        </p:nvSpPr>
+        <p:spPr>
+          <a:xfrm>
+            <a:off x="3238500" y="3937000"/>
+            <a:ext cx="2667000" cy="228600"/>
+          </a:xfrm>
+          <a:prstGeom prst="rect">
+            <a:avLst/>
+          </a:prstGeom>
+          <a:noFill/>
+        </p:spPr>
+        <p:txBody>
+          <a:bodyPr vertOverflow="overflow" vert="horz" wrap="square" rtlCol="0" anchor="t">
+            <a:noAutofit/>
+          </a:bodyPr>
+          <a:lstStyle/>
+          <a:p>
+            <a:pPr algn="l"/>
+            <a:r>
+              <a:rPr lang="el-GR" sz="1100" b="1">
+                <a:solidFill>
+                  <a:srgbClr val="1F77B4"/>
+                </a:solidFill>
+              </a:rPr>
+              <a:t>α — </a:t>
+            </a:r>
+            <a:r>
+              <a:rPr lang="es-MX" sz="1100" b="1">
+                <a:solidFill>
+                  <a:srgbClr val="1F77B4"/>
+                </a:solidFill>
+              </a:rPr>
+              <a:t>Factor de enfriamiento</a:t>
+            </a:r>
+          </a:p>
+        </p:txBody>
+      </p:sp>
+      <p:sp>
+        <p:nvSpPr>
+          <p:cNvPr id="8" name="CuadroTexto 7">
+            <a:extLst>
+              <a:ext uri="{FF2B5EF4-FFF2-40B4-BE49-F238E27FC236}">
+                <a16:creationId xmlns:a16="http://schemas.microsoft.com/office/drawing/2014/main" id="{31C99255-C469-4B35-B04D-56B412991513}"/>
+              </a:ext>
+            </a:extLst>
+          </p:cNvPr>
+          <p:cNvSpPr txBox="1"/>
+          <p:nvPr/>
+        </p:nvSpPr>
+        <p:spPr>
+          <a:xfrm>
+            <a:off x="3238500" y="4165600"/>
+            <a:ext cx="2667000" cy="698500"/>
+          </a:xfrm>
+          <a:prstGeom prst="rect">
+            <a:avLst/>
+          </a:prstGeom>
+          <a:noFill/>
+        </p:spPr>
+        <p:txBody>
+          <a:bodyPr vertOverflow="overflow" vert="horz" wrap="square" rtlCol="0" anchor="t">
+            <a:noAutofit/>
+          </a:bodyPr>
+          <a:lstStyle/>
+          <a:p>
+            <a:pPr algn="l"/>
+            <a:r>
+              <a:rPr lang="es-MX" sz="1000">
+                <a:solidFill>
+                  <a:srgbClr val="FFFFFF"/>
+                </a:solidFill>
+              </a:rPr>
+              <a:t>Cerca de 1 = enfriamiento
+lento → mejor calidad
+pero más tiempo.
+Sweet spot: 0.99–0.995</a:t>
+            </a:r>
+          </a:p>
+        </p:txBody>
+      </p:sp>
+      <p:sp>
+        <p:nvSpPr>
+          <p:cNvPr id="9" name="Rectángulo 8">
+            <a:extLst>
+              <a:ext uri="{FF2B5EF4-FFF2-40B4-BE49-F238E27FC236}">
+                <a16:creationId xmlns:a16="http://schemas.microsoft.com/office/drawing/2014/main" id="{3F1432AE-A7D6-4331-8C18-E78B7739D6F3}"/>
+              </a:ext>
+            </a:extLst>
+          </p:cNvPr>
+          <p:cNvSpPr/>
+          <p:nvPr/>
+        </p:nvSpPr>
+        <p:spPr>
+          <a:xfrm>
+            <a:off x="6032500" y="3873500"/>
+            <a:ext cx="2794000" cy="1016000"/>
+          </a:xfrm>
+          <a:prstGeom prst="rect">
+            <a:avLst/>
+          </a:prstGeom>
+          <a:solidFill>
+            <a:srgbClr val="1A2238"/>
+          </a:solidFill>
+          <a:ln w="12700" cap="flat" cmpd="sng" algn="ctr">
+            <a:solidFill>
+              <a:srgbClr val="1F77B4"/>
+            </a:solidFill>
+            <a:prstDash val="solid"/>
+          </a:ln>
+        </p:spPr>
+        <p:style>
+          <a:lnRef idx="2">
+            <a:schemeClr val="accent1">
+              <a:shade val="15000"/>
+            </a:schemeClr>
+          </a:lnRef>
+          <a:fillRef idx="1">
+            <a:schemeClr val="accent1"/>
+          </a:fillRef>
+          <a:effectRef idx="0">
+            <a:schemeClr val="accent1"/>
+          </a:effectRef>
+          <a:fontRef idx="minor">
+            <a:schemeClr val="lt1"/>
+          </a:fontRef>
+        </p:style>
+        <p:txBody>
+          <a:bodyPr vertOverflow="clip" horzOverflow="clip" rtlCol="0" anchor="t"/>
+          <a:lstStyle/>
+          <a:p>
+            <a:pPr algn="l"/>
+            <a:endParaRPr lang="es-MX"/>
+          </a:p>
+        </p:txBody>
+      </p:sp>
+      <p:sp>
+        <p:nvSpPr>
+          <p:cNvPr id="10" name="CuadroTexto 9">
+            <a:extLst>
+              <a:ext uri="{FF2B5EF4-FFF2-40B4-BE49-F238E27FC236}">
+                <a16:creationId xmlns:a16="http://schemas.microsoft.com/office/drawing/2014/main" id="{AB56CC49-31F6-4DF8-8FA6-7E183A61DACA}"/>
+              </a:ext>
+            </a:extLst>
+          </p:cNvPr>
+          <p:cNvSpPr txBox="1"/>
+          <p:nvPr/>
+        </p:nvSpPr>
+        <p:spPr>
+          <a:xfrm>
+            <a:off x="6096000" y="3937000"/>
+            <a:ext cx="2667000" cy="228600"/>
+          </a:xfrm>
+          <a:prstGeom prst="rect">
+            <a:avLst/>
+          </a:prstGeom>
+          <a:noFill/>
+        </p:spPr>
+        <p:txBody>
+          <a:bodyPr vertOverflow="overflow" vert="horz" wrap="square" rtlCol="0" anchor="t">
+            <a:noAutofit/>
+          </a:bodyPr>
+          <a:lstStyle/>
+          <a:p>
+            <a:pPr algn="l"/>
+            <a:r>
+              <a:rPr lang="es-MX" sz="1100" b="1">
+                <a:solidFill>
+                  <a:srgbClr val="1F77B4"/>
+                </a:solidFill>
+              </a:rPr>
+              <a:t>iter_por_T — Iteraciones</a:t>
+            </a:r>
+          </a:p>
+        </p:txBody>
+      </p:sp>
+      <p:sp>
+        <p:nvSpPr>
+          <p:cNvPr id="11" name="CuadroTexto 10">
+            <a:extLst>
+              <a:ext uri="{FF2B5EF4-FFF2-40B4-BE49-F238E27FC236}">
+                <a16:creationId xmlns:a16="http://schemas.microsoft.com/office/drawing/2014/main" id="{023399BA-954B-4F5C-BD9F-4C2A7A3B4A27}"/>
+              </a:ext>
+            </a:extLst>
+          </p:cNvPr>
+          <p:cNvSpPr txBox="1"/>
+          <p:nvPr/>
+        </p:nvSpPr>
+        <p:spPr>
+          <a:xfrm>
+            <a:off x="6096000" y="4165600"/>
+            <a:ext cx="2667000" cy="698500"/>
+          </a:xfrm>
+          <a:prstGeom prst="rect">
+            <a:avLst/>
+          </a:prstGeom>
+          <a:noFill/>
+        </p:spPr>
+        <p:txBody>
+          <a:bodyPr vertOverflow="overflow" vert="horz" wrap="square" rtlCol="0" anchor="t">
+            <a:noAutofit/>
+          </a:bodyPr>
+          <a:lstStyle/>
+          <a:p>
+            <a:pPr algn="l"/>
+            <a:r>
+              <a:rPr lang="es-MX" sz="1100">
+                <a:solidFill>
+                  <a:srgbClr val="FFFFFF"/>
+                </a:solidFill>
+              </a:rPr>
+              <a:t>Subir el valor mejora
+calidad, pero el costo
+es lineal.</a:t>
+            </a:r>
+          </a:p>
+        </p:txBody>
+      </p:sp>
+      <p:pic>
+        <p:nvPicPr>
+          <p:cNvPr id="12" name="Imagen 11">
+            <a:extLst>
+              <a:ext uri="{FF2B5EF4-FFF2-40B4-BE49-F238E27FC236}">
+                <a16:creationId xmlns:a16="http://schemas.microsoft.com/office/drawing/2014/main" id="{215E1182-9A1A-3393-5413-3DA6B0D3D7D1}"/>
+              </a:ext>
+            </a:extLst>
+          </p:cNvPr>
+          <p:cNvPicPr>
+            <a:picLocks noChangeAspect="1"/>
+          </p:cNvPicPr>
+          <p:nvPr/>
+        </p:nvPicPr>
+        <p:blipFill>
+          <a:blip r:embed="rId2"/>
+          <a:stretch>
+            <a:fillRect/>
+          </a:stretch>
+        </p:blipFill>
+        <p:spPr>
+          <a:xfrm>
+            <a:off x="317500" y="635000"/>
+            <a:ext cx="2794000" cy="3048000"/>
+          </a:xfrm>
+          <a:prstGeom prst="rect">
+            <a:avLst/>
+          </a:prstGeom>
+        </p:spPr>
+      </p:pic>
+      <p:pic>
+        <p:nvPicPr>
+          <p:cNvPr id="13" name="Imagen 12">
+            <a:extLst>
+              <a:ext uri="{FF2B5EF4-FFF2-40B4-BE49-F238E27FC236}">
+                <a16:creationId xmlns:a16="http://schemas.microsoft.com/office/drawing/2014/main" id="{DCDF0FA3-403D-3C2D-2F24-0E62849E869E}"/>
+              </a:ext>
+            </a:extLst>
+          </p:cNvPr>
+          <p:cNvPicPr>
+            <a:picLocks noChangeAspect="1"/>
+          </p:cNvPicPr>
+          <p:nvPr/>
+        </p:nvPicPr>
+        <p:blipFill>
+          <a:blip r:embed="rId3"/>
+          <a:stretch>
+            <a:fillRect/>
+          </a:stretch>
+        </p:blipFill>
+        <p:spPr>
+          <a:xfrm>
+            <a:off x="3175000" y="635000"/>
+            <a:ext cx="2794000" cy="3048000"/>
+          </a:xfrm>
+          <a:prstGeom prst="rect">
+            <a:avLst/>
+          </a:prstGeom>
+        </p:spPr>
+      </p:pic>
+      <p:pic>
+        <p:nvPicPr>
+          <p:cNvPr id="14" name="Imagen 13">
+            <a:extLst>
+              <a:ext uri="{FF2B5EF4-FFF2-40B4-BE49-F238E27FC236}">
+                <a16:creationId xmlns:a16="http://schemas.microsoft.com/office/drawing/2014/main" id="{B854E6BD-A605-74C1-D532-7F907AAB16E0}"/>
+              </a:ext>
+            </a:extLst>
+          </p:cNvPr>
+          <p:cNvPicPr>
+            <a:picLocks noChangeAspect="1"/>
+          </p:cNvPicPr>
+          <p:nvPr/>
+        </p:nvPicPr>
+        <p:blipFill>
+          <a:blip r:embed="rId4"/>
+          <a:stretch>
+            <a:fillRect/>
+          </a:stretch>
+        </p:blipFill>
+        <p:spPr>
+          <a:xfrm>
+            <a:off x="6032500" y="635000"/>
+            <a:ext cx="2794000" cy="3048000"/>
+          </a:xfrm>
+          <a:prstGeom prst="rect">
+            <a:avLst/>
+          </a:prstGeom>
+        </p:spPr>
+      </p:pic>
+    </p:spTree>
+    <p:extLst>
+      <p:ext uri="{BB962C8B-B14F-4D97-AF65-F5344CB8AC3E}">
+        <p14:creationId xmlns:p14="http://schemas.microsoft.com/office/powerpoint/2010/main" val="2670300096"/>
+      </p:ext>
+    </p:extLst>
   </p:cSld>
   <p:clrMapOvr>
     <a:masterClrMapping/>
@@ -11534,7 +12840,7 @@
 
 <file path=ppt/webextensions/taskpanes.xml><?xml version="1.0" encoding="utf-8"?>
 <wetp:taskpanes xmlns:wetp="http://schemas.microsoft.com/office/webextensions/taskpanes/2010/11">
-  <wetp:taskpane dockstate="right" visibility="0" width="438" row="0">
+  <wetp:taskpane dockstate="right" visibility="0" width="434" row="0">
     <wetp:webextensionref xmlns:r="http://schemas.openxmlformats.org/officeDocument/2006/relationships" r:id="rId1"/>
   </wetp:taskpane>
 </wetp:taskpanes>
